--- a/slides/pptx/week02.pptx
+++ b/slides/pptx/week02.pptx
@@ -20,9 +20,11 @@
     <p:sldId id="268" r:id="rId14"/>
     <p:sldId id="269" r:id="rId15"/>
     <p:sldId id="270" r:id="rId16"/>
+    <p:sldId id="271" r:id="rId17"/>
+    <p:sldId id="272" r:id="rId18"/>
   </p:sldIdLst>
   <p:notesMasterIdLst>
-    <p:notesMasterId r:id="rId17"/>
+    <p:notesMasterId r:id="rId19"/>
   </p:notesMasterIdLst>
   <p:sldSz cx="9144000" cy="5143500"/>
   <p:notesSz cx="5143500" cy="9144000"/>
@@ -604,7 +606,7 @@
           <a:p>
             <a:r>
               <a:rPr lang="en-US" dirty="0"/>
-              <a:t>Name the real tools they'll see in industry/internships. SonarQube = quality gate; GHAS = security native in GitHub. Connect "technical debt" to the cost curve from the recap. ~3 min.</a:t>
+              <a:t>Crucial professional skill: a scanner that cries wolf gets ignored. Show a likely false positive vs a real one. Teach: every finding gets a CWE + a TP/FP call + a one-line justification. ~4 min.</a:t>
             </a:r>
             <a:endParaRPr lang="en-US" dirty="0"/>
           </a:p>
@@ -692,7 +694,7 @@
           <a:p>
             <a:r>
               <a:rPr lang="en-US" dirty="0"/>
-              <a:t>Explain the game before lab: speed + accuracy. Penalize wild guessing (misclassified subtracts) so they must justify each finding. Mirrors a real bug-bounty triage queue. ~3 min.</a:t>
+              <a:t>Trivy is the one they'll type today (Task 5, scanning the NoteVault target) — say so explicitly so "tools you'll meet" doesn't read as "tools this lab uses." SonarQube/GHAS are real-world awareness. Connect "technical debt" to the cost curve from the recap. ~3 min.</a:t>
             </a:r>
             <a:endParaRPr lang="en-US" dirty="0"/>
           </a:p>
@@ -780,7 +782,7 @@
           <a:p>
             <a:r>
               <a:rPr lang="en-US" dirty="0"/>
-              <a:t>Quick, fun, instant feedback (it crashes or it doesn't). Sets up W11. If short on time, make this a demo. ~2 min.</a:t>
+              <a:t>Explain the game before lab: speed + accuracy. Penalize wild guessing (misclassified subtracts) so they must justify each finding. Mirrors a real bug-bounty triage queue. Warn about the two gotchas up front: Gitleaks needs `--no-git` or it silently reports zero leaks; the repo root's own `.gitleaks.toml` deliberately allowlists this lab's secrets, so scan `vulnerable-repo/` specifically, not the repo root. ~3 min.</a:t>
             </a:r>
             <a:endParaRPr lang="en-US" dirty="0"/>
           </a:p>
@@ -868,7 +870,7 @@
           <a:p>
             <a:r>
               <a:rPr lang="en-US" dirty="0"/>
-              <a:t>The graded output. Remind them to also scan the NoteVault project target (worksheet task) and to do the AI-resilient tasks. Point to scan.sh.</a:t>
+              <a:t>Quick, fun, instant feedback (it crashes or it doesn't). Sets up W11. If short on time, make this a demo. ~2 min.</a:t>
             </a:r>
             <a:endParaRPr lang="en-US" dirty="0"/>
           </a:p>
@@ -956,7 +958,7 @@
           <a:p>
             <a:r>
               <a:rPr lang="en-US" dirty="0"/>
-              <a:t>Recap, 3 lines. Cold-call: "name a bug SAST would miss but DAST would catch." ~2 min.</a:t>
+              <a:t>The graded output — six tasks, not three. The defend/fix task (25 pts, "Defense") is the single biggest score component and is easy to undersell if you only recap the triage table. Point to scan.sh.</a:t>
             </a:r>
             <a:endParaRPr lang="en-US" dirty="0"/>
           </a:p>
@@ -1044,7 +1046,7 @@
           <a:p>
             <a:r>
               <a:rPr lang="en-US" dirty="0"/>
-              <a:t>Cliffhanger: "Next week we break crypto — crack passwords and decrypt a secret in minutes." Remind: scanners ready in their VM.</a:t>
+              <a:t>The graded output — six tasks, not three. The defend/fix task (25 pts, "Defense") is the single biggest score component and is easy to undersell if you only recap the triage table. Point to scan.sh.</a:t>
             </a:r>
             <a:endParaRPr lang="en-US" dirty="0"/>
           </a:p>
@@ -1068,6 +1070,182 @@
             <a:fld id="{F7021451-1387-4CA6-816F-3879F97B5CBC}" type="slidenum">
               <a:rPr lang="en-US"/>
               <a:t>15</a:t>
+            </a:fld>
+            <a:endParaRPr lang="en-US"/>
+          </a:p>
+        </p:txBody>
+      </p:sp>
+    </p:spTree>
+    <p:extLst>
+      <p:ext uri="{BB962C8B-B14F-4D97-AF65-F5344CB8AC3E}">
+        <p14:creationId xmlns:p14="http://schemas.microsoft.com/office/powerpoint/2010/main" val="1024086991"/>
+      </p:ext>
+    </p:extLst>
+  </p:cSld>
+  <p:clrMapOvr>
+    <a:masterClrMapping/>
+  </p:clrMapOvr>
+</p:notes>
+</file>
+
+<file path=ppt/notesSlides/notesSlide16.xml><?xml version="1.0" encoding="utf-8"?>
+<p:notes xmlns:a="http://schemas.openxmlformats.org/drawingml/2006/main" xmlns:r="http://schemas.openxmlformats.org/officeDocument/2006/relationships" xmlns:p="http://schemas.openxmlformats.org/presentationml/2006/main">
+  <p:cSld>
+    <p:spTree>
+      <p:nvGrpSpPr>
+        <p:cNvPr id="1" name=""/>
+        <p:cNvGrpSpPr/>
+        <p:nvPr/>
+      </p:nvGrpSpPr>
+      <p:grpSpPr>
+        <a:xfrm>
+          <a:off x="0" y="0"/>
+          <a:ext cx="0" cy="0"/>
+          <a:chOff x="0" y="0"/>
+          <a:chExt cx="0" cy="0"/>
+        </a:xfrm>
+      </p:grpSpPr>
+      <p:sp>
+        <p:nvSpPr>
+          <p:cNvPr id="2" name="Slide Image Placeholder 1"/>
+          <p:cNvSpPr>
+            <a:spLocks noGrp="1" noRot="1" noChangeAspect="1"/>
+          </p:cNvSpPr>
+          <p:nvPr>
+            <p:ph type="sldImg"/>
+          </p:nvPr>
+        </p:nvSpPr>
+        <p:spPr/>
+      </p:sp>
+      <p:sp>
+        <p:nvSpPr>
+          <p:cNvPr id="3" name="Notes Placeholder 2"/>
+          <p:cNvSpPr>
+            <a:spLocks noGrp="1"/>
+          </p:cNvSpPr>
+          <p:nvPr>
+            <p:ph type="body" idx="1"/>
+          </p:nvPr>
+        </p:nvSpPr>
+        <p:spPr/>
+        <p:txBody>
+          <a:bodyPr/>
+          <a:lstStyle/>
+          <a:p>
+            <a:r>
+              <a:rPr lang="en-US" dirty="0"/>
+              <a:t>Recap, 3 lines. Cold-call: "name a bug SAST would miss but DAST would catch." ~2 min.</a:t>
+            </a:r>
+            <a:endParaRPr lang="en-US" dirty="0"/>
+          </a:p>
+        </p:txBody>
+      </p:sp>
+      <p:sp>
+        <p:nvSpPr>
+          <p:cNvPr id="4" name="Slide Number Placeholder 3"/>
+          <p:cNvSpPr>
+            <a:spLocks noGrp="1"/>
+          </p:cNvSpPr>
+          <p:nvPr>
+            <p:ph type="sldNum" sz="quarter" idx="10"/>
+          </p:nvPr>
+        </p:nvSpPr>
+        <p:spPr/>
+        <p:txBody>
+          <a:bodyPr/>
+          <a:lstStyle/>
+          <a:p>
+            <a:fld id="{F7021451-1387-4CA6-816F-3879F97B5CBC}" type="slidenum">
+              <a:rPr lang="en-US"/>
+              <a:t>16</a:t>
+            </a:fld>
+            <a:endParaRPr lang="en-US"/>
+          </a:p>
+        </p:txBody>
+      </p:sp>
+    </p:spTree>
+    <p:extLst>
+      <p:ext uri="{BB962C8B-B14F-4D97-AF65-F5344CB8AC3E}">
+        <p14:creationId xmlns:p14="http://schemas.microsoft.com/office/powerpoint/2010/main" val="1024086991"/>
+      </p:ext>
+    </p:extLst>
+  </p:cSld>
+  <p:clrMapOvr>
+    <a:masterClrMapping/>
+  </p:clrMapOvr>
+</p:notes>
+</file>
+
+<file path=ppt/notesSlides/notesSlide17.xml><?xml version="1.0" encoding="utf-8"?>
+<p:notes xmlns:a="http://schemas.openxmlformats.org/drawingml/2006/main" xmlns:r="http://schemas.openxmlformats.org/officeDocument/2006/relationships" xmlns:p="http://schemas.openxmlformats.org/presentationml/2006/main">
+  <p:cSld>
+    <p:spTree>
+      <p:nvGrpSpPr>
+        <p:cNvPr id="1" name=""/>
+        <p:cNvGrpSpPr/>
+        <p:nvPr/>
+      </p:nvGrpSpPr>
+      <p:grpSpPr>
+        <a:xfrm>
+          <a:off x="0" y="0"/>
+          <a:ext cx="0" cy="0"/>
+          <a:chOff x="0" y="0"/>
+          <a:chExt cx="0" cy="0"/>
+        </a:xfrm>
+      </p:grpSpPr>
+      <p:sp>
+        <p:nvSpPr>
+          <p:cNvPr id="2" name="Slide Image Placeholder 1"/>
+          <p:cNvSpPr>
+            <a:spLocks noGrp="1" noRot="1" noChangeAspect="1"/>
+          </p:cNvSpPr>
+          <p:nvPr>
+            <p:ph type="sldImg"/>
+          </p:nvPr>
+        </p:nvSpPr>
+        <p:spPr/>
+      </p:sp>
+      <p:sp>
+        <p:nvSpPr>
+          <p:cNvPr id="3" name="Notes Placeholder 2"/>
+          <p:cNvSpPr>
+            <a:spLocks noGrp="1"/>
+          </p:cNvSpPr>
+          <p:nvPr>
+            <p:ph type="body" idx="1"/>
+          </p:nvPr>
+        </p:nvSpPr>
+        <p:spPr/>
+        <p:txBody>
+          <a:bodyPr/>
+          <a:lstStyle/>
+          <a:p>
+            <a:r>
+              <a:rPr lang="en-US" dirty="0"/>
+              <a:t>Cliffhanger: "Next week we break crypto — crack passwords and decrypt a secret in minutes." Remind: scanners ready in their VM.</a:t>
+            </a:r>
+            <a:endParaRPr lang="en-US" dirty="0"/>
+          </a:p>
+        </p:txBody>
+      </p:sp>
+      <p:sp>
+        <p:nvSpPr>
+          <p:cNvPr id="4" name="Slide Number Placeholder 3"/>
+          <p:cNvSpPr>
+            <a:spLocks noGrp="1"/>
+          </p:cNvSpPr>
+          <p:nvPr>
+            <p:ph type="sldNum" sz="quarter" idx="10"/>
+          </p:nvPr>
+        </p:nvSpPr>
+        <p:spPr/>
+        <p:txBody>
+          <a:bodyPr/>
+          <a:lstStyle/>
+          <a:p>
+            <a:fld id="{F7021451-1387-4CA6-816F-3879F97B5CBC}" type="slidenum">
+              <a:rPr lang="en-US"/>
+              <a:t>17</a:t>
             </a:fld>
             <a:endParaRPr lang="en-US"/>
           </a:p>
@@ -1660,7 +1838,7 @@
           <a:p>
             <a:r>
               <a:rPr lang="en-US" dirty="0"/>
-              <a:t>Fuzzing is the highest-yield bug finder in industry (most memory CVEs come from it). Explain coverage-guided = the fuzzer "learns" inputs that reach new code. Deep dive + exploit comes in W11. ~5 min.</a:t>
+              <a:t>The make-it-concrete slide — point at the exact lines each tool fires on. This is the `vulnerable-repo/app.py` they'll scan in the lab. Ask: "which tool finds the secret? which finds the SQLi? could one tool find both?" ~6 min.</a:t>
             </a:r>
             <a:endParaRPr lang="en-US" dirty="0"/>
           </a:p>
@@ -1748,7 +1926,7 @@
           <a:p>
             <a:r>
               <a:rPr lang="en-US" dirty="0"/>
-              <a:t>Crucial professional skill: a scanner that cries wolf gets ignored. Show a likely false positive vs a real one. Teach: every finding gets a CWE + a TP/FP call + a one-line justification. ~4 min.</a:t>
+              <a:t>Fuzzing is the highest-yield bug finder in industry (most memory CVEs come from it). Explain coverage-guided = the fuzzer "learns" inputs that reach new code. The seed corpus matters — unseeded, this exact harness crashes in roughly 1 of 6 short runs; seeded, it's reliable every time. Deep dive + exploit comes in W11. ~5 min.</a:t>
             </a:r>
             <a:endParaRPr lang="en-US" dirty="0"/>
           </a:p>
@@ -2381,7 +2559,7 @@
                 <a:ea typeface="Arial" pitchFamily="34" charset="-122"/>
                 <a:cs typeface="Arial" pitchFamily="34" charset="-120"/>
               </a:rPr>
-              <a:t>Tools you'll meet</a:t>
+              <a:t>Triage: not every finding is a bug</a:t>
             </a:r>
             <a:endParaRPr lang="en-US" sz="2600" dirty="0"/>
           </a:p>
@@ -2396,11 +2574,11 @@
         <p:spPr>
           <a:xfrm>
             <a:off x="457200" y="1325880"/>
-            <a:ext cx="8229600" cy="1207008"/>
+            <a:ext cx="8229600" cy="1517904"/>
           </a:xfrm>
           <a:prstGeom prst="roundRect">
             <a:avLst>
-              <a:gd name="adj" fmla="val 6061"/>
+              <a:gd name="adj" fmla="val 4819"/>
             </a:avLst>
           </a:prstGeom>
           <a:solidFill>
@@ -2425,7 +2603,7 @@
         <p:spPr>
           <a:xfrm>
             <a:off x="731520" y="1435608"/>
-            <a:ext cx="7680960" cy="987552"/>
+            <a:ext cx="7680960" cy="1298448"/>
           </a:xfrm>
           <a:prstGeom prst="rect">
             <a:avLst/>
@@ -2434,7 +2612,9 @@
           <a:ln/>
         </p:spPr>
         <p:txBody>
-          <a:bodyPr wrap="square" lIns="0" tIns="0" rIns="0" bIns="0" rtlCol="0" anchor="t"/>
+          <a:bodyPr wrap="square" lIns="0" tIns="0" rIns="0" bIns="0" rtlCol="0" anchor="t">
+            <a:normAutofit/>
+          </a:bodyPr>
           <a:lstStyle/>
           <a:p>
             <a:pPr marL="342900" indent="-342900">
@@ -2453,7 +2633,7 @@
                 <a:ea typeface="Calibri" pitchFamily="34" charset="-122"/>
                 <a:cs typeface="Calibri" pitchFamily="34" charset="-120"/>
               </a:rPr>
-              <a:t>SonarQube — code quality + SAST against the "7 axes" (bugs, duplication, complexity, coverage…)</a:t>
+              <a:t>True positive vs false positive</a:t>
             </a:r>
             <a:endParaRPr lang="en-US" sz="1400" dirty="0"/>
           </a:p>
@@ -2474,7 +2654,7 @@
                 <a:ea typeface="Calibri" pitchFamily="34" charset="-122"/>
                 <a:cs typeface="Calibri" pitchFamily="34" charset="-120"/>
               </a:rPr>
-              <a:t>GitHub Advanced Security (GHAS) — CodeQL + secret scanning + Dependabot, native in the repo</a:t>
+              <a:t>Map each to a CWE + severity</a:t>
             </a:r>
             <a:endParaRPr lang="en-US" sz="1400" dirty="0"/>
           </a:p>
@@ -2495,7 +2675,28 @@
                 <a:ea typeface="Calibri" pitchFamily="34" charset="-122"/>
                 <a:cs typeface="Calibri" pitchFamily="34" charset="-120"/>
               </a:rPr>
-              <a:t>Address technical debt early — cheaper than re-work later</a:t>
+              <a:t>Prioritize by exploitability × impact</a:t>
+            </a:r>
+            <a:endParaRPr lang="en-US" sz="1400" dirty="0"/>
+          </a:p>
+          <a:p>
+            <a:pPr marL="342900" indent="-342900">
+              <a:spcAft>
+                <a:spcPts val="600"/>
+              </a:spcAft>
+              <a:buSzPct val="100000"/>
+              <a:buChar char="•"/>
+            </a:pPr>
+            <a:r>
+              <a:rPr lang="en-US" sz="1400" dirty="0">
+                <a:solidFill>
+                  <a:srgbClr val="1F2937"/>
+                </a:solidFill>
+                <a:latin typeface="Calibri" pitchFamily="34" charset="0"/>
+                <a:ea typeface="Calibri" pitchFamily="34" charset="-122"/>
+                <a:cs typeface="Calibri" pitchFamily="34" charset="-120"/>
+              </a:rPr>
+              <a:t>Noise kills trust in tools — triage well</a:t>
             </a:r>
             <a:endParaRPr lang="en-US" sz="1400" dirty="0"/>
           </a:p>
@@ -2680,7 +2881,7 @@
                 <a:ea typeface="Arial" pitchFamily="34" charset="-122"/>
                 <a:cs typeface="Arial" pitchFamily="34" charset="-120"/>
               </a:rPr>
-              <a:t>🏁 Game — Bug Triage Race</a:t>
+              <a:t>Tools you'll meet</a:t>
             </a:r>
             <a:endParaRPr lang="en-US" sz="2600" dirty="0"/>
           </a:p>
@@ -2695,11 +2896,11 @@
         <p:spPr>
           <a:xfrm>
             <a:off x="457200" y="1325880"/>
-            <a:ext cx="8229600" cy="896112"/>
+            <a:ext cx="8229600" cy="1609344"/>
           </a:xfrm>
           <a:prstGeom prst="roundRect">
             <a:avLst>
-              <a:gd name="adj" fmla="val 8163"/>
+              <a:gd name="adj" fmla="val 4545"/>
             </a:avLst>
           </a:prstGeom>
           <a:solidFill>
@@ -2724,7 +2925,7 @@
         <p:spPr>
           <a:xfrm>
             <a:off x="731520" y="1435608"/>
-            <a:ext cx="7680960" cy="676656"/>
+            <a:ext cx="7680960" cy="1389888"/>
           </a:xfrm>
           <a:prstGeom prst="rect">
             <a:avLst/>
@@ -2733,7 +2934,9 @@
           <a:ln/>
         </p:spPr>
         <p:txBody>
-          <a:bodyPr wrap="square" lIns="0" tIns="0" rIns="0" bIns="0" rtlCol="0" anchor="t"/>
+          <a:bodyPr wrap="square" lIns="0" tIns="0" rIns="0" bIns="0" rtlCol="0" anchor="t">
+            <a:normAutofit/>
+          </a:bodyPr>
           <a:lstStyle/>
           <a:p>
             <a:pPr marL="342900" indent="-342900">
@@ -2752,7 +2955,7 @@
                 <a:ea typeface="Calibri" pitchFamily="34" charset="-122"/>
                 <a:cs typeface="Calibri" pitchFamily="34" charset="-120"/>
               </a:rPr>
-              <a:t>Run Semgrep + Gitleaks on the flawed repo</a:t>
+              <a:t>Trivy — the SCA scanner you'll actually run this lab (dependency scan today; image + IaC scanning return in W12/13)</a:t>
             </a:r>
             <a:endParaRPr lang="en-US" sz="1400" dirty="0"/>
           </a:p>
@@ -2773,128 +2976,66 @@
                 <a:ea typeface="Calibri" pitchFamily="34" charset="-122"/>
                 <a:cs typeface="Calibri" pitchFamily="34" charset="-120"/>
               </a:rPr>
-              <a:t>Score = true positives − misclassified · live scoreboard</a:t>
+              <a:t>SonarQube, GitHub Advanced Security (GHAS) — quality-gate/SAST-in-the-repo tools you'll see in industry/internships, not used in this lab</a:t>
             </a:r>
             <a:endParaRPr lang="en-US" sz="1400" dirty="0"/>
           </a:p>
-        </p:txBody>
-      </p:sp>
-      <p:sp>
-        <p:nvSpPr>
-          <p:cNvPr id="7" name="Shape 4"/>
-          <p:cNvSpPr/>
-          <p:nvPr/>
-        </p:nvSpPr>
-        <p:spPr>
-          <a:xfrm>
-            <a:off x="457200" y="2386584"/>
-            <a:ext cx="8229600" cy="786384"/>
-          </a:xfrm>
-          <a:prstGeom prst="roundRect">
-            <a:avLst>
-              <a:gd name="adj" fmla="val 6977"/>
-            </a:avLst>
-          </a:prstGeom>
-          <a:solidFill>
-            <a:srgbClr val="0A1020"/>
-          </a:solidFill>
-          <a:ln w="12700">
-            <a:solidFill>
-              <a:srgbClr val="E8EDF3"/>
-            </a:solidFill>
-            <a:prstDash val="solid"/>
-          </a:ln>
-        </p:spPr>
-      </p:sp>
-      <p:sp>
-        <p:nvSpPr>
-          <p:cNvPr id="8" name="Text 5"/>
-          <p:cNvSpPr/>
-          <p:nvPr/>
-        </p:nvSpPr>
-        <p:spPr>
-          <a:xfrm>
-            <a:off x="640080" y="2459736"/>
-            <a:ext cx="7863840" cy="640080"/>
-          </a:xfrm>
-          <a:prstGeom prst="rect">
-            <a:avLst/>
-          </a:prstGeom>
-          <a:noFill/>
-          <a:ln/>
-        </p:spPr>
-        <p:txBody>
-          <a:bodyPr wrap="square" lIns="0" tIns="0" rIns="0" bIns="0" rtlCol="0" anchor="t"/>
-          <a:lstStyle/>
-          <a:p>
-            <a:pPr indent="0" marL="0">
-              <a:buNone/>
-            </a:pPr>
-            <a:r>
-              <a:rPr lang="en-US" sz="1150" dirty="0">
-                <a:solidFill>
-                  <a:srgbClr val="9FE7D6"/>
-                </a:solidFill>
-                <a:latin typeface="Courier New" pitchFamily="34" charset="0"/>
-                <a:ea typeface="Courier New" pitchFamily="34" charset="-122"/>
-                <a:cs typeface="Courier New" pitchFamily="34" charset="-120"/>
-              </a:rPr>
-              <a:t>docker run --rm -v "$PWD:/src" semgrep/semgrep semgrep --config p/default /src</a:t>
-            </a:r>
-            <a:endParaRPr lang="en-US" sz="1150" dirty="0"/>
-          </a:p>
-          <a:p>
-            <a:pPr indent="0" marL="0">
-              <a:buNone/>
-            </a:pPr>
-            <a:r>
-              <a:rPr lang="en-US" sz="1150" dirty="0">
-                <a:solidFill>
-                  <a:srgbClr val="9FE7D6"/>
-                </a:solidFill>
-                <a:latin typeface="Courier New" pitchFamily="34" charset="0"/>
-                <a:ea typeface="Courier New" pitchFamily="34" charset="-122"/>
-                <a:cs typeface="Courier New" pitchFamily="34" charset="-120"/>
-              </a:rPr>
-              <a:t>docker run --rm -v "$PWD:/repo" zricethezav/gitleaks:latest detect -s /repo -v</a:t>
-            </a:r>
-            <a:endParaRPr lang="en-US" sz="1150" dirty="0"/>
-          </a:p>
-        </p:txBody>
-      </p:sp>
-      <p:sp>
-        <p:nvSpPr>
-          <p:cNvPr id="9" name="Text 6"/>
-          <p:cNvSpPr/>
-          <p:nvPr/>
-        </p:nvSpPr>
-        <p:spPr>
-          <a:xfrm>
-            <a:off x="457200" y="4800600"/>
-            <a:ext cx="6949440" cy="274320"/>
-          </a:xfrm>
-          <a:prstGeom prst="rect">
-            <a:avLst/>
-          </a:prstGeom>
-          <a:noFill/>
-          <a:ln/>
-        </p:spPr>
-        <p:txBody>
-          <a:bodyPr wrap="square" lIns="0" tIns="0" rIns="0" bIns="0" rtlCol="0" anchor="ctr"/>
-          <a:lstStyle/>
-          <a:p>
-            <a:pPr indent="0" marL="0">
-              <a:buNone/>
-            </a:pPr>
-            <a:r>
-              <a:rPr lang="en-US" sz="900" dirty="0">
-                <a:solidFill>
-                  <a:srgbClr val="64748B"/>
+          <a:p>
+            <a:pPr marL="342900" indent="-342900">
+              <a:spcAft>
+                <a:spcPts val="600"/>
+              </a:spcAft>
+              <a:buSzPct val="100000"/>
+              <a:buChar char="•"/>
+            </a:pPr>
+            <a:r>
+              <a:rPr lang="en-US" sz="1400" dirty="0">
+                <a:solidFill>
+                  <a:srgbClr val="1F2937"/>
                 </a:solidFill>
                 <a:latin typeface="Calibri" pitchFamily="34" charset="0"/>
                 <a:ea typeface="Calibri" pitchFamily="34" charset="-122"/>
                 <a:cs typeface="Calibri" pitchFamily="34" charset="-120"/>
               </a:rPr>
+              <a:t>Address technical debt early — cheaper than re-work later</a:t>
+            </a:r>
+            <a:endParaRPr lang="en-US" sz="1400" dirty="0"/>
+          </a:p>
+        </p:txBody>
+      </p:sp>
+      <p:sp>
+        <p:nvSpPr>
+          <p:cNvPr id="7" name="Text 4"/>
+          <p:cNvSpPr/>
+          <p:nvPr/>
+        </p:nvSpPr>
+        <p:spPr>
+          <a:xfrm>
+            <a:off x="457200" y="4800600"/>
+            <a:ext cx="6949440" cy="274320"/>
+          </a:xfrm>
+          <a:prstGeom prst="rect">
+            <a:avLst/>
+          </a:prstGeom>
+          <a:noFill/>
+          <a:ln/>
+        </p:spPr>
+        <p:txBody>
+          <a:bodyPr wrap="square" lIns="0" tIns="0" rIns="0" bIns="0" rtlCol="0" anchor="ctr"/>
+          <a:lstStyle/>
+          <a:p>
+            <a:pPr indent="0" marL="0">
+              <a:buNone/>
+            </a:pPr>
+            <a:r>
+              <a:rPr lang="en-US" sz="900" dirty="0">
+                <a:solidFill>
+                  <a:srgbClr val="64748B"/>
+                </a:solidFill>
+                <a:latin typeface="Calibri" pitchFamily="34" charset="0"/>
+                <a:ea typeface="Calibri" pitchFamily="34" charset="-122"/>
+                <a:cs typeface="Calibri" pitchFamily="34" charset="-120"/>
+              </a:rPr>
               <a:t>Software Security · Week 2</a:t>
             </a:r>
             <a:endParaRPr lang="en-US" sz="900" dirty="0"/>
@@ -2903,7 +3044,7 @@
       </p:sp>
       <p:pic>
         <p:nvPicPr>
-          <p:cNvPr id="10" name="Image 1" descr="/Users/pop7/Library/CloudStorage/OneDrive-MonsterConnectCo.,Ltd/Lecture/KOSEN69 - software-security/slides/pptx/assets/logo-small.png">    </p:cNvPr>
+          <p:cNvPr id="8" name="Image 1" descr="/Users/pop7/Library/CloudStorage/OneDrive-MonsterConnectCo.,Ltd/Lecture/KOSEN69 - software-security/slides/pptx/assets/logo-small.png">    </p:cNvPr>
           <p:cNvPicPr>
             <a:picLocks noChangeAspect="1"/>
           </p:cNvPicPr>
@@ -3041,7 +3182,7 @@
                 <a:ea typeface="Arial" pitchFamily="34" charset="-122"/>
                 <a:cs typeface="Arial" pitchFamily="34" charset="-120"/>
               </a:rPr>
-              <a:t>🐝 Mini-game — Fuzzing Race</a:t>
+              <a:t>🏁 Game — Bug Triage Race</a:t>
             </a:r>
             <a:endParaRPr lang="en-US" sz="2600" dirty="0"/>
           </a:p>
@@ -3056,11 +3197,11 @@
         <p:spPr>
           <a:xfrm>
             <a:off x="457200" y="1325880"/>
-            <a:ext cx="8229600" cy="1207008"/>
+            <a:ext cx="8229600" cy="896112"/>
           </a:xfrm>
           <a:prstGeom prst="roundRect">
             <a:avLst>
-              <a:gd name="adj" fmla="val 6061"/>
+              <a:gd name="adj" fmla="val 8163"/>
             </a:avLst>
           </a:prstGeom>
           <a:solidFill>
@@ -3085,7 +3226,7 @@
         <p:spPr>
           <a:xfrm>
             <a:off x="731520" y="1435608"/>
-            <a:ext cx="7680960" cy="987552"/>
+            <a:ext cx="7680960" cy="676656"/>
           </a:xfrm>
           <a:prstGeom prst="rect">
             <a:avLst/>
@@ -3094,7 +3235,9 @@
           <a:ln/>
         </p:spPr>
         <p:txBody>
-          <a:bodyPr wrap="square" lIns="0" tIns="0" rIns="0" bIns="0" rtlCol="0" anchor="t"/>
+          <a:bodyPr wrap="square" lIns="0" tIns="0" rIns="0" bIns="0" rtlCol="0" anchor="t">
+            <a:normAutofit/>
+          </a:bodyPr>
           <a:lstStyle/>
           <a:p>
             <a:pPr marL="342900" indent="-342900">
@@ -3113,7 +3256,7 @@
                 <a:ea typeface="Calibri" pitchFamily="34" charset="-122"/>
                 <a:cs typeface="Calibri" pitchFamily="34" charset="-120"/>
               </a:rPr>
-              <a:t>First team to make the provided target crash wins</a:t>
+              <a:t>Run Semgrep + Gitleaks on the flawed repo</a:t>
             </a:r>
             <a:endParaRPr lang="en-US" sz="1400" dirty="0"/>
           </a:p>
@@ -3134,66 +3277,164 @@
                 <a:ea typeface="Calibri" pitchFamily="34" charset="-122"/>
                 <a:cs typeface="Calibri" pitchFamily="34" charset="-120"/>
               </a:rPr>
-              <a:t>One crash → one root-cause note</a:t>
+              <a:t>Score = true positives − misclassified · live scoreboard</a:t>
             </a:r>
             <a:endParaRPr lang="en-US" sz="1400" dirty="0"/>
           </a:p>
-          <a:p>
-            <a:pPr marL="342900" indent="-342900">
-              <a:spcAft>
-                <a:spcPts val="600"/>
-              </a:spcAft>
-              <a:buSzPct val="100000"/>
-              <a:buChar char="•"/>
-            </a:pPr>
-            <a:r>
-              <a:rPr lang="en-US" sz="1400" dirty="0">
-                <a:solidFill>
-                  <a:srgbClr val="1F2937"/>
+        </p:txBody>
+      </p:sp>
+      <p:sp>
+        <p:nvSpPr>
+          <p:cNvPr id="7" name="Shape 4"/>
+          <p:cNvSpPr/>
+          <p:nvPr/>
+        </p:nvSpPr>
+        <p:spPr>
+          <a:xfrm>
+            <a:off x="457200" y="2386584"/>
+            <a:ext cx="8229600" cy="1152144"/>
+          </a:xfrm>
+          <a:prstGeom prst="roundRect">
+            <a:avLst>
+              <a:gd name="adj" fmla="val 4762"/>
+            </a:avLst>
+          </a:prstGeom>
+          <a:solidFill>
+            <a:srgbClr val="0A1020"/>
+          </a:solidFill>
+          <a:ln w="12700">
+            <a:solidFill>
+              <a:srgbClr val="E8EDF3"/>
+            </a:solidFill>
+            <a:prstDash val="solid"/>
+          </a:ln>
+        </p:spPr>
+      </p:sp>
+      <p:sp>
+        <p:nvSpPr>
+          <p:cNvPr id="8" name="Text 5"/>
+          <p:cNvSpPr/>
+          <p:nvPr/>
+        </p:nvSpPr>
+        <p:spPr>
+          <a:xfrm>
+            <a:off x="640080" y="2459736"/>
+            <a:ext cx="7863840" cy="1005840"/>
+          </a:xfrm>
+          <a:prstGeom prst="rect">
+            <a:avLst/>
+          </a:prstGeom>
+          <a:noFill/>
+          <a:ln/>
+        </p:spPr>
+        <p:txBody>
+          <a:bodyPr wrap="square" lIns="0" tIns="0" rIns="0" bIns="0" rtlCol="0" anchor="t">
+            <a:normAutofit/>
+          </a:bodyPr>
+          <a:lstStyle/>
+          <a:p>
+            <a:pPr indent="0" marL="0">
+              <a:buNone/>
+            </a:pPr>
+            <a:r>
+              <a:rPr lang="en-US" sz="1150" dirty="0">
+                <a:solidFill>
+                  <a:srgbClr val="9FE7D6"/>
+                </a:solidFill>
+                <a:latin typeface="Courier New" pitchFamily="34" charset="0"/>
+                <a:ea typeface="Courier New" pitchFamily="34" charset="-122"/>
+                <a:cs typeface="Courier New" pitchFamily="34" charset="-120"/>
+              </a:rPr>
+              <a:t>docker run --rm -v "$PWD/vulnerable-repo:/src" semgrep/semgrep \</a:t>
+            </a:r>
+            <a:endParaRPr lang="en-US" sz="1150" dirty="0"/>
+          </a:p>
+          <a:p>
+            <a:pPr indent="0" marL="0">
+              <a:buNone/>
+            </a:pPr>
+            <a:r>
+              <a:rPr lang="en-US" sz="1150" dirty="0">
+                <a:solidFill>
+                  <a:srgbClr val="9FE7D6"/>
+                </a:solidFill>
+                <a:latin typeface="Courier New" pitchFamily="34" charset="0"/>
+                <a:ea typeface="Courier New" pitchFamily="34" charset="-122"/>
+                <a:cs typeface="Courier New" pitchFamily="34" charset="-120"/>
+              </a:rPr>
+              <a:t>  semgrep --config p/default --config p/owasp-top-ten /src</a:t>
+            </a:r>
+            <a:endParaRPr lang="en-US" sz="1150" dirty="0"/>
+          </a:p>
+          <a:p>
+            <a:pPr indent="0" marL="0">
+              <a:buNone/>
+            </a:pPr>
+            <a:r>
+              <a:rPr lang="en-US" sz="1150" dirty="0">
+                <a:solidFill>
+                  <a:srgbClr val="9FE7D6"/>
+                </a:solidFill>
+                <a:latin typeface="Courier New" pitchFamily="34" charset="0"/>
+                <a:ea typeface="Courier New" pitchFamily="34" charset="-122"/>
+                <a:cs typeface="Courier New" pitchFamily="34" charset="-120"/>
+              </a:rPr>
+              <a:t>docker run --rm -v "$PWD/vulnerable-repo:/repo" zricethezav/gitleaks:latest \</a:t>
+            </a:r>
+            <a:endParaRPr lang="en-US" sz="1150" dirty="0"/>
+          </a:p>
+          <a:p>
+            <a:pPr indent="0" marL="0">
+              <a:buNone/>
+            </a:pPr>
+            <a:r>
+              <a:rPr lang="en-US" sz="1150" dirty="0">
+                <a:solidFill>
+                  <a:srgbClr val="9FE7D6"/>
+                </a:solidFill>
+                <a:latin typeface="Courier New" pitchFamily="34" charset="0"/>
+                <a:ea typeface="Courier New" pitchFamily="34" charset="-122"/>
+                <a:cs typeface="Courier New" pitchFamily="34" charset="-120"/>
+              </a:rPr>
+              <a:t>  detect -s /repo -v --no-git</a:t>
+            </a:r>
+            <a:endParaRPr lang="en-US" sz="1150" dirty="0"/>
+          </a:p>
+        </p:txBody>
+      </p:sp>
+      <p:sp>
+        <p:nvSpPr>
+          <p:cNvPr id="9" name="Text 6"/>
+          <p:cNvSpPr/>
+          <p:nvPr/>
+        </p:nvSpPr>
+        <p:spPr>
+          <a:xfrm>
+            <a:off x="457200" y="4800600"/>
+            <a:ext cx="6949440" cy="274320"/>
+          </a:xfrm>
+          <a:prstGeom prst="rect">
+            <a:avLst/>
+          </a:prstGeom>
+          <a:noFill/>
+          <a:ln/>
+        </p:spPr>
+        <p:txBody>
+          <a:bodyPr wrap="square" lIns="0" tIns="0" rIns="0" bIns="0" rtlCol="0" anchor="ctr"/>
+          <a:lstStyle/>
+          <a:p>
+            <a:pPr indent="0" marL="0">
+              <a:buNone/>
+            </a:pPr>
+            <a:r>
+              <a:rPr lang="en-US" sz="900" dirty="0">
+                <a:solidFill>
+                  <a:srgbClr val="64748B"/>
                 </a:solidFill>
                 <a:latin typeface="Calibri" pitchFamily="34" charset="0"/>
                 <a:ea typeface="Calibri" pitchFamily="34" charset="-122"/>
                 <a:cs typeface="Calibri" pitchFamily="34" charset="-120"/>
               </a:rPr>
-              <a:t>Full fuzz→exploit lab returns in Week 11</a:t>
-            </a:r>
-            <a:endParaRPr lang="en-US" sz="1400" dirty="0"/>
-          </a:p>
-        </p:txBody>
-      </p:sp>
-      <p:sp>
-        <p:nvSpPr>
-          <p:cNvPr id="7" name="Text 4"/>
-          <p:cNvSpPr/>
-          <p:nvPr/>
-        </p:nvSpPr>
-        <p:spPr>
-          <a:xfrm>
-            <a:off x="457200" y="4800600"/>
-            <a:ext cx="6949440" cy="274320"/>
-          </a:xfrm>
-          <a:prstGeom prst="rect">
-            <a:avLst/>
-          </a:prstGeom>
-          <a:noFill/>
-          <a:ln/>
-        </p:spPr>
-        <p:txBody>
-          <a:bodyPr wrap="square" lIns="0" tIns="0" rIns="0" bIns="0" rtlCol="0" anchor="ctr"/>
-          <a:lstStyle/>
-          <a:p>
-            <a:pPr indent="0" marL="0">
-              <a:buNone/>
-            </a:pPr>
-            <a:r>
-              <a:rPr lang="en-US" sz="900" dirty="0">
-                <a:solidFill>
-                  <a:srgbClr val="64748B"/>
-                </a:solidFill>
-                <a:latin typeface="Calibri" pitchFamily="34" charset="0"/>
-                <a:ea typeface="Calibri" pitchFamily="34" charset="-122"/>
-                <a:cs typeface="Calibri" pitchFamily="34" charset="-120"/>
-              </a:rPr>
               <a:t>Software Security · Week 2</a:t>
             </a:r>
             <a:endParaRPr lang="en-US" sz="900" dirty="0"/>
@@ -3202,7 +3443,7 @@
       </p:sp>
       <p:pic>
         <p:nvPicPr>
-          <p:cNvPr id="8" name="Image 1" descr="/Users/pop7/Library/CloudStorage/OneDrive-MonsterConnectCo.,Ltd/Lecture/KOSEN69 - software-security/slides/pptx/assets/logo-small.png">    </p:cNvPr>
+          <p:cNvPr id="10" name="Image 1" descr="/Users/pop7/Library/CloudStorage/OneDrive-MonsterConnectCo.,Ltd/Lecture/KOSEN69 - software-security/slides/pptx/assets/logo-small.png">    </p:cNvPr>
           <p:cNvPicPr>
             <a:picLocks noChangeAspect="1"/>
           </p:cNvPicPr>
@@ -3340,7 +3581,7 @@
                 <a:ea typeface="Arial" pitchFamily="34" charset="-122"/>
                 <a:cs typeface="Arial" pitchFamily="34" charset="-120"/>
               </a:rPr>
-              <a:t>Lab 2 — deliverable</a:t>
+              <a:t>🐝 Mini-game — Fuzzing Race</a:t>
             </a:r>
             <a:endParaRPr lang="en-US" sz="2600" dirty="0"/>
           </a:p>
@@ -3355,72 +3596,11 @@
         <p:spPr>
           <a:xfrm>
             <a:off x="457200" y="1325880"/>
-            <a:ext cx="8229600" cy="822960"/>
+            <a:ext cx="8229600" cy="1207008"/>
           </a:xfrm>
           <a:prstGeom prst="roundRect">
             <a:avLst>
-              <a:gd name="adj" fmla="val 8889"/>
-            </a:avLst>
-          </a:prstGeom>
-          <a:solidFill>
-            <a:srgbClr val="E8EDF3"/>
-          </a:solidFill>
-          <a:ln/>
-        </p:spPr>
-      </p:sp>
-      <p:sp>
-        <p:nvSpPr>
-          <p:cNvPr id="6" name="Text 3"/>
-          <p:cNvSpPr/>
-          <p:nvPr/>
-        </p:nvSpPr>
-        <p:spPr>
-          <a:xfrm>
-            <a:off x="731520" y="1325880"/>
-            <a:ext cx="7680960" cy="822960"/>
-          </a:xfrm>
-          <a:prstGeom prst="rect">
-            <a:avLst/>
-          </a:prstGeom>
-          <a:noFill/>
-          <a:ln/>
-        </p:spPr>
-        <p:txBody>
-          <a:bodyPr wrap="square" lIns="0" tIns="0" rIns="0" bIns="0" rtlCol="0" anchor="ctr"/>
-          <a:lstStyle/>
-          <a:p>
-            <a:pPr indent="0" marL="0">
-              <a:buNone/>
-            </a:pPr>
-            <a:r>
-              <a:rPr lang="en-US" sz="1400" i="1" dirty="0">
-                <a:solidFill>
-                  <a:srgbClr val="E35205"/>
-                </a:solidFill>
-                <a:latin typeface="Calibri" pitchFamily="34" charset="0"/>
-                <a:ea typeface="Calibri" pitchFamily="34" charset="-122"/>
-                <a:cs typeface="Calibri" pitchFamily="34" charset="-120"/>
-              </a:rPr>
-              <a:t>📋 Worksheet 2 — labs/week02-sdlc-tooling/worksheet.md (Part 3) · kickoff: bash scan.sh (Semgrep + Gitleaks on ./vulnerable-repo)</a:t>
-            </a:r>
-            <a:endParaRPr lang="en-US" sz="1400" dirty="0"/>
-          </a:p>
-        </p:txBody>
-      </p:sp>
-      <p:sp>
-        <p:nvSpPr>
-          <p:cNvPr id="7" name="Shape 4"/>
-          <p:cNvSpPr/>
-          <p:nvPr/>
-        </p:nvSpPr>
-        <p:spPr>
-          <a:xfrm>
-            <a:off x="457200" y="2313432"/>
-            <a:ext cx="8229600" cy="1517904"/>
-          </a:xfrm>
-          <a:prstGeom prst="roundRect">
-            <a:avLst>
-              <a:gd name="adj" fmla="val 4819"/>
+              <a:gd name="adj" fmla="val 6061"/>
             </a:avLst>
           </a:prstGeom>
           <a:solidFill>
@@ -3438,14 +3618,14 @@
       </p:sp>
       <p:sp>
         <p:nvSpPr>
-          <p:cNvPr id="8" name="Text 5"/>
+          <p:cNvPr id="6" name="Text 3"/>
           <p:cNvSpPr/>
           <p:nvPr/>
         </p:nvSpPr>
         <p:spPr>
           <a:xfrm>
-            <a:off x="731520" y="2423160"/>
-            <a:ext cx="7680960" cy="1298448"/>
+            <a:off x="731520" y="1435608"/>
+            <a:ext cx="7680960" cy="987552"/>
           </a:xfrm>
           <a:prstGeom prst="rect">
             <a:avLst/>
@@ -3454,7 +3634,9 @@
           <a:ln/>
         </p:spPr>
         <p:txBody>
-          <a:bodyPr wrap="square" lIns="0" tIns="0" rIns="0" bIns="0" rtlCol="0" anchor="t"/>
+          <a:bodyPr wrap="square" lIns="0" tIns="0" rIns="0" bIns="0" rtlCol="0" anchor="t">
+            <a:normAutofit/>
+          </a:bodyPr>
           <a:lstStyle/>
           <a:p>
             <a:pPr marL="342900" indent="-342900">
@@ -3473,7 +3655,7 @@
                 <a:ea typeface="Calibri" pitchFamily="34" charset="-122"/>
                 <a:cs typeface="Calibri" pitchFamily="34" charset="-120"/>
               </a:rPr>
-              <a:t>A findings triage table: tool, CWE, severity, TP/FP, fix idea</a:t>
+              <a:t>First team to make the provided target crash wins</a:t>
             </a:r>
             <a:endParaRPr lang="en-US" sz="1400" dirty="0"/>
           </a:p>
@@ -3494,7 +3676,7 @@
                 <a:ea typeface="Calibri" pitchFamily="34" charset="-122"/>
                 <a:cs typeface="Calibri" pitchFamily="34" charset="-120"/>
               </a:rPr>
-              <a:t>3 true positives + 1 false positive (justified)</a:t>
+              <a:t>One crash → one root-cause note</a:t>
             </a:r>
             <a:endParaRPr lang="en-US" sz="1400" dirty="0"/>
           </a:p>
@@ -3515,66 +3697,45 @@
                 <a:ea typeface="Calibri" pitchFamily="34" charset="-122"/>
                 <a:cs typeface="Calibri" pitchFamily="34" charset="-120"/>
               </a:rPr>
-              <a:t>1 fuzzing crash with a one-line root cause</a:t>
+              <a:t>Full fuzz→exploit lab returns in Week 11</a:t>
             </a:r>
             <a:endParaRPr lang="en-US" sz="1400" dirty="0"/>
           </a:p>
-          <a:p>
-            <a:pPr marL="342900" indent="-342900">
-              <a:spcAft>
-                <a:spcPts val="600"/>
-              </a:spcAft>
-              <a:buSzPct val="100000"/>
-              <a:buChar char="•"/>
-            </a:pPr>
-            <a:r>
-              <a:rPr lang="en-US" sz="1400" dirty="0">
-                <a:solidFill>
-                  <a:srgbClr val="1F2937"/>
+        </p:txBody>
+      </p:sp>
+      <p:sp>
+        <p:nvSpPr>
+          <p:cNvPr id="7" name="Text 4"/>
+          <p:cNvSpPr/>
+          <p:nvPr/>
+        </p:nvSpPr>
+        <p:spPr>
+          <a:xfrm>
+            <a:off x="457200" y="4800600"/>
+            <a:ext cx="6949440" cy="274320"/>
+          </a:xfrm>
+          <a:prstGeom prst="rect">
+            <a:avLst/>
+          </a:prstGeom>
+          <a:noFill/>
+          <a:ln/>
+        </p:spPr>
+        <p:txBody>
+          <a:bodyPr wrap="square" lIns="0" tIns="0" rIns="0" bIns="0" rtlCol="0" anchor="ctr"/>
+          <a:lstStyle/>
+          <a:p>
+            <a:pPr indent="0" marL="0">
+              <a:buNone/>
+            </a:pPr>
+            <a:r>
+              <a:rPr lang="en-US" sz="900" dirty="0">
+                <a:solidFill>
+                  <a:srgbClr val="64748B"/>
                 </a:solidFill>
                 <a:latin typeface="Calibri" pitchFamily="34" charset="0"/>
                 <a:ea typeface="Calibri" pitchFamily="34" charset="-122"/>
                 <a:cs typeface="Calibri" pitchFamily="34" charset="-120"/>
               </a:rPr>
-              <a:t>+ Audit the AI and EiPE / Prompt Problem (see worksheet)</a:t>
-            </a:r>
-            <a:endParaRPr lang="en-US" sz="1400" dirty="0"/>
-          </a:p>
-        </p:txBody>
-      </p:sp>
-      <p:sp>
-        <p:nvSpPr>
-          <p:cNvPr id="9" name="Text 6"/>
-          <p:cNvSpPr/>
-          <p:nvPr/>
-        </p:nvSpPr>
-        <p:spPr>
-          <a:xfrm>
-            <a:off x="457200" y="4800600"/>
-            <a:ext cx="6949440" cy="274320"/>
-          </a:xfrm>
-          <a:prstGeom prst="rect">
-            <a:avLst/>
-          </a:prstGeom>
-          <a:noFill/>
-          <a:ln/>
-        </p:spPr>
-        <p:txBody>
-          <a:bodyPr wrap="square" lIns="0" tIns="0" rIns="0" bIns="0" rtlCol="0" anchor="ctr"/>
-          <a:lstStyle/>
-          <a:p>
-            <a:pPr indent="0" marL="0">
-              <a:buNone/>
-            </a:pPr>
-            <a:r>
-              <a:rPr lang="en-US" sz="900" dirty="0">
-                <a:solidFill>
-                  <a:srgbClr val="64748B"/>
-                </a:solidFill>
-                <a:latin typeface="Calibri" pitchFamily="34" charset="0"/>
-                <a:ea typeface="Calibri" pitchFamily="34" charset="-122"/>
-                <a:cs typeface="Calibri" pitchFamily="34" charset="-120"/>
-              </a:rPr>
               <a:t>Software Security · Week 2</a:t>
             </a:r>
             <a:endParaRPr lang="en-US" sz="900" dirty="0"/>
@@ -3583,7 +3744,7 @@
       </p:sp>
       <p:pic>
         <p:nvPicPr>
-          <p:cNvPr id="10" name="Image 1" descr="/Users/pop7/Library/CloudStorage/OneDrive-MonsterConnectCo.,Ltd/Lecture/KOSEN69 - software-security/slides/pptx/assets/logo-small.png">    </p:cNvPr>
+          <p:cNvPr id="8" name="Image 1" descr="/Users/pop7/Library/CloudStorage/OneDrive-MonsterConnectCo.,Ltd/Lecture/KOSEN69 - software-security/slides/pptx/assets/logo-small.png">    </p:cNvPr>
           <p:cNvPicPr>
             <a:picLocks noChangeAspect="1"/>
           </p:cNvPicPr>
@@ -3721,7 +3882,7 @@
                 <a:ea typeface="Arial" pitchFamily="34" charset="-122"/>
                 <a:cs typeface="Arial" pitchFamily="34" charset="-120"/>
               </a:rPr>
-              <a:t>Key takeaways</a:t>
+              <a:t>Lab 2 — deliverable</a:t>
             </a:r>
             <a:endParaRPr lang="en-US" sz="2600" dirty="0"/>
           </a:p>
@@ -3736,11 +3897,74 @@
         <p:spPr>
           <a:xfrm>
             <a:off x="457200" y="1325880"/>
-            <a:ext cx="8229600" cy="1207008"/>
+            <a:ext cx="8229600" cy="822960"/>
           </a:xfrm>
           <a:prstGeom prst="roundRect">
             <a:avLst>
-              <a:gd name="adj" fmla="val 6061"/>
+              <a:gd name="adj" fmla="val 8889"/>
+            </a:avLst>
+          </a:prstGeom>
+          <a:solidFill>
+            <a:srgbClr val="E8EDF3"/>
+          </a:solidFill>
+          <a:ln/>
+        </p:spPr>
+      </p:sp>
+      <p:sp>
+        <p:nvSpPr>
+          <p:cNvPr id="6" name="Text 3"/>
+          <p:cNvSpPr/>
+          <p:nvPr/>
+        </p:nvSpPr>
+        <p:spPr>
+          <a:xfrm>
+            <a:off x="731520" y="1325880"/>
+            <a:ext cx="7680960" cy="822960"/>
+          </a:xfrm>
+          <a:prstGeom prst="rect">
+            <a:avLst/>
+          </a:prstGeom>
+          <a:noFill/>
+          <a:ln/>
+        </p:spPr>
+        <p:txBody>
+          <a:bodyPr wrap="square" lIns="0" tIns="0" rIns="0" bIns="0" rtlCol="0" anchor="ctr">
+            <a:normAutofit/>
+          </a:bodyPr>
+          <a:lstStyle/>
+          <a:p>
+            <a:pPr indent="0" marL="0">
+              <a:buNone/>
+            </a:pPr>
+            <a:r>
+              <a:rPr lang="en-US" sz="1400" i="1" dirty="0">
+                <a:solidFill>
+                  <a:srgbClr val="E35205"/>
+                </a:solidFill>
+                <a:latin typeface="Calibri" pitchFamily="34" charset="0"/>
+                <a:ea typeface="Calibri" pitchFamily="34" charset="-122"/>
+                <a:cs typeface="Calibri" pitchFamily="34" charset="-120"/>
+              </a:rPr>
+              <a:t>📋 Worksheet 2 — labs/week02-sdlc-tooling/worksheet.md (Part 3) · kickoff: bash scan.sh (Semgrep ×2 rulesets + Gitleaks --no-git on ./vulnerable-repo)</a:t>
+            </a:r>
+            <a:endParaRPr lang="en-US" sz="1400" dirty="0"/>
+          </a:p>
+        </p:txBody>
+      </p:sp>
+      <p:sp>
+        <p:nvSpPr>
+          <p:cNvPr id="7" name="Shape 4"/>
+          <p:cNvSpPr/>
+          <p:nvPr/>
+        </p:nvSpPr>
+        <p:spPr>
+          <a:xfrm>
+            <a:off x="457200" y="2313432"/>
+            <a:ext cx="8229600" cy="2029968"/>
+          </a:xfrm>
+          <a:prstGeom prst="roundRect">
+            <a:avLst>
+              <a:gd name="adj" fmla="val 3604"/>
             </a:avLst>
           </a:prstGeom>
           <a:solidFill>
@@ -3758,14 +3982,14 @@
       </p:sp>
       <p:sp>
         <p:nvSpPr>
-          <p:cNvPr id="6" name="Text 3"/>
+          <p:cNvPr id="8" name="Text 5"/>
           <p:cNvSpPr/>
           <p:nvPr/>
         </p:nvSpPr>
         <p:spPr>
           <a:xfrm>
-            <a:off x="731520" y="1435608"/>
-            <a:ext cx="7680960" cy="987552"/>
+            <a:off x="731520" y="2423160"/>
+            <a:ext cx="7680960" cy="1810512"/>
           </a:xfrm>
           <a:prstGeom prst="rect">
             <a:avLst/>
@@ -3774,7 +3998,9 @@
           <a:ln/>
         </p:spPr>
         <p:txBody>
-          <a:bodyPr wrap="square" lIns="0" tIns="0" rIns="0" bIns="0" rtlCol="0" anchor="t"/>
+          <a:bodyPr wrap="square" lIns="0" tIns="0" rIns="0" bIns="0" rtlCol="0" anchor="t">
+            <a:normAutofit/>
+          </a:bodyPr>
           <a:lstStyle/>
           <a:p>
             <a:pPr marL="342900" indent="-342900">
@@ -3793,7 +4019,7 @@
                 <a:ea typeface="Calibri" pitchFamily="34" charset="-122"/>
                 <a:cs typeface="Calibri" pitchFamily="34" charset="-120"/>
               </a:rPr>
-              <a:t>No single tool finds everything — layer SAST/DAST/SCA/fuzzing</a:t>
+              <a:t>A findings triage table: tool, CWE, severity, TP/FP, fix idea (3 TP + 1 FP, justified)</a:t>
             </a:r>
             <a:endParaRPr lang="en-US" sz="1400" dirty="0"/>
           </a:p>
@@ -3814,7 +4040,7 @@
                 <a:ea typeface="Calibri" pitchFamily="34" charset="-122"/>
                 <a:cs typeface="Calibri" pitchFamily="34" charset="-120"/>
               </a:rPr>
-              <a:t>Triage by CWE + severity; kill the noise</a:t>
+              <a:t>1 fuzzing crash with a one-line root cause</a:t>
             </a:r>
             <a:endParaRPr lang="en-US" sz="1400" dirty="0"/>
           </a:p>
@@ -3835,45 +4061,87 @@
                 <a:ea typeface="Calibri" pitchFamily="34" charset="-122"/>
                 <a:cs typeface="Calibri" pitchFamily="34" charset="-120"/>
               </a:rPr>
-              <a:t>Fuzzing is the highest-yield bug finder — automate it</a:t>
+              <a:t>Trivy SCA scan of the NoteVault project target</a:t>
             </a:r>
             <a:endParaRPr lang="en-US" sz="1400" dirty="0"/>
           </a:p>
-        </p:txBody>
-      </p:sp>
-      <p:sp>
-        <p:nvSpPr>
-          <p:cNvPr id="7" name="Text 4"/>
-          <p:cNvSpPr/>
-          <p:nvPr/>
-        </p:nvSpPr>
-        <p:spPr>
-          <a:xfrm>
-            <a:off x="457200" y="4800600"/>
-            <a:ext cx="6949440" cy="274320"/>
-          </a:xfrm>
-          <a:prstGeom prst="rect">
-            <a:avLst/>
-          </a:prstGeom>
-          <a:noFill/>
-          <a:ln/>
-        </p:spPr>
-        <p:txBody>
-          <a:bodyPr wrap="square" lIns="0" tIns="0" rIns="0" bIns="0" rtlCol="0" anchor="ctr"/>
-          <a:lstStyle/>
-          <a:p>
-            <a:pPr indent="0" marL="0">
-              <a:buNone/>
-            </a:pPr>
-            <a:r>
-              <a:rPr lang="en-US" sz="900" dirty="0">
-                <a:solidFill>
-                  <a:srgbClr val="64748B"/>
+          <a:p>
+            <a:pPr marL="342900" indent="-342900">
+              <a:spcAft>
+                <a:spcPts val="600"/>
+              </a:spcAft>
+              <a:buSzPct val="100000"/>
+              <a:buChar char="•"/>
+            </a:pPr>
+            <a:r>
+              <a:rPr lang="en-US" sz="1400" dirty="0">
+                <a:solidFill>
+                  <a:srgbClr val="1F2937"/>
                 </a:solidFill>
                 <a:latin typeface="Calibri" pitchFamily="34" charset="0"/>
                 <a:ea typeface="Calibri" pitchFamily="34" charset="-122"/>
                 <a:cs typeface="Calibri" pitchFamily="34" charset="-120"/>
               </a:rPr>
+              <a:t>A security CI gate built from Week 15's security-ci.yml</a:t>
+            </a:r>
+            <a:endParaRPr lang="en-US" sz="1400" dirty="0"/>
+          </a:p>
+          <a:p>
+            <a:pPr marL="342900" indent="-342900">
+              <a:spcAft>
+                <a:spcPts val="600"/>
+              </a:spcAft>
+              <a:buSzPct val="100000"/>
+              <a:buChar char="•"/>
+            </a:pPr>
+            <a:r>
+              <a:rPr lang="en-US" sz="1400" dirty="0">
+                <a:solidFill>
+                  <a:srgbClr val="1F2937"/>
+                </a:solidFill>
+                <a:latin typeface="Calibri" pitchFamily="34" charset="0"/>
+                <a:ea typeface="Calibri" pitchFamily="34" charset="-122"/>
+                <a:cs typeface="Calibri" pitchFamily="34" charset="-120"/>
+              </a:rPr>
+              <a:t>One SAST blind spot you found by hand</a:t>
+            </a:r>
+            <a:endParaRPr lang="en-US" sz="1400" dirty="0"/>
+          </a:p>
+        </p:txBody>
+      </p:sp>
+      <p:sp>
+        <p:nvSpPr>
+          <p:cNvPr id="9" name="Text 6"/>
+          <p:cNvSpPr/>
+          <p:nvPr/>
+        </p:nvSpPr>
+        <p:spPr>
+          <a:xfrm>
+            <a:off x="457200" y="4800600"/>
+            <a:ext cx="6949440" cy="274320"/>
+          </a:xfrm>
+          <a:prstGeom prst="rect">
+            <a:avLst/>
+          </a:prstGeom>
+          <a:noFill/>
+          <a:ln/>
+        </p:spPr>
+        <p:txBody>
+          <a:bodyPr wrap="square" lIns="0" tIns="0" rIns="0" bIns="0" rtlCol="0" anchor="ctr"/>
+          <a:lstStyle/>
+          <a:p>
+            <a:pPr indent="0" marL="0">
+              <a:buNone/>
+            </a:pPr>
+            <a:r>
+              <a:rPr lang="en-US" sz="900" dirty="0">
+                <a:solidFill>
+                  <a:srgbClr val="64748B"/>
+                </a:solidFill>
+                <a:latin typeface="Calibri" pitchFamily="34" charset="0"/>
+                <a:ea typeface="Calibri" pitchFamily="34" charset="-122"/>
+                <a:cs typeface="Calibri" pitchFamily="34" charset="-120"/>
+              </a:rPr>
               <a:t>Software Security · Week 2</a:t>
             </a:r>
             <a:endParaRPr lang="en-US" sz="900" dirty="0"/>
@@ -3882,7 +4150,7 @@
       </p:sp>
       <p:pic>
         <p:nvPicPr>
-          <p:cNvPr id="8" name="Image 1" descr="/Users/pop7/Library/CloudStorage/OneDrive-MonsterConnectCo.,Ltd/Lecture/KOSEN69 - software-security/slides/pptx/assets/logo-small.png">    </p:cNvPr>
+          <p:cNvPr id="10" name="Image 1" descr="/Users/pop7/Library/CloudStorage/OneDrive-MonsterConnectCo.,Ltd/Lecture/KOSEN69 - software-security/slides/pptx/assets/logo-small.png">    </p:cNvPr>
           <p:cNvPicPr>
             <a:picLocks noChangeAspect="1"/>
           </p:cNvPicPr>
@@ -3938,6 +4206,587 @@
       </p:grpSpPr>
       <p:sp>
         <p:nvSpPr>
+          <p:cNvPr id="2" name="Shape 0"/>
+          <p:cNvSpPr/>
+          <p:nvPr/>
+        </p:nvSpPr>
+        <p:spPr>
+          <a:xfrm>
+            <a:off x="457200" y="384048"/>
+            <a:ext cx="530352" cy="530352"/>
+          </a:xfrm>
+          <a:prstGeom prst="ellipse">
+            <a:avLst/>
+          </a:prstGeom>
+          <a:solidFill>
+            <a:srgbClr val="E35205"/>
+          </a:solidFill>
+          <a:ln/>
+          <a:effectLst>
+            <a:outerShdw sx="100000" sy="100000" kx="0" ky="0" algn="bl" rotWithShape="0" blurRad="76200" dist="25400" dir="5400000">
+              <a:srgbClr val="000000">
+                <a:alpha val="12000"/>
+              </a:srgbClr>
+            </a:outerShdw>
+          </a:effectLst>
+        </p:spPr>
+      </p:sp>
+      <p:pic>
+        <p:nvPicPr>
+          <p:cNvPr id="3" name="Image 0" descr="preencoded.png">    </p:cNvPr>
+          <p:cNvPicPr>
+            <a:picLocks noChangeAspect="1"/>
+          </p:cNvPicPr>
+          <p:nvPr/>
+        </p:nvPicPr>
+        <p:blipFill>
+          <a:blip r:embed="rId1"/>
+          <a:stretch>
+            <a:fillRect/>
+          </a:stretch>
+        </p:blipFill>
+        <p:spPr>
+          <a:xfrm>
+            <a:off x="594360" y="521208"/>
+            <a:ext cx="256032" cy="256032"/>
+          </a:xfrm>
+          <a:prstGeom prst="rect">
+            <a:avLst/>
+          </a:prstGeom>
+        </p:spPr>
+      </p:pic>
+      <p:sp>
+        <p:nvSpPr>
+          <p:cNvPr id="4" name="Text 1"/>
+          <p:cNvSpPr/>
+          <p:nvPr/>
+        </p:nvSpPr>
+        <p:spPr>
+          <a:xfrm>
+            <a:off x="1143000" y="329184"/>
+            <a:ext cx="7498080" cy="603504"/>
+          </a:xfrm>
+          <a:prstGeom prst="rect">
+            <a:avLst/>
+          </a:prstGeom>
+          <a:noFill/>
+          <a:ln/>
+        </p:spPr>
+        <p:txBody>
+          <a:bodyPr wrap="square" lIns="0" tIns="0" rIns="0" bIns="0" rtlCol="0" anchor="ctr"/>
+          <a:lstStyle/>
+          <a:p>
+            <a:pPr indent="0" marL="0">
+              <a:buNone/>
+            </a:pPr>
+            <a:r>
+              <a:rPr lang="en-US" sz="2600" b="1" dirty="0">
+                <a:solidFill>
+                  <a:srgbClr val="1F2937"/>
+                </a:solidFill>
+                <a:latin typeface="Arial" pitchFamily="34" charset="0"/>
+                <a:ea typeface="Arial" pitchFamily="34" charset="-122"/>
+                <a:cs typeface="Arial" pitchFamily="34" charset="-120"/>
+              </a:rPr>
+              <a:t>Lab 2 — deliverable (cont.)</a:t>
+            </a:r>
+            <a:endParaRPr lang="en-US" sz="2600" dirty="0"/>
+          </a:p>
+        </p:txBody>
+      </p:sp>
+      <p:sp>
+        <p:nvSpPr>
+          <p:cNvPr id="5" name="Shape 2"/>
+          <p:cNvSpPr/>
+          <p:nvPr/>
+        </p:nvSpPr>
+        <p:spPr>
+          <a:xfrm>
+            <a:off x="457200" y="1325880"/>
+            <a:ext cx="8229600" cy="1097280"/>
+          </a:xfrm>
+          <a:prstGeom prst="roundRect">
+            <a:avLst>
+              <a:gd name="adj" fmla="val 6667"/>
+            </a:avLst>
+          </a:prstGeom>
+          <a:solidFill>
+            <a:srgbClr val="F1F5F9"/>
+          </a:solidFill>
+          <a:ln/>
+          <a:effectLst>
+            <a:outerShdw sx="100000" sy="100000" kx="0" ky="0" algn="bl" rotWithShape="0" blurRad="76200" dist="25400" dir="5400000">
+              <a:srgbClr val="000000">
+                <a:alpha val="12000"/>
+              </a:srgbClr>
+            </a:outerShdw>
+          </a:effectLst>
+        </p:spPr>
+      </p:sp>
+      <p:sp>
+        <p:nvSpPr>
+          <p:cNvPr id="6" name="Text 3"/>
+          <p:cNvSpPr/>
+          <p:nvPr/>
+        </p:nvSpPr>
+        <p:spPr>
+          <a:xfrm>
+            <a:off x="731520" y="1435608"/>
+            <a:ext cx="7680960" cy="877824"/>
+          </a:xfrm>
+          <a:prstGeom prst="rect">
+            <a:avLst/>
+          </a:prstGeom>
+          <a:noFill/>
+          <a:ln/>
+        </p:spPr>
+        <p:txBody>
+          <a:bodyPr wrap="square" lIns="0" tIns="0" rIns="0" bIns="0" rtlCol="0" anchor="t">
+            <a:normAutofit/>
+          </a:bodyPr>
+          <a:lstStyle/>
+          <a:p>
+            <a:pPr marL="342900" indent="-342900">
+              <a:spcAft>
+                <a:spcPts val="600"/>
+              </a:spcAft>
+              <a:buSzPct val="100000"/>
+              <a:buChar char="•"/>
+            </a:pPr>
+            <a:r>
+              <a:rPr lang="en-US" sz="1400" dirty="0">
+                <a:solidFill>
+                  <a:srgbClr val="1F2937"/>
+                </a:solidFill>
+                <a:latin typeface="Calibri" pitchFamily="34" charset="0"/>
+                <a:ea typeface="Calibri" pitchFamily="34" charset="-122"/>
+                <a:cs typeface="Calibri" pitchFamily="34" charset="-120"/>
+              </a:rPr>
+              <a:t>Defend/fix: remediate all 5 planted flaws, before/after diff — this alone is 25 of 100 rubric points</a:t>
+            </a:r>
+            <a:endParaRPr lang="en-US" sz="1400" dirty="0"/>
+          </a:p>
+          <a:p>
+            <a:pPr marL="342900" indent="-342900">
+              <a:spcAft>
+                <a:spcPts val="600"/>
+              </a:spcAft>
+              <a:buSzPct val="100000"/>
+              <a:buChar char="•"/>
+            </a:pPr>
+            <a:r>
+              <a:rPr lang="en-US" sz="1400" dirty="0">
+                <a:solidFill>
+                  <a:srgbClr val="1F2937"/>
+                </a:solidFill>
+                <a:latin typeface="Calibri" pitchFamily="34" charset="0"/>
+                <a:ea typeface="Calibri" pitchFamily="34" charset="-122"/>
+                <a:cs typeface="Calibri" pitchFamily="34" charset="-120"/>
+              </a:rPr>
+              <a:t>+ Audit the AI and EiPE / Prompt Problem (see worksheet)</a:t>
+            </a:r>
+            <a:endParaRPr lang="en-US" sz="1400" dirty="0"/>
+          </a:p>
+        </p:txBody>
+      </p:sp>
+      <p:sp>
+        <p:nvSpPr>
+          <p:cNvPr id="7" name="Text 4"/>
+          <p:cNvSpPr/>
+          <p:nvPr/>
+        </p:nvSpPr>
+        <p:spPr>
+          <a:xfrm>
+            <a:off x="457200" y="4800600"/>
+            <a:ext cx="6949440" cy="274320"/>
+          </a:xfrm>
+          <a:prstGeom prst="rect">
+            <a:avLst/>
+          </a:prstGeom>
+          <a:noFill/>
+          <a:ln/>
+        </p:spPr>
+        <p:txBody>
+          <a:bodyPr wrap="square" lIns="0" tIns="0" rIns="0" bIns="0" rtlCol="0" anchor="ctr"/>
+          <a:lstStyle/>
+          <a:p>
+            <a:pPr indent="0" marL="0">
+              <a:buNone/>
+            </a:pPr>
+            <a:r>
+              <a:rPr lang="en-US" sz="900" dirty="0">
+                <a:solidFill>
+                  <a:srgbClr val="64748B"/>
+                </a:solidFill>
+                <a:latin typeface="Calibri" pitchFamily="34" charset="0"/>
+                <a:ea typeface="Calibri" pitchFamily="34" charset="-122"/>
+                <a:cs typeface="Calibri" pitchFamily="34" charset="-120"/>
+              </a:rPr>
+              <a:t>Software Security · Week 2</a:t>
+            </a:r>
+            <a:endParaRPr lang="en-US" sz="900" dirty="0"/>
+          </a:p>
+        </p:txBody>
+      </p:sp>
+      <p:pic>
+        <p:nvPicPr>
+          <p:cNvPr id="8" name="Image 1" descr="/Users/pop7/Library/CloudStorage/OneDrive-MonsterConnectCo.,Ltd/Lecture/KOSEN69 - software-security/slides/pptx/assets/logo-small.png">    </p:cNvPr>
+          <p:cNvPicPr>
+            <a:picLocks noChangeAspect="1"/>
+          </p:cNvPicPr>
+          <p:nvPr/>
+        </p:nvPicPr>
+        <p:blipFill>
+          <a:blip r:embed="rId2"/>
+          <a:stretch>
+            <a:fillRect/>
+          </a:stretch>
+        </p:blipFill>
+        <p:spPr>
+          <a:xfrm>
+            <a:off x="7882128" y="4700016"/>
+            <a:ext cx="768096" cy="356616"/>
+          </a:xfrm>
+          <a:prstGeom prst="rect">
+            <a:avLst/>
+          </a:prstGeom>
+        </p:spPr>
+      </p:pic>
+    </p:spTree>
+  </p:cSld>
+  <p:clrMapOvr>
+    <a:masterClrMapping/>
+  </p:clrMapOvr>
+</p:sld>
+</file>
+
+<file path=ppt/slides/slide16.xml><?xml version="1.0" encoding="utf-8"?>
+<p:sld xmlns:a="http://schemas.openxmlformats.org/drawingml/2006/main" xmlns:r="http://schemas.openxmlformats.org/officeDocument/2006/relationships" xmlns:p="http://schemas.openxmlformats.org/presentationml/2006/main">
+  <p:cSld name="Slide 16">
+    <p:bg>
+      <p:bgPr>
+        <a:solidFill>
+          <a:srgbClr val="FFFFFF"/>
+        </a:solidFill>
+      </p:bgPr>
+    </p:bg>
+    <p:spTree>
+      <p:nvGrpSpPr>
+        <p:cNvPr id="1" name=""/>
+        <p:cNvGrpSpPr/>
+        <p:nvPr/>
+      </p:nvGrpSpPr>
+      <p:grpSpPr>
+        <a:xfrm>
+          <a:off x="0" y="0"/>
+          <a:ext cx="0" cy="0"/>
+          <a:chOff x="0" y="0"/>
+          <a:chExt cx="0" cy="0"/>
+        </a:xfrm>
+      </p:grpSpPr>
+      <p:sp>
+        <p:nvSpPr>
+          <p:cNvPr id="2" name="Shape 0"/>
+          <p:cNvSpPr/>
+          <p:nvPr/>
+        </p:nvSpPr>
+        <p:spPr>
+          <a:xfrm>
+            <a:off x="457200" y="384048"/>
+            <a:ext cx="530352" cy="530352"/>
+          </a:xfrm>
+          <a:prstGeom prst="ellipse">
+            <a:avLst/>
+          </a:prstGeom>
+          <a:solidFill>
+            <a:srgbClr val="E35205"/>
+          </a:solidFill>
+          <a:ln/>
+          <a:effectLst>
+            <a:outerShdw sx="100000" sy="100000" kx="0" ky="0" algn="bl" rotWithShape="0" blurRad="76200" dist="25400" dir="5400000">
+              <a:srgbClr val="000000">
+                <a:alpha val="12000"/>
+              </a:srgbClr>
+            </a:outerShdw>
+          </a:effectLst>
+        </p:spPr>
+      </p:sp>
+      <p:pic>
+        <p:nvPicPr>
+          <p:cNvPr id="3" name="Image 0" descr="preencoded.png">    </p:cNvPr>
+          <p:cNvPicPr>
+            <a:picLocks noChangeAspect="1"/>
+          </p:cNvPicPr>
+          <p:nvPr/>
+        </p:nvPicPr>
+        <p:blipFill>
+          <a:blip r:embed="rId1"/>
+          <a:stretch>
+            <a:fillRect/>
+          </a:stretch>
+        </p:blipFill>
+        <p:spPr>
+          <a:xfrm>
+            <a:off x="594360" y="521208"/>
+            <a:ext cx="256032" cy="256032"/>
+          </a:xfrm>
+          <a:prstGeom prst="rect">
+            <a:avLst/>
+          </a:prstGeom>
+        </p:spPr>
+      </p:pic>
+      <p:sp>
+        <p:nvSpPr>
+          <p:cNvPr id="4" name="Text 1"/>
+          <p:cNvSpPr/>
+          <p:nvPr/>
+        </p:nvSpPr>
+        <p:spPr>
+          <a:xfrm>
+            <a:off x="1143000" y="329184"/>
+            <a:ext cx="7498080" cy="603504"/>
+          </a:xfrm>
+          <a:prstGeom prst="rect">
+            <a:avLst/>
+          </a:prstGeom>
+          <a:noFill/>
+          <a:ln/>
+        </p:spPr>
+        <p:txBody>
+          <a:bodyPr wrap="square" lIns="0" tIns="0" rIns="0" bIns="0" rtlCol="0" anchor="ctr"/>
+          <a:lstStyle/>
+          <a:p>
+            <a:pPr indent="0" marL="0">
+              <a:buNone/>
+            </a:pPr>
+            <a:r>
+              <a:rPr lang="en-US" sz="2600" b="1" dirty="0">
+                <a:solidFill>
+                  <a:srgbClr val="1F2937"/>
+                </a:solidFill>
+                <a:latin typeface="Arial" pitchFamily="34" charset="0"/>
+                <a:ea typeface="Arial" pitchFamily="34" charset="-122"/>
+                <a:cs typeface="Arial" pitchFamily="34" charset="-120"/>
+              </a:rPr>
+              <a:t>Key takeaways</a:t>
+            </a:r>
+            <a:endParaRPr lang="en-US" sz="2600" dirty="0"/>
+          </a:p>
+        </p:txBody>
+      </p:sp>
+      <p:sp>
+        <p:nvSpPr>
+          <p:cNvPr id="5" name="Shape 2"/>
+          <p:cNvSpPr/>
+          <p:nvPr/>
+        </p:nvSpPr>
+        <p:spPr>
+          <a:xfrm>
+            <a:off x="457200" y="1325880"/>
+            <a:ext cx="8229600" cy="1207008"/>
+          </a:xfrm>
+          <a:prstGeom prst="roundRect">
+            <a:avLst>
+              <a:gd name="adj" fmla="val 6061"/>
+            </a:avLst>
+          </a:prstGeom>
+          <a:solidFill>
+            <a:srgbClr val="F1F5F9"/>
+          </a:solidFill>
+          <a:ln/>
+          <a:effectLst>
+            <a:outerShdw sx="100000" sy="100000" kx="0" ky="0" algn="bl" rotWithShape="0" blurRad="76200" dist="25400" dir="5400000">
+              <a:srgbClr val="000000">
+                <a:alpha val="12000"/>
+              </a:srgbClr>
+            </a:outerShdw>
+          </a:effectLst>
+        </p:spPr>
+      </p:sp>
+      <p:sp>
+        <p:nvSpPr>
+          <p:cNvPr id="6" name="Text 3"/>
+          <p:cNvSpPr/>
+          <p:nvPr/>
+        </p:nvSpPr>
+        <p:spPr>
+          <a:xfrm>
+            <a:off x="731520" y="1435608"/>
+            <a:ext cx="7680960" cy="987552"/>
+          </a:xfrm>
+          <a:prstGeom prst="rect">
+            <a:avLst/>
+          </a:prstGeom>
+          <a:noFill/>
+          <a:ln/>
+        </p:spPr>
+        <p:txBody>
+          <a:bodyPr wrap="square" lIns="0" tIns="0" rIns="0" bIns="0" rtlCol="0" anchor="t">
+            <a:normAutofit/>
+          </a:bodyPr>
+          <a:lstStyle/>
+          <a:p>
+            <a:pPr marL="342900" indent="-342900">
+              <a:spcAft>
+                <a:spcPts val="600"/>
+              </a:spcAft>
+              <a:buSzPct val="100000"/>
+              <a:buChar char="•"/>
+            </a:pPr>
+            <a:r>
+              <a:rPr lang="en-US" sz="1400" dirty="0">
+                <a:solidFill>
+                  <a:srgbClr val="1F2937"/>
+                </a:solidFill>
+                <a:latin typeface="Calibri" pitchFamily="34" charset="0"/>
+                <a:ea typeface="Calibri" pitchFamily="34" charset="-122"/>
+                <a:cs typeface="Calibri" pitchFamily="34" charset="-120"/>
+              </a:rPr>
+              <a:t>No single tool finds everything — layer SAST/DAST/SCA/fuzzing</a:t>
+            </a:r>
+            <a:endParaRPr lang="en-US" sz="1400" dirty="0"/>
+          </a:p>
+          <a:p>
+            <a:pPr marL="342900" indent="-342900">
+              <a:spcAft>
+                <a:spcPts val="600"/>
+              </a:spcAft>
+              <a:buSzPct val="100000"/>
+              <a:buChar char="•"/>
+            </a:pPr>
+            <a:r>
+              <a:rPr lang="en-US" sz="1400" dirty="0">
+                <a:solidFill>
+                  <a:srgbClr val="1F2937"/>
+                </a:solidFill>
+                <a:latin typeface="Calibri" pitchFamily="34" charset="0"/>
+                <a:ea typeface="Calibri" pitchFamily="34" charset="-122"/>
+                <a:cs typeface="Calibri" pitchFamily="34" charset="-120"/>
+              </a:rPr>
+              <a:t>Triage by CWE + severity; kill the noise</a:t>
+            </a:r>
+            <a:endParaRPr lang="en-US" sz="1400" dirty="0"/>
+          </a:p>
+          <a:p>
+            <a:pPr marL="342900" indent="-342900">
+              <a:spcAft>
+                <a:spcPts val="600"/>
+              </a:spcAft>
+              <a:buSzPct val="100000"/>
+              <a:buChar char="•"/>
+            </a:pPr>
+            <a:r>
+              <a:rPr lang="en-US" sz="1400" dirty="0">
+                <a:solidFill>
+                  <a:srgbClr val="1F2937"/>
+                </a:solidFill>
+                <a:latin typeface="Calibri" pitchFamily="34" charset="0"/>
+                <a:ea typeface="Calibri" pitchFamily="34" charset="-122"/>
+                <a:cs typeface="Calibri" pitchFamily="34" charset="-120"/>
+              </a:rPr>
+              <a:t>Fuzzing is the highest-yield bug finder — automate it</a:t>
+            </a:r>
+            <a:endParaRPr lang="en-US" sz="1400" dirty="0"/>
+          </a:p>
+        </p:txBody>
+      </p:sp>
+      <p:sp>
+        <p:nvSpPr>
+          <p:cNvPr id="7" name="Text 4"/>
+          <p:cNvSpPr/>
+          <p:nvPr/>
+        </p:nvSpPr>
+        <p:spPr>
+          <a:xfrm>
+            <a:off x="457200" y="4800600"/>
+            <a:ext cx="6949440" cy="274320"/>
+          </a:xfrm>
+          <a:prstGeom prst="rect">
+            <a:avLst/>
+          </a:prstGeom>
+          <a:noFill/>
+          <a:ln/>
+        </p:spPr>
+        <p:txBody>
+          <a:bodyPr wrap="square" lIns="0" tIns="0" rIns="0" bIns="0" rtlCol="0" anchor="ctr"/>
+          <a:lstStyle/>
+          <a:p>
+            <a:pPr indent="0" marL="0">
+              <a:buNone/>
+            </a:pPr>
+            <a:r>
+              <a:rPr lang="en-US" sz="900" dirty="0">
+                <a:solidFill>
+                  <a:srgbClr val="64748B"/>
+                </a:solidFill>
+                <a:latin typeface="Calibri" pitchFamily="34" charset="0"/>
+                <a:ea typeface="Calibri" pitchFamily="34" charset="-122"/>
+                <a:cs typeface="Calibri" pitchFamily="34" charset="-120"/>
+              </a:rPr>
+              <a:t>Software Security · Week 2</a:t>
+            </a:r>
+            <a:endParaRPr lang="en-US" sz="900" dirty="0"/>
+          </a:p>
+        </p:txBody>
+      </p:sp>
+      <p:pic>
+        <p:nvPicPr>
+          <p:cNvPr id="8" name="Image 1" descr="/Users/pop7/Library/CloudStorage/OneDrive-MonsterConnectCo.,Ltd/Lecture/KOSEN69 - software-security/slides/pptx/assets/logo-small.png">    </p:cNvPr>
+          <p:cNvPicPr>
+            <a:picLocks noChangeAspect="1"/>
+          </p:cNvPicPr>
+          <p:nvPr/>
+        </p:nvPicPr>
+        <p:blipFill>
+          <a:blip r:embed="rId2"/>
+          <a:stretch>
+            <a:fillRect/>
+          </a:stretch>
+        </p:blipFill>
+        <p:spPr>
+          <a:xfrm>
+            <a:off x="7882128" y="4700016"/>
+            <a:ext cx="768096" cy="356616"/>
+          </a:xfrm>
+          <a:prstGeom prst="rect">
+            <a:avLst/>
+          </a:prstGeom>
+        </p:spPr>
+      </p:pic>
+    </p:spTree>
+  </p:cSld>
+  <p:clrMapOvr>
+    <a:masterClrMapping/>
+  </p:clrMapOvr>
+</p:sld>
+</file>
+
+<file path=ppt/slides/slide17.xml><?xml version="1.0" encoding="utf-8"?>
+<p:sld xmlns:a="http://schemas.openxmlformats.org/drawingml/2006/main" xmlns:r="http://schemas.openxmlformats.org/officeDocument/2006/relationships" xmlns:p="http://schemas.openxmlformats.org/presentationml/2006/main">
+  <p:cSld name="Slide 17">
+    <p:bg>
+      <p:bgPr>
+        <a:solidFill>
+          <a:srgbClr val="FFFFFF"/>
+        </a:solidFill>
+      </p:bgPr>
+    </p:bg>
+    <p:spTree>
+      <p:nvGrpSpPr>
+        <p:cNvPr id="1" name=""/>
+        <p:cNvGrpSpPr/>
+        <p:nvPr/>
+      </p:nvGrpSpPr>
+      <p:grpSpPr>
+        <a:xfrm>
+          <a:off x="0" y="0"/>
+          <a:ext cx="0" cy="0"/>
+          <a:chOff x="0" y="0"/>
+          <a:chExt cx="0" cy="0"/>
+        </a:xfrm>
+      </p:grpSpPr>
+      <p:sp>
+        <p:nvSpPr>
           <p:cNvPr id="2" name="Text 0"/>
           <p:cNvSpPr/>
           <p:nvPr/>
@@ -4207,7 +5056,9 @@
           <a:ln/>
         </p:spPr>
         <p:txBody>
-          <a:bodyPr wrap="square" lIns="0" tIns="0" rIns="0" bIns="0" rtlCol="0" anchor="t"/>
+          <a:bodyPr wrap="square" lIns="0" tIns="0" rIns="0" bIns="0" rtlCol="0" anchor="t">
+            <a:normAutofit/>
+          </a:bodyPr>
           <a:lstStyle/>
           <a:p>
             <a:pPr marL="342900" indent="-342900">
@@ -4527,7 +5378,9 @@
           <a:ln/>
         </p:spPr>
         <p:txBody>
-          <a:bodyPr wrap="square" lIns="0" tIns="0" rIns="0" bIns="0" rtlCol="0" anchor="t"/>
+          <a:bodyPr wrap="square" lIns="0" tIns="0" rIns="0" bIns="0" rtlCol="0" anchor="t">
+            <a:normAutofit/>
+          </a:bodyPr>
           <a:lstStyle/>
           <a:p>
             <a:pPr marL="342900" indent="-342900">
@@ -4797,7 +5650,9 @@
           <a:ln/>
         </p:spPr>
         <p:txBody>
-          <a:bodyPr wrap="square" lIns="0" tIns="0" rIns="0" bIns="0" rtlCol="0" anchor="t"/>
+          <a:bodyPr wrap="square" lIns="0" tIns="0" rIns="0" bIns="0" rtlCol="0" anchor="t">
+            <a:normAutofit/>
+          </a:bodyPr>
           <a:lstStyle/>
           <a:p>
             <a:pPr indent="0" marL="0">
@@ -4865,7 +5720,9 @@
           <a:ln/>
         </p:spPr>
         <p:txBody>
-          <a:bodyPr wrap="square" lIns="0" tIns="0" rIns="0" bIns="0" rtlCol="0" anchor="t"/>
+          <a:bodyPr wrap="square" lIns="0" tIns="0" rIns="0" bIns="0" rtlCol="0" anchor="t">
+            <a:normAutofit/>
+          </a:bodyPr>
           <a:lstStyle/>
           <a:p>
             <a:pPr marL="342900" indent="-342900">
@@ -6206,7 +7063,7 @@
                             <a:srgbClr val="1F2937"/>
                           </a:solidFill>
                         </a:rPr>
-                        <a:t>test</a:t>
+                        <a:t>build (compiled harness, not the text)</a:t>
                       </a:r>
                       <a:endParaRPr lang="en-US" sz="1200" dirty="0"/>
                     </a:p>
@@ -6452,11 +7309,11 @@
         <p:spPr>
           <a:xfrm>
             <a:off x="457200" y="1325880"/>
-            <a:ext cx="8229600" cy="896112"/>
+            <a:ext cx="8229600" cy="1097280"/>
           </a:xfrm>
           <a:prstGeom prst="roundRect">
             <a:avLst>
-              <a:gd name="adj" fmla="val 8163"/>
+              <a:gd name="adj" fmla="val 6667"/>
             </a:avLst>
           </a:prstGeom>
           <a:solidFill>
@@ -6481,7 +7338,7 @@
         <p:spPr>
           <a:xfrm>
             <a:off x="731520" y="1435608"/>
-            <a:ext cx="7680960" cy="676656"/>
+            <a:ext cx="7680960" cy="877824"/>
           </a:xfrm>
           <a:prstGeom prst="rect">
             <a:avLst/>
@@ -6490,7 +7347,9 @@
           <a:ln/>
         </p:spPr>
         <p:txBody>
-          <a:bodyPr wrap="square" lIns="0" tIns="0" rIns="0" bIns="0" rtlCol="0" anchor="t"/>
+          <a:bodyPr wrap="square" lIns="0" tIns="0" rIns="0" bIns="0" rtlCol="0" anchor="t">
+            <a:normAutofit/>
+          </a:bodyPr>
           <a:lstStyle/>
           <a:p>
             <a:pPr marL="342900" indent="-342900">
@@ -6544,7 +7403,7 @@
         </p:nvSpPr>
         <p:spPr>
           <a:xfrm>
-            <a:off x="457200" y="2386584"/>
+            <a:off x="457200" y="2587752"/>
             <a:ext cx="8229600" cy="822960"/>
           </a:xfrm>
           <a:prstGeom prst="roundRect">
@@ -6566,7 +7425,7 @@
         </p:nvSpPr>
         <p:spPr>
           <a:xfrm>
-            <a:off x="731520" y="2386584"/>
+            <a:off x="731520" y="2587752"/>
             <a:ext cx="7680960" cy="822960"/>
           </a:xfrm>
           <a:prstGeom prst="rect">
@@ -6576,7 +7435,9 @@
           <a:ln/>
         </p:spPr>
         <p:txBody>
-          <a:bodyPr wrap="square" lIns="0" tIns="0" rIns="0" bIns="0" rtlCol="0" anchor="ctr"/>
+          <a:bodyPr wrap="square" lIns="0" tIns="0" rIns="0" bIns="0" rtlCol="0" anchor="ctr">
+            <a:normAutofit/>
+          </a:bodyPr>
           <a:lstStyle/>
           <a:p>
             <a:pPr indent="0" marL="0">
@@ -6791,11 +7652,11 @@
         <p:spPr>
           <a:xfrm>
             <a:off x="457200" y="1325880"/>
-            <a:ext cx="8229600" cy="1810512"/>
+            <a:ext cx="8229600" cy="1591056"/>
           </a:xfrm>
           <a:prstGeom prst="roundRect">
             <a:avLst>
-              <a:gd name="adj" fmla="val 3030"/>
+              <a:gd name="adj" fmla="val 3448"/>
             </a:avLst>
           </a:prstGeom>
           <a:solidFill>
@@ -6818,7 +7679,7 @@
         <p:spPr>
           <a:xfrm>
             <a:off x="640080" y="1399032"/>
-            <a:ext cx="7863840" cy="1664208"/>
+            <a:ext cx="7863840" cy="1444752"/>
           </a:xfrm>
           <a:prstGeom prst="rect">
             <a:avLst/>
@@ -6827,7 +7688,9 @@
           <a:ln/>
         </p:spPr>
         <p:txBody>
-          <a:bodyPr wrap="square" lIns="0" tIns="0" rIns="0" bIns="0" rtlCol="0" anchor="t"/>
+          <a:bodyPr wrap="square" lIns="0" tIns="0" rIns="0" bIns="0" rtlCol="0" anchor="t">
+            <a:normAutofit/>
+          </a:bodyPr>
           <a:lstStyle/>
           <a:p>
             <a:pPr indent="0" marL="0">
@@ -6927,7 +7790,7 @@
                 <a:ea typeface="Courier New" pitchFamily="34" charset="-122"/>
                 <a:cs typeface="Courier New" pitchFamily="34" charset="-120"/>
               </a:rPr>
-              <a:t>AWS_SECRET = "wJalr...EXAMPLEKEY"                       # Gitleaks → CWE-798</a:t>
+              <a:t>AWS_SECRET_ACCESS_KEY = "hK8pQ2mN5vX9wZ3rT6yU1sA4bC7dE0fG2hJ5kL8"  # Gitleaks → CWE-798</a:t>
             </a:r>
             <a:endParaRPr lang="en-US" sz="1150" dirty="0"/>
           </a:p>
@@ -6941,12 +7804,12 @@
         </p:nvSpPr>
         <p:spPr>
           <a:xfrm>
-            <a:off x="457200" y="3300984"/>
-            <a:ext cx="8229600" cy="1207008"/>
+            <a:off x="457200" y="3081528"/>
+            <a:ext cx="8229600" cy="1298448"/>
           </a:xfrm>
           <a:prstGeom prst="roundRect">
             <a:avLst>
-              <a:gd name="adj" fmla="val 6061"/>
+              <a:gd name="adj" fmla="val 5634"/>
             </a:avLst>
           </a:prstGeom>
           <a:solidFill>
@@ -6970,8 +7833,8 @@
         </p:nvSpPr>
         <p:spPr>
           <a:xfrm>
-            <a:off x="731520" y="3410712"/>
-            <a:ext cx="7680960" cy="987552"/>
+            <a:off x="731520" y="3191256"/>
+            <a:ext cx="7680960" cy="1078992"/>
           </a:xfrm>
           <a:prstGeom prst="rect">
             <a:avLst/>
@@ -6980,7 +7843,9 @@
           <a:ln/>
         </p:spPr>
         <p:txBody>
-          <a:bodyPr wrap="square" lIns="0" tIns="0" rIns="0" bIns="0" rtlCol="0" anchor="t"/>
+          <a:bodyPr wrap="square" lIns="0" tIns="0" rIns="0" bIns="0" rtlCol="0" anchor="t">
+            <a:normAutofit/>
+          </a:bodyPr>
           <a:lstStyle/>
           <a:p>
             <a:pPr marL="342900" indent="-342900">
@@ -7020,28 +7885,7 @@
                 <a:ea typeface="Calibri" pitchFamily="34" charset="-122"/>
                 <a:cs typeface="Calibri" pitchFamily="34" charset="-120"/>
               </a:rPr>
-              <a:t>Gitleaks (secret scan): flags the hardcoded AWS key (CWE-798)</a:t>
-            </a:r>
-            <a:endParaRPr lang="en-US" sz="1400" dirty="0"/>
-          </a:p>
-          <a:p>
-            <a:pPr marL="342900" indent="-342900">
-              <a:spcAft>
-                <a:spcPts val="600"/>
-              </a:spcAft>
-              <a:buSzPct val="100000"/>
-              <a:buChar char="•"/>
-            </a:pPr>
-            <a:r>
-              <a:rPr lang="en-US" sz="1400" dirty="0">
-                <a:solidFill>
-                  <a:srgbClr val="1F2937"/>
-                </a:solidFill>
-                <a:latin typeface="Calibri" pitchFamily="34" charset="0"/>
-                <a:ea typeface="Calibri" pitchFamily="34" charset="-122"/>
-                <a:cs typeface="Calibri" pitchFamily="34" charset="-120"/>
-              </a:rPr>
-              <a:t>DAST/fuzzer: would catch a crash/SQLi by hitting /user, not reading it</a:t>
+              <a:t>Gitleaks (secret scan): flags the hardcoded key — must be a real-looking secret; the AWS-docs example key (wJalr...EXAMPLEKEY) is a known public string and won't fire any rule</a:t>
             </a:r>
             <a:endParaRPr lang="en-US" sz="1400" dirty="0"/>
           </a:p>
@@ -7226,7 +8070,7 @@
                 <a:ea typeface="Arial" pitchFamily="34" charset="-122"/>
                 <a:cs typeface="Arial" pitchFamily="34" charset="-120"/>
               </a:rPr>
-              <a:t>Fuzzing — how real CVEs are found</a:t>
+              <a:t>Worked example: what each tool catches (cont.)</a:t>
             </a:r>
             <a:endParaRPr lang="en-US" sz="2600" dirty="0"/>
           </a:p>
@@ -7241,11 +8085,11 @@
         <p:spPr>
           <a:xfrm>
             <a:off x="457200" y="1325880"/>
-            <a:ext cx="8229600" cy="1207008"/>
+            <a:ext cx="8229600" cy="1097280"/>
           </a:xfrm>
           <a:prstGeom prst="roundRect">
             <a:avLst>
-              <a:gd name="adj" fmla="val 6061"/>
+              <a:gd name="adj" fmla="val 6667"/>
             </a:avLst>
           </a:prstGeom>
           <a:solidFill>
@@ -7270,7 +8114,7 @@
         <p:spPr>
           <a:xfrm>
             <a:off x="731520" y="1435608"/>
-            <a:ext cx="7680960" cy="987552"/>
+            <a:ext cx="7680960" cy="877824"/>
           </a:xfrm>
           <a:prstGeom prst="rect">
             <a:avLst/>
@@ -7279,7 +8123,9 @@
           <a:ln/>
         </p:spPr>
         <p:txBody>
-          <a:bodyPr wrap="square" lIns="0" tIns="0" rIns="0" bIns="0" rtlCol="0" anchor="t"/>
+          <a:bodyPr wrap="square" lIns="0" tIns="0" rIns="0" bIns="0" rtlCol="0" anchor="t">
+            <a:normAutofit/>
+          </a:bodyPr>
           <a:lstStyle/>
           <a:p>
             <a:pPr marL="342900" indent="-342900">
@@ -7298,7 +8144,7 @@
                 <a:ea typeface="Calibri" pitchFamily="34" charset="-122"/>
                 <a:cs typeface="Calibri" pitchFamily="34" charset="-120"/>
               </a:rPr>
-              <a:t>Feed random/mutated inputs, watch for crashes</a:t>
+              <a:t>DAST/fuzzer: would catch a crash/SQLi by hitting /user, not reading it</a:t>
             </a:r>
             <a:endParaRPr lang="en-US" sz="1400" dirty="0"/>
           </a:p>
@@ -7319,132 +8165,45 @@
                 <a:ea typeface="Calibri" pitchFamily="34" charset="-122"/>
                 <a:cs typeface="Calibri" pitchFamily="34" charset="-120"/>
               </a:rPr>
-              <a:t>Coverage-guided (libFuzzer/AFL++) explores new code paths</a:t>
+              <a:t>Same file also plants command injection, a weak md5 hash, and debug=True — Task 1 grades all five</a:t>
             </a:r>
             <a:endParaRPr lang="en-US" sz="1400" dirty="0"/>
           </a:p>
-          <a:p>
-            <a:pPr marL="342900" indent="-342900">
-              <a:spcAft>
-                <a:spcPts val="600"/>
-              </a:spcAft>
-              <a:buSzPct val="100000"/>
-              <a:buChar char="•"/>
-            </a:pPr>
-            <a:r>
-              <a:rPr lang="en-US" sz="1400" dirty="0">
-                <a:solidFill>
-                  <a:srgbClr val="1F2937"/>
+        </p:txBody>
+      </p:sp>
+      <p:sp>
+        <p:nvSpPr>
+          <p:cNvPr id="7" name="Text 4"/>
+          <p:cNvSpPr/>
+          <p:nvPr/>
+        </p:nvSpPr>
+        <p:spPr>
+          <a:xfrm>
+            <a:off x="457200" y="4800600"/>
+            <a:ext cx="6949440" cy="274320"/>
+          </a:xfrm>
+          <a:prstGeom prst="rect">
+            <a:avLst/>
+          </a:prstGeom>
+          <a:noFill/>
+          <a:ln/>
+        </p:spPr>
+        <p:txBody>
+          <a:bodyPr wrap="square" lIns="0" tIns="0" rIns="0" bIns="0" rtlCol="0" anchor="ctr"/>
+          <a:lstStyle/>
+          <a:p>
+            <a:pPr indent="0" marL="0">
+              <a:buNone/>
+            </a:pPr>
+            <a:r>
+              <a:rPr lang="en-US" sz="900" dirty="0">
+                <a:solidFill>
+                  <a:srgbClr val="64748B"/>
                 </a:solidFill>
                 <a:latin typeface="Calibri" pitchFamily="34" charset="0"/>
                 <a:ea typeface="Calibri" pitchFamily="34" charset="-122"/>
                 <a:cs typeface="Calibri" pitchFamily="34" charset="-120"/>
               </a:rPr>
-              <a:t>Pair with sanitizers (ASan) to pinpoint the bug</a:t>
-            </a:r>
-            <a:endParaRPr lang="en-US" sz="1400" dirty="0"/>
-          </a:p>
-        </p:txBody>
-      </p:sp>
-      <p:sp>
-        <p:nvSpPr>
-          <p:cNvPr id="7" name="Shape 4"/>
-          <p:cNvSpPr/>
-          <p:nvPr/>
-        </p:nvSpPr>
-        <p:spPr>
-          <a:xfrm>
-            <a:off x="457200" y="2697480"/>
-            <a:ext cx="8229600" cy="530352"/>
-          </a:xfrm>
-          <a:prstGeom prst="roundRect">
-            <a:avLst>
-              <a:gd name="adj" fmla="val 10345"/>
-            </a:avLst>
-          </a:prstGeom>
-          <a:solidFill>
-            <a:srgbClr val="0A1020"/>
-          </a:solidFill>
-          <a:ln w="12700">
-            <a:solidFill>
-              <a:srgbClr val="E8EDF3"/>
-            </a:solidFill>
-            <a:prstDash val="solid"/>
-          </a:ln>
-        </p:spPr>
-      </p:sp>
-      <p:sp>
-        <p:nvSpPr>
-          <p:cNvPr id="8" name="Text 5"/>
-          <p:cNvSpPr/>
-          <p:nvPr/>
-        </p:nvSpPr>
-        <p:spPr>
-          <a:xfrm>
-            <a:off x="640080" y="2770632"/>
-            <a:ext cx="7863840" cy="384048"/>
-          </a:xfrm>
-          <a:prstGeom prst="rect">
-            <a:avLst/>
-          </a:prstGeom>
-          <a:noFill/>
-          <a:ln/>
-        </p:spPr>
-        <p:txBody>
-          <a:bodyPr wrap="square" lIns="0" tIns="0" rIns="0" bIns="0" rtlCol="0" anchor="t"/>
-          <a:lstStyle/>
-          <a:p>
-            <a:pPr indent="0" marL="0">
-              <a:buNone/>
-            </a:pPr>
-            <a:r>
-              <a:rPr lang="en-US" sz="1150" dirty="0">
-                <a:solidFill>
-                  <a:srgbClr val="9FE7D6"/>
-                </a:solidFill>
-                <a:latin typeface="Courier New" pitchFamily="34" charset="0"/>
-                <a:ea typeface="Courier New" pitchFamily="34" charset="-122"/>
-                <a:cs typeface="Courier New" pitchFamily="34" charset="-120"/>
-              </a:rPr>
-              <a:t>clang -fsanitize=address,fuzzer harness.c -o fuzz &amp;&amp; ./fuzz</a:t>
-            </a:r>
-            <a:endParaRPr lang="en-US" sz="1150" dirty="0"/>
-          </a:p>
-        </p:txBody>
-      </p:sp>
-      <p:sp>
-        <p:nvSpPr>
-          <p:cNvPr id="9" name="Text 6"/>
-          <p:cNvSpPr/>
-          <p:nvPr/>
-        </p:nvSpPr>
-        <p:spPr>
-          <a:xfrm>
-            <a:off x="457200" y="4800600"/>
-            <a:ext cx="6949440" cy="274320"/>
-          </a:xfrm>
-          <a:prstGeom prst="rect">
-            <a:avLst/>
-          </a:prstGeom>
-          <a:noFill/>
-          <a:ln/>
-        </p:spPr>
-        <p:txBody>
-          <a:bodyPr wrap="square" lIns="0" tIns="0" rIns="0" bIns="0" rtlCol="0" anchor="ctr"/>
-          <a:lstStyle/>
-          <a:p>
-            <a:pPr indent="0" marL="0">
-              <a:buNone/>
-            </a:pPr>
-            <a:r>
-              <a:rPr lang="en-US" sz="900" dirty="0">
-                <a:solidFill>
-                  <a:srgbClr val="64748B"/>
-                </a:solidFill>
-                <a:latin typeface="Calibri" pitchFamily="34" charset="0"/>
-                <a:ea typeface="Calibri" pitchFamily="34" charset="-122"/>
-                <a:cs typeface="Calibri" pitchFamily="34" charset="-120"/>
-              </a:rPr>
               <a:t>Software Security · Week 2</a:t>
             </a:r>
             <a:endParaRPr lang="en-US" sz="900" dirty="0"/>
@@ -7453,7 +8212,7 @@
       </p:sp>
       <p:pic>
         <p:nvPicPr>
-          <p:cNvPr id="10" name="Image 1" descr="/Users/pop7/Library/CloudStorage/OneDrive-MonsterConnectCo.,Ltd/Lecture/KOSEN69 - software-security/slides/pptx/assets/logo-small.png">    </p:cNvPr>
+          <p:cNvPr id="8" name="Image 1" descr="/Users/pop7/Library/CloudStorage/OneDrive-MonsterConnectCo.,Ltd/Lecture/KOSEN69 - software-security/slides/pptx/assets/logo-small.png">    </p:cNvPr>
           <p:cNvPicPr>
             <a:picLocks noChangeAspect="1"/>
           </p:cNvPicPr>
@@ -7591,7 +8350,7 @@
                 <a:ea typeface="Arial" pitchFamily="34" charset="-122"/>
                 <a:cs typeface="Arial" pitchFamily="34" charset="-120"/>
               </a:rPr>
-              <a:t>Triage: not every finding is a bug</a:t>
+              <a:t>Fuzzing — how real CVEs are found</a:t>
             </a:r>
             <a:endParaRPr lang="en-US" sz="2600" dirty="0"/>
           </a:p>
@@ -7606,11 +8365,11 @@
         <p:spPr>
           <a:xfrm>
             <a:off x="457200" y="1325880"/>
-            <a:ext cx="8229600" cy="1517904"/>
+            <a:ext cx="8229600" cy="1207008"/>
           </a:xfrm>
           <a:prstGeom prst="roundRect">
             <a:avLst>
-              <a:gd name="adj" fmla="val 4819"/>
+              <a:gd name="adj" fmla="val 6061"/>
             </a:avLst>
           </a:prstGeom>
           <a:solidFill>
@@ -7635,7 +8394,7 @@
         <p:spPr>
           <a:xfrm>
             <a:off x="731520" y="1435608"/>
-            <a:ext cx="7680960" cy="1298448"/>
+            <a:ext cx="7680960" cy="987552"/>
           </a:xfrm>
           <a:prstGeom prst="rect">
             <a:avLst/>
@@ -7644,7 +8403,9 @@
           <a:ln/>
         </p:spPr>
         <p:txBody>
-          <a:bodyPr wrap="square" lIns="0" tIns="0" rIns="0" bIns="0" rtlCol="0" anchor="t"/>
+          <a:bodyPr wrap="square" lIns="0" tIns="0" rIns="0" bIns="0" rtlCol="0" anchor="t">
+            <a:normAutofit/>
+          </a:bodyPr>
           <a:lstStyle/>
           <a:p>
             <a:pPr marL="342900" indent="-342900">
@@ -7663,7 +8424,7 @@
                 <a:ea typeface="Calibri" pitchFamily="34" charset="-122"/>
                 <a:cs typeface="Calibri" pitchFamily="34" charset="-120"/>
               </a:rPr>
-              <a:t>True positive vs false positive</a:t>
+              <a:t>Feed random/mutated inputs, watch for crashes</a:t>
             </a:r>
             <a:endParaRPr lang="en-US" sz="1400" dirty="0"/>
           </a:p>
@@ -7684,7 +8445,7 @@
                 <a:ea typeface="Calibri" pitchFamily="34" charset="-122"/>
                 <a:cs typeface="Calibri" pitchFamily="34" charset="-120"/>
               </a:rPr>
-              <a:t>Map each to a CWE + severity</a:t>
+              <a:t>Coverage-guided (libFuzzer/AFL++) explores new code paths</a:t>
             </a:r>
             <a:endParaRPr lang="en-US" sz="1400" dirty="0"/>
           </a:p>
@@ -7705,66 +8466,147 @@
                 <a:ea typeface="Calibri" pitchFamily="34" charset="-122"/>
                 <a:cs typeface="Calibri" pitchFamily="34" charset="-120"/>
               </a:rPr>
-              <a:t>Prioritize by exploitability × impact</a:t>
+              <a:t>Pair with sanitizers (ASan) to pinpoint the bug</a:t>
             </a:r>
             <a:endParaRPr lang="en-US" sz="1400" dirty="0"/>
           </a:p>
-          <a:p>
-            <a:pPr marL="342900" indent="-342900">
-              <a:spcAft>
-                <a:spcPts val="600"/>
-              </a:spcAft>
-              <a:buSzPct val="100000"/>
-              <a:buChar char="•"/>
-            </a:pPr>
-            <a:r>
-              <a:rPr lang="en-US" sz="1400" dirty="0">
-                <a:solidFill>
-                  <a:srgbClr val="1F2937"/>
+        </p:txBody>
+      </p:sp>
+      <p:sp>
+        <p:nvSpPr>
+          <p:cNvPr id="7" name="Shape 4"/>
+          <p:cNvSpPr/>
+          <p:nvPr/>
+        </p:nvSpPr>
+        <p:spPr>
+          <a:xfrm>
+            <a:off x="457200" y="2697480"/>
+            <a:ext cx="8229600" cy="932688"/>
+          </a:xfrm>
+          <a:prstGeom prst="roundRect">
+            <a:avLst>
+              <a:gd name="adj" fmla="val 5882"/>
+            </a:avLst>
+          </a:prstGeom>
+          <a:solidFill>
+            <a:srgbClr val="0A1020"/>
+          </a:solidFill>
+          <a:ln w="12700">
+            <a:solidFill>
+              <a:srgbClr val="E8EDF3"/>
+            </a:solidFill>
+            <a:prstDash val="solid"/>
+          </a:ln>
+        </p:spPr>
+      </p:sp>
+      <p:sp>
+        <p:nvSpPr>
+          <p:cNvPr id="8" name="Text 5"/>
+          <p:cNvSpPr/>
+          <p:nvPr/>
+        </p:nvSpPr>
+        <p:spPr>
+          <a:xfrm>
+            <a:off x="640080" y="2770632"/>
+            <a:ext cx="7863840" cy="786384"/>
+          </a:xfrm>
+          <a:prstGeom prst="rect">
+            <a:avLst/>
+          </a:prstGeom>
+          <a:noFill/>
+          <a:ln/>
+        </p:spPr>
+        <p:txBody>
+          <a:bodyPr wrap="square" lIns="0" tIns="0" rIns="0" bIns="0" rtlCol="0" anchor="t">
+            <a:normAutofit/>
+          </a:bodyPr>
+          <a:lstStyle/>
+          <a:p>
+            <a:pPr indent="0" marL="0">
+              <a:buNone/>
+            </a:pPr>
+            <a:r>
+              <a:rPr lang="en-US" sz="1150" dirty="0">
+                <a:solidFill>
+                  <a:srgbClr val="9FE7D6"/>
+                </a:solidFill>
+                <a:latin typeface="Courier New" pitchFamily="34" charset="0"/>
+                <a:ea typeface="Courier New" pitchFamily="34" charset="-122"/>
+                <a:cs typeface="Courier New" pitchFamily="34" charset="-120"/>
+              </a:rPr>
+              <a:t># run inside labs/toolbox — Apple clang has no libFuzzer runtime</a:t>
+            </a:r>
+            <a:endParaRPr lang="en-US" sz="1150" dirty="0"/>
+          </a:p>
+          <a:p>
+            <a:pPr indent="0" marL="0">
+              <a:buNone/>
+            </a:pPr>
+            <a:r>
+              <a:rPr lang="en-US" sz="1150" dirty="0">
+                <a:solidFill>
+                  <a:srgbClr val="9FE7D6"/>
+                </a:solidFill>
+                <a:latin typeface="Courier New" pitchFamily="34" charset="0"/>
+                <a:ea typeface="Courier New" pitchFamily="34" charset="-122"/>
+                <a:cs typeface="Courier New" pitchFamily="34" charset="-120"/>
+              </a:rPr>
+              <a:t>clang -g -fsanitize=address,fuzzer harness.c -o fuzz</a:t>
+            </a:r>
+            <a:endParaRPr lang="en-US" sz="1150" dirty="0"/>
+          </a:p>
+          <a:p>
+            <a:pPr indent="0" marL="0">
+              <a:buNone/>
+            </a:pPr>
+            <a:r>
+              <a:rPr lang="en-US" sz="1150" dirty="0">
+                <a:solidFill>
+                  <a:srgbClr val="9FE7D6"/>
+                </a:solidFill>
+                <a:latin typeface="Courier New" pitchFamily="34" charset="0"/>
+                <a:ea typeface="Courier New" pitchFamily="34" charset="-122"/>
+                <a:cs typeface="Courier New" pitchFamily="34" charset="-120"/>
+              </a:rPr>
+              <a:t>mkdir -p corpus &amp;&amp; printf 'FUZ' &gt; corpus/seed &amp;&amp; ./fuzz corpus</a:t>
+            </a:r>
+            <a:endParaRPr lang="en-US" sz="1150" dirty="0"/>
+          </a:p>
+        </p:txBody>
+      </p:sp>
+      <p:sp>
+        <p:nvSpPr>
+          <p:cNvPr id="9" name="Text 6"/>
+          <p:cNvSpPr/>
+          <p:nvPr/>
+        </p:nvSpPr>
+        <p:spPr>
+          <a:xfrm>
+            <a:off x="457200" y="4800600"/>
+            <a:ext cx="6949440" cy="274320"/>
+          </a:xfrm>
+          <a:prstGeom prst="rect">
+            <a:avLst/>
+          </a:prstGeom>
+          <a:noFill/>
+          <a:ln/>
+        </p:spPr>
+        <p:txBody>
+          <a:bodyPr wrap="square" lIns="0" tIns="0" rIns="0" bIns="0" rtlCol="0" anchor="ctr"/>
+          <a:lstStyle/>
+          <a:p>
+            <a:pPr indent="0" marL="0">
+              <a:buNone/>
+            </a:pPr>
+            <a:r>
+              <a:rPr lang="en-US" sz="900" dirty="0">
+                <a:solidFill>
+                  <a:srgbClr val="64748B"/>
                 </a:solidFill>
                 <a:latin typeface="Calibri" pitchFamily="34" charset="0"/>
                 <a:ea typeface="Calibri" pitchFamily="34" charset="-122"/>
                 <a:cs typeface="Calibri" pitchFamily="34" charset="-120"/>
               </a:rPr>
-              <a:t>Noise kills trust in tools — triage well</a:t>
-            </a:r>
-            <a:endParaRPr lang="en-US" sz="1400" dirty="0"/>
-          </a:p>
-        </p:txBody>
-      </p:sp>
-      <p:sp>
-        <p:nvSpPr>
-          <p:cNvPr id="7" name="Text 4"/>
-          <p:cNvSpPr/>
-          <p:nvPr/>
-        </p:nvSpPr>
-        <p:spPr>
-          <a:xfrm>
-            <a:off x="457200" y="4800600"/>
-            <a:ext cx="6949440" cy="274320"/>
-          </a:xfrm>
-          <a:prstGeom prst="rect">
-            <a:avLst/>
-          </a:prstGeom>
-          <a:noFill/>
-          <a:ln/>
-        </p:spPr>
-        <p:txBody>
-          <a:bodyPr wrap="square" lIns="0" tIns="0" rIns="0" bIns="0" rtlCol="0" anchor="ctr"/>
-          <a:lstStyle/>
-          <a:p>
-            <a:pPr indent="0" marL="0">
-              <a:buNone/>
-            </a:pPr>
-            <a:r>
-              <a:rPr lang="en-US" sz="900" dirty="0">
-                <a:solidFill>
-                  <a:srgbClr val="64748B"/>
-                </a:solidFill>
-                <a:latin typeface="Calibri" pitchFamily="34" charset="0"/>
-                <a:ea typeface="Calibri" pitchFamily="34" charset="-122"/>
-                <a:cs typeface="Calibri" pitchFamily="34" charset="-120"/>
-              </a:rPr>
               <a:t>Software Security · Week 2</a:t>
             </a:r>
             <a:endParaRPr lang="en-US" sz="900" dirty="0"/>
@@ -7773,7 +8615,7 @@
       </p:sp>
       <p:pic>
         <p:nvPicPr>
-          <p:cNvPr id="8" name="Image 1" descr="/Users/pop7/Library/CloudStorage/OneDrive-MonsterConnectCo.,Ltd/Lecture/KOSEN69 - software-security/slides/pptx/assets/logo-small.png">    </p:cNvPr>
+          <p:cNvPr id="10" name="Image 1" descr="/Users/pop7/Library/CloudStorage/OneDrive-MonsterConnectCo.,Ltd/Lecture/KOSEN69 - software-security/slides/pptx/assets/logo-small.png">    </p:cNvPr>
           <p:cNvPicPr>
             <a:picLocks noChangeAspect="1"/>
           </p:cNvPicPr>

--- a/slides/pptx/week02.pptx
+++ b/slides/pptx/week02.pptx
@@ -22,9 +22,11 @@
     <p:sldId id="270" r:id="rId16"/>
     <p:sldId id="271" r:id="rId17"/>
     <p:sldId id="272" r:id="rId18"/>
+    <p:sldId id="273" r:id="rId19"/>
+    <p:sldId id="274" r:id="rId20"/>
   </p:sldIdLst>
   <p:notesMasterIdLst>
-    <p:notesMasterId r:id="rId19"/>
+    <p:notesMasterId r:id="rId21"/>
   </p:notesMasterIdLst>
   <p:sldSz cx="9144000" cy="5143500"/>
   <p:notesSz cx="5143500" cy="9144000"/>
@@ -606,7 +608,7 @@
           <a:p>
             <a:r>
               <a:rPr lang="en-US" dirty="0"/>
-              <a:t>Crucial professional skill: a scanner that cries wolf gets ignored. Show a likely false positive vs a real one. Teach: every finding gets a CWE + a TP/FP call + a one-line justification. ~4 min.</a:t>
+              <a:t>This is harness.c's exact logic, computed in the browser — not an animation of "how fuzzing feels." Make sure "FUZ" (3 bytes, overflow) and "FUZZ" (4 bytes, deliberate trap via __builtin_trap — a different crash class, no memory-safety bug at all) both get tried, since that distinction is easy to blur. Ties to worksheet Task 4. ~4 min.</a:t>
             </a:r>
             <a:endParaRPr lang="en-US" dirty="0"/>
           </a:p>
@@ -694,7 +696,7 @@
           <a:p>
             <a:r>
               <a:rPr lang="en-US" dirty="0"/>
-              <a:t>Trivy is the one they'll type today (Task 5, scanning the NoteVault target) — say so explicitly so "tools you'll meet" doesn't read as "tools this lab uses." SonarQube/GHAS are real-world awareness. Connect "technical debt" to the cost curve from the recap. ~3 min.</a:t>
+              <a:t>Crucial professional skill: a scanner that cries wolf gets ignored. IMPORTANT — a real `bash scan.sh` run against this week's own vulnerable-repo returns 12 findings and all 12 are genuine true positives; there is no clean false-positive example in this specimen, so don't invent one live. The real triage skill THIS repo exercises is deduplication: 5 Semgrep rules fire on the identical SQLi line, 3 fire on the identical command-injection line — teach "same root cause, one row in your table" rather than promising a false positive you won't be able to produce on demand. Every finding still gets a CWE + a TP call + a one-line justification. ~4 min.</a:t>
             </a:r>
             <a:endParaRPr lang="en-US" dirty="0"/>
           </a:p>
@@ -782,7 +784,7 @@
           <a:p>
             <a:r>
               <a:rPr lang="en-US" dirty="0"/>
-              <a:t>Explain the game before lab: speed + accuracy. Penalize wild guessing (misclassified subtracts) so they must justify each finding. Mirrors a real bug-bounty triage queue. Warn about the two gotchas up front: Gitleaks needs `--no-git` or it silently reports zero leaks; the repo root's own `.gitleaks.toml` deliberately allowlists this lab's secrets, so scan `vulnerable-repo/` specifically, not the repo root. ~3 min.</a:t>
+              <a:t>Every rule ID and line number here is copied from an actual scan.sh run, not invented. The point: "5 rules fired" is not "5 bugs" — recognizing the SAME root cause under two different rule names is the real-world triage skill, more useful than a TP/FP guess. Directly rehearses worksheet Task 3's triage table. ~4 min.</a:t>
             </a:r>
             <a:endParaRPr lang="en-US" dirty="0"/>
           </a:p>
@@ -870,7 +872,7 @@
           <a:p>
             <a:r>
               <a:rPr lang="en-US" dirty="0"/>
-              <a:t>Quick, fun, instant feedback (it crashes or it doesn't). Sets up W11. If short on time, make this a demo. ~2 min.</a:t>
+              <a:t>Trivy is the one they'll type today (Task 5, scanning the NoteVault target) — say so explicitly so "tools you'll meet" doesn't read as "tools this lab uses." SonarQube/GHAS are real-world awareness. Connect "technical debt" to the cost curve from the recap. ~3 min.</a:t>
             </a:r>
             <a:endParaRPr lang="en-US" dirty="0"/>
           </a:p>
@@ -958,7 +960,7 @@
           <a:p>
             <a:r>
               <a:rPr lang="en-US" dirty="0"/>
-              <a:t>The graded output — six tasks, not three. The defend/fix task (25 pts, "Defense") is the single biggest score component and is easy to undersell if you only recap the triage table. Point to scan.sh.</a:t>
+              <a:t>Explain the game before lab: speed + accuracy. Penalize wild guessing (misclassified subtracts) so they must justify each finding. Mirrors a real bug-bounty triage queue. Warn about the two gotchas up front: Gitleaks needs `--no-git` or it silently reports zero leaks; the repo root's own `.gitleaks.toml` deliberately allowlists this lab's secrets, so scan `vulnerable-repo/` specifically, not the repo root. ~3 min.</a:t>
             </a:r>
             <a:endParaRPr lang="en-US" dirty="0"/>
           </a:p>
@@ -1046,7 +1048,7 @@
           <a:p>
             <a:r>
               <a:rPr lang="en-US" dirty="0"/>
-              <a:t>The graded output — six tasks, not three. The defend/fix task (25 pts, "Defense") is the single biggest score component and is easy to undersell if you only recap the triage table. Point to scan.sh.</a:t>
+              <a:t>Quick, fun, instant feedback (it crashes or it doesn't). Sets up W11. If short on time, make this a demo. ~2 min.</a:t>
             </a:r>
             <a:endParaRPr lang="en-US" dirty="0"/>
           </a:p>
@@ -1134,7 +1136,7 @@
           <a:p>
             <a:r>
               <a:rPr lang="en-US" dirty="0"/>
-              <a:t>Recap, 3 lines. Cold-call: "name a bug SAST would miss but DAST would catch." ~2 min.</a:t>
+              <a:t>The graded output — six tasks, not three. The defend/fix task (25 pts, "Defense") is the single biggest score component and is easy to undersell if you only recap the triage table. Point to scan.sh.</a:t>
             </a:r>
             <a:endParaRPr lang="en-US" dirty="0"/>
           </a:p>
@@ -1222,7 +1224,7 @@
           <a:p>
             <a:r>
               <a:rPr lang="en-US" dirty="0"/>
-              <a:t>Cliffhanger: "Next week we break crypto — crack passwords and decrypt a secret in minutes." Remind: scanners ready in their VM.</a:t>
+              <a:t>The graded output — six tasks, not three. The defend/fix task (25 pts, "Defense") is the single biggest score component and is easy to undersell if you only recap the triage table. Point to scan.sh.</a:t>
             </a:r>
             <a:endParaRPr lang="en-US" dirty="0"/>
           </a:p>
@@ -1246,6 +1248,182 @@
             <a:fld id="{F7021451-1387-4CA6-816F-3879F97B5CBC}" type="slidenum">
               <a:rPr lang="en-US"/>
               <a:t>17</a:t>
+            </a:fld>
+            <a:endParaRPr lang="en-US"/>
+          </a:p>
+        </p:txBody>
+      </p:sp>
+    </p:spTree>
+    <p:extLst>
+      <p:ext uri="{BB962C8B-B14F-4D97-AF65-F5344CB8AC3E}">
+        <p14:creationId xmlns:p14="http://schemas.microsoft.com/office/powerpoint/2010/main" val="1024086991"/>
+      </p:ext>
+    </p:extLst>
+  </p:cSld>
+  <p:clrMapOvr>
+    <a:masterClrMapping/>
+  </p:clrMapOvr>
+</p:notes>
+</file>
+
+<file path=ppt/notesSlides/notesSlide18.xml><?xml version="1.0" encoding="utf-8"?>
+<p:notes xmlns:a="http://schemas.openxmlformats.org/drawingml/2006/main" xmlns:r="http://schemas.openxmlformats.org/officeDocument/2006/relationships" xmlns:p="http://schemas.openxmlformats.org/presentationml/2006/main">
+  <p:cSld>
+    <p:spTree>
+      <p:nvGrpSpPr>
+        <p:cNvPr id="1" name=""/>
+        <p:cNvGrpSpPr/>
+        <p:nvPr/>
+      </p:nvGrpSpPr>
+      <p:grpSpPr>
+        <a:xfrm>
+          <a:off x="0" y="0"/>
+          <a:ext cx="0" cy="0"/>
+          <a:chOff x="0" y="0"/>
+          <a:chExt cx="0" cy="0"/>
+        </a:xfrm>
+      </p:grpSpPr>
+      <p:sp>
+        <p:nvSpPr>
+          <p:cNvPr id="2" name="Slide Image Placeholder 1"/>
+          <p:cNvSpPr>
+            <a:spLocks noGrp="1" noRot="1" noChangeAspect="1"/>
+          </p:cNvSpPr>
+          <p:nvPr>
+            <p:ph type="sldImg"/>
+          </p:nvPr>
+        </p:nvSpPr>
+        <p:spPr/>
+      </p:sp>
+      <p:sp>
+        <p:nvSpPr>
+          <p:cNvPr id="3" name="Notes Placeholder 2"/>
+          <p:cNvSpPr>
+            <a:spLocks noGrp="1"/>
+          </p:cNvSpPr>
+          <p:nvPr>
+            <p:ph type="body" idx="1"/>
+          </p:nvPr>
+        </p:nvSpPr>
+        <p:spPr/>
+        <p:txBody>
+          <a:bodyPr/>
+          <a:lstStyle/>
+          <a:p>
+            <a:r>
+              <a:rPr lang="en-US" dirty="0"/>
+              <a:t>Recap, 3 lines. Cold-call: "name a bug SAST would miss but DAST would catch." ~2 min.</a:t>
+            </a:r>
+            <a:endParaRPr lang="en-US" dirty="0"/>
+          </a:p>
+        </p:txBody>
+      </p:sp>
+      <p:sp>
+        <p:nvSpPr>
+          <p:cNvPr id="4" name="Slide Number Placeholder 3"/>
+          <p:cNvSpPr>
+            <a:spLocks noGrp="1"/>
+          </p:cNvSpPr>
+          <p:nvPr>
+            <p:ph type="sldNum" sz="quarter" idx="10"/>
+          </p:nvPr>
+        </p:nvSpPr>
+        <p:spPr/>
+        <p:txBody>
+          <a:bodyPr/>
+          <a:lstStyle/>
+          <a:p>
+            <a:fld id="{F7021451-1387-4CA6-816F-3879F97B5CBC}" type="slidenum">
+              <a:rPr lang="en-US"/>
+              <a:t>18</a:t>
+            </a:fld>
+            <a:endParaRPr lang="en-US"/>
+          </a:p>
+        </p:txBody>
+      </p:sp>
+    </p:spTree>
+    <p:extLst>
+      <p:ext uri="{BB962C8B-B14F-4D97-AF65-F5344CB8AC3E}">
+        <p14:creationId xmlns:p14="http://schemas.microsoft.com/office/powerpoint/2010/main" val="1024086991"/>
+      </p:ext>
+    </p:extLst>
+  </p:cSld>
+  <p:clrMapOvr>
+    <a:masterClrMapping/>
+  </p:clrMapOvr>
+</p:notes>
+</file>
+
+<file path=ppt/notesSlides/notesSlide19.xml><?xml version="1.0" encoding="utf-8"?>
+<p:notes xmlns:a="http://schemas.openxmlformats.org/drawingml/2006/main" xmlns:r="http://schemas.openxmlformats.org/officeDocument/2006/relationships" xmlns:p="http://schemas.openxmlformats.org/presentationml/2006/main">
+  <p:cSld>
+    <p:spTree>
+      <p:nvGrpSpPr>
+        <p:cNvPr id="1" name=""/>
+        <p:cNvGrpSpPr/>
+        <p:nvPr/>
+      </p:nvGrpSpPr>
+      <p:grpSpPr>
+        <a:xfrm>
+          <a:off x="0" y="0"/>
+          <a:ext cx="0" cy="0"/>
+          <a:chOff x="0" y="0"/>
+          <a:chExt cx="0" cy="0"/>
+        </a:xfrm>
+      </p:grpSpPr>
+      <p:sp>
+        <p:nvSpPr>
+          <p:cNvPr id="2" name="Slide Image Placeholder 1"/>
+          <p:cNvSpPr>
+            <a:spLocks noGrp="1" noRot="1" noChangeAspect="1"/>
+          </p:cNvSpPr>
+          <p:nvPr>
+            <p:ph type="sldImg"/>
+          </p:nvPr>
+        </p:nvSpPr>
+        <p:spPr/>
+      </p:sp>
+      <p:sp>
+        <p:nvSpPr>
+          <p:cNvPr id="3" name="Notes Placeholder 2"/>
+          <p:cNvSpPr>
+            <a:spLocks noGrp="1"/>
+          </p:cNvSpPr>
+          <p:nvPr>
+            <p:ph type="body" idx="1"/>
+          </p:nvPr>
+        </p:nvSpPr>
+        <p:spPr/>
+        <p:txBody>
+          <a:bodyPr/>
+          <a:lstStyle/>
+          <a:p>
+            <a:r>
+              <a:rPr lang="en-US" dirty="0"/>
+              <a:t>Cliffhanger: "Next week we break crypto — crack passwords and decrypt a secret in minutes." Remind: scanners ready in their VM.</a:t>
+            </a:r>
+            <a:endParaRPr lang="en-US" dirty="0"/>
+          </a:p>
+        </p:txBody>
+      </p:sp>
+      <p:sp>
+        <p:nvSpPr>
+          <p:cNvPr id="4" name="Slide Number Placeholder 3"/>
+          <p:cNvSpPr>
+            <a:spLocks noGrp="1"/>
+          </p:cNvSpPr>
+          <p:nvPr>
+            <p:ph type="sldNum" sz="quarter" idx="10"/>
+          </p:nvPr>
+        </p:nvSpPr>
+        <p:spPr/>
+        <p:txBody>
+          <a:bodyPr/>
+          <a:lstStyle/>
+          <a:p>
+            <a:fld id="{F7021451-1387-4CA6-816F-3879F97B5CBC}" type="slidenum">
+              <a:rPr lang="en-US"/>
+              <a:t>19</a:t>
             </a:fld>
             <a:endParaRPr lang="en-US"/>
           </a:p>
@@ -1574,7 +1752,7 @@
           <a:p>
             <a:r>
               <a:rPr lang="en-US" dirty="0"/>
-              <a:t>The mental map for the whole unit. Stress: no single tool finds everything — they see different things. Tie each to a later week (SCA → W12, DAST → Burp in W4-6). ~5 min.</a:t>
+              <a:t>The mental map for the whole unit. Stress: no single tool finds everything — they see different things. Every READS/FINDS/BLIND-TO on this diagram is real output from this week's own vulnerable-repo, not a hypothetical — walk it left to right and land on "complements, not substitutes." Tie each to a later week (SCA → W12, DAST → Burp in W4-6). ~5 min.</a:t>
             </a:r>
             <a:endParaRPr lang="en-US" dirty="0"/>
           </a:p>
@@ -1926,7 +2104,7 @@
           <a:p>
             <a:r>
               <a:rPr lang="en-US" dirty="0"/>
-              <a:t>Fuzzing is the highest-yield bug finder in industry (most memory CVEs come from it). Explain coverage-guided = the fuzzer "learns" inputs that reach new code. The seed corpus matters — unseeded, this exact harness crashes in roughly 1 of 6 short runs; seeded, it's reliable every time. Deep dive + exploit comes in W11. ~5 min.</a:t>
+              <a:t>Fuzzing is the highest-yield bug finder in industry (most memory CVEs come from it). Explain coverage-guided = the fuzzer "learns" inputs that reach new code — each correct byte unlocks a new path, which is why it beats blind random guessing. The seed corpus matters (seeded finds it in ~1 second; unseeded has to rediscover 3 magic bytes on its own) — the exact "how much faster" isn't a number I have a verified source for, so don't state one; the mechanism is the teachable part. Deep dive + exploit comes in W11. ~5 min.</a:t>
             </a:r>
             <a:endParaRPr lang="en-US" dirty="0"/>
           </a:p>
@@ -2559,7 +2737,7 @@
                 <a:ea typeface="Arial" pitchFamily="34" charset="-122"/>
                 <a:cs typeface="Arial" pitchFamily="34" charset="-120"/>
               </a:rPr>
-              <a:t>Triage: not every finding is a bug</a:t>
+              <a:t>Try it — what actually crashes this harness</a:t>
             </a:r>
             <a:endParaRPr lang="en-US" sz="2600" dirty="0"/>
           </a:p>
@@ -2567,43 +2745,14 @@
       </p:sp>
       <p:sp>
         <p:nvSpPr>
-          <p:cNvPr id="5" name="Shape 2"/>
-          <p:cNvSpPr/>
-          <p:nvPr/>
-        </p:nvSpPr>
-        <p:spPr>
-          <a:xfrm>
-            <a:off x="457200" y="1325880"/>
-            <a:ext cx="8229600" cy="1517904"/>
-          </a:xfrm>
-          <a:prstGeom prst="roundRect">
-            <a:avLst>
-              <a:gd name="adj" fmla="val 4819"/>
-            </a:avLst>
-          </a:prstGeom>
-          <a:solidFill>
-            <a:srgbClr val="F1F5F9"/>
-          </a:solidFill>
-          <a:ln/>
-          <a:effectLst>
-            <a:outerShdw sx="100000" sy="100000" kx="0" ky="0" algn="bl" rotWithShape="0" blurRad="76200" dist="25400" dir="5400000">
-              <a:srgbClr val="000000">
-                <a:alpha val="12000"/>
-              </a:srgbClr>
-            </a:outerShdw>
-          </a:effectLst>
-        </p:spPr>
-      </p:sp>
-      <p:sp>
-        <p:nvSpPr>
-          <p:cNvPr id="6" name="Text 3"/>
-          <p:cNvSpPr/>
-          <p:nvPr/>
-        </p:nvSpPr>
-        <p:spPr>
-          <a:xfrm>
-            <a:off x="731520" y="1435608"/>
-            <a:ext cx="7680960" cy="1298448"/>
+          <p:cNvPr id="5" name="Text 2"/>
+          <p:cNvSpPr/>
+          <p:nvPr/>
+        </p:nvSpPr>
+        <p:spPr>
+          <a:xfrm>
+            <a:off x="548640" y="1325880"/>
+            <a:ext cx="8046720" cy="822960"/>
           </a:xfrm>
           <a:prstGeom prst="rect">
             <a:avLst/>
@@ -2617,12 +2766,8 @@
           </a:bodyPr>
           <a:lstStyle/>
           <a:p>
-            <a:pPr marL="342900" indent="-342900">
-              <a:spcAft>
-                <a:spcPts val="600"/>
-              </a:spcAft>
-              <a:buSzPct val="100000"/>
-              <a:buChar char="•"/>
+            <a:pPr indent="0" marL="0">
+              <a:buNone/>
             </a:pPr>
             <a:r>
               <a:rPr lang="en-US" sz="1400" dirty="0">
@@ -2633,17 +2778,13 @@
                 <a:ea typeface="Calibri" pitchFamily="34" charset="-122"/>
                 <a:cs typeface="Calibri" pitchFamily="34" charset="-120"/>
               </a:rPr>
-              <a:t>True positive vs false positive</a:t>
+              <a:t>Type bytes, or pick a preset. Each cell is one if in the real source.</a:t>
             </a:r>
             <a:endParaRPr lang="en-US" sz="1400" dirty="0"/>
           </a:p>
           <a:p>
-            <a:pPr marL="342900" indent="-342900">
-              <a:spcAft>
-                <a:spcPts val="600"/>
-              </a:spcAft>
-              <a:buSzPct val="100000"/>
-              <a:buChar char="•"/>
+            <a:pPr indent="0" marL="0">
+              <a:buNone/>
             </a:pPr>
             <a:r>
               <a:rPr lang="en-US" sz="1400" dirty="0">
@@ -2654,87 +2795,45 @@
                 <a:ea typeface="Calibri" pitchFamily="34" charset="-122"/>
                 <a:cs typeface="Calibri" pitchFamily="34" charset="-120"/>
               </a:rPr>
-              <a:t>Map each to a CWE + severity</a:t>
+              <a:t>Try it live: /sim/fuzz-verdict (interactive simulation, web only)</a:t>
             </a:r>
             <a:endParaRPr lang="en-US" sz="1400" dirty="0"/>
           </a:p>
-          <a:p>
-            <a:pPr marL="342900" indent="-342900">
-              <a:spcAft>
-                <a:spcPts val="600"/>
-              </a:spcAft>
-              <a:buSzPct val="100000"/>
-              <a:buChar char="•"/>
-            </a:pPr>
-            <a:r>
-              <a:rPr lang="en-US" sz="1400" dirty="0">
-                <a:solidFill>
-                  <a:srgbClr val="1F2937"/>
+        </p:txBody>
+      </p:sp>
+      <p:sp>
+        <p:nvSpPr>
+          <p:cNvPr id="6" name="Text 3"/>
+          <p:cNvSpPr/>
+          <p:nvPr/>
+        </p:nvSpPr>
+        <p:spPr>
+          <a:xfrm>
+            <a:off x="457200" y="4800600"/>
+            <a:ext cx="6949440" cy="274320"/>
+          </a:xfrm>
+          <a:prstGeom prst="rect">
+            <a:avLst/>
+          </a:prstGeom>
+          <a:noFill/>
+          <a:ln/>
+        </p:spPr>
+        <p:txBody>
+          <a:bodyPr wrap="square" lIns="0" tIns="0" rIns="0" bIns="0" rtlCol="0" anchor="ctr"/>
+          <a:lstStyle/>
+          <a:p>
+            <a:pPr indent="0" marL="0">
+              <a:buNone/>
+            </a:pPr>
+            <a:r>
+              <a:rPr lang="en-US" sz="900" dirty="0">
+                <a:solidFill>
+                  <a:srgbClr val="64748B"/>
                 </a:solidFill>
                 <a:latin typeface="Calibri" pitchFamily="34" charset="0"/>
                 <a:ea typeface="Calibri" pitchFamily="34" charset="-122"/>
                 <a:cs typeface="Calibri" pitchFamily="34" charset="-120"/>
               </a:rPr>
-              <a:t>Prioritize by exploitability × impact</a:t>
-            </a:r>
-            <a:endParaRPr lang="en-US" sz="1400" dirty="0"/>
-          </a:p>
-          <a:p>
-            <a:pPr marL="342900" indent="-342900">
-              <a:spcAft>
-                <a:spcPts val="600"/>
-              </a:spcAft>
-              <a:buSzPct val="100000"/>
-              <a:buChar char="•"/>
-            </a:pPr>
-            <a:r>
-              <a:rPr lang="en-US" sz="1400" dirty="0">
-                <a:solidFill>
-                  <a:srgbClr val="1F2937"/>
-                </a:solidFill>
-                <a:latin typeface="Calibri" pitchFamily="34" charset="0"/>
-                <a:ea typeface="Calibri" pitchFamily="34" charset="-122"/>
-                <a:cs typeface="Calibri" pitchFamily="34" charset="-120"/>
-              </a:rPr>
-              <a:t>Noise kills trust in tools — triage well</a:t>
-            </a:r>
-            <a:endParaRPr lang="en-US" sz="1400" dirty="0"/>
-          </a:p>
-        </p:txBody>
-      </p:sp>
-      <p:sp>
-        <p:nvSpPr>
-          <p:cNvPr id="7" name="Text 4"/>
-          <p:cNvSpPr/>
-          <p:nvPr/>
-        </p:nvSpPr>
-        <p:spPr>
-          <a:xfrm>
-            <a:off x="457200" y="4800600"/>
-            <a:ext cx="6949440" cy="274320"/>
-          </a:xfrm>
-          <a:prstGeom prst="rect">
-            <a:avLst/>
-          </a:prstGeom>
-          <a:noFill/>
-          <a:ln/>
-        </p:spPr>
-        <p:txBody>
-          <a:bodyPr wrap="square" lIns="0" tIns="0" rIns="0" bIns="0" rtlCol="0" anchor="ctr"/>
-          <a:lstStyle/>
-          <a:p>
-            <a:pPr indent="0" marL="0">
-              <a:buNone/>
-            </a:pPr>
-            <a:r>
-              <a:rPr lang="en-US" sz="900" dirty="0">
-                <a:solidFill>
-                  <a:srgbClr val="64748B"/>
-                </a:solidFill>
-                <a:latin typeface="Calibri" pitchFamily="34" charset="0"/>
-                <a:ea typeface="Calibri" pitchFamily="34" charset="-122"/>
-                <a:cs typeface="Calibri" pitchFamily="34" charset="-120"/>
-              </a:rPr>
               <a:t>Software Security · Week 2</a:t>
             </a:r>
             <a:endParaRPr lang="en-US" sz="900" dirty="0"/>
@@ -2743,7 +2842,7 @@
       </p:sp>
       <p:pic>
         <p:nvPicPr>
-          <p:cNvPr id="8" name="Image 1" descr="/Users/pop7/Library/CloudStorage/OneDrive-MonsterConnectCo.,Ltd/Lecture/KOSEN69 - software-security/slides/pptx/assets/logo-small.png">    </p:cNvPr>
+          <p:cNvPr id="7" name="Image 1" descr="/Users/pop7/Library/CloudStorage/OneDrive-MonsterConnectCo.,Ltd/Lecture/KOSEN69 - software-security/slides/pptx/assets/logo-small.png">    </p:cNvPr>
           <p:cNvPicPr>
             <a:picLocks noChangeAspect="1"/>
           </p:cNvPicPr>
@@ -2881,7 +2980,7 @@
                 <a:ea typeface="Arial" pitchFamily="34" charset="-122"/>
                 <a:cs typeface="Arial" pitchFamily="34" charset="-120"/>
               </a:rPr>
-              <a:t>Tools you'll meet</a:t>
+              <a:t>Triage: not every finding is a bug</a:t>
             </a:r>
             <a:endParaRPr lang="en-US" sz="2600" dirty="0"/>
           </a:p>
@@ -2896,11 +2995,11 @@
         <p:spPr>
           <a:xfrm>
             <a:off x="457200" y="1325880"/>
-            <a:ext cx="8229600" cy="1609344"/>
+            <a:ext cx="8229600" cy="1517904"/>
           </a:xfrm>
           <a:prstGeom prst="roundRect">
             <a:avLst>
-              <a:gd name="adj" fmla="val 4545"/>
+              <a:gd name="adj" fmla="val 4819"/>
             </a:avLst>
           </a:prstGeom>
           <a:solidFill>
@@ -2925,7 +3024,7 @@
         <p:spPr>
           <a:xfrm>
             <a:off x="731520" y="1435608"/>
-            <a:ext cx="7680960" cy="1389888"/>
+            <a:ext cx="7680960" cy="1298448"/>
           </a:xfrm>
           <a:prstGeom prst="rect">
             <a:avLst/>
@@ -2955,7 +3054,7 @@
                 <a:ea typeface="Calibri" pitchFamily="34" charset="-122"/>
                 <a:cs typeface="Calibri" pitchFamily="34" charset="-120"/>
               </a:rPr>
-              <a:t>Trivy — the SCA scanner you'll actually run this lab (dependency scan today; image + IaC scanning return in W12/13)</a:t>
+              <a:t>True positive vs false positive</a:t>
             </a:r>
             <a:endParaRPr lang="en-US" sz="1400" dirty="0"/>
           </a:p>
@@ -2976,7 +3075,7 @@
                 <a:ea typeface="Calibri" pitchFamily="34" charset="-122"/>
                 <a:cs typeface="Calibri" pitchFamily="34" charset="-120"/>
               </a:rPr>
-              <a:t>SonarQube, GitHub Advanced Security (GHAS) — quality-gate/SAST-in-the-repo tools you'll see in industry/internships, not used in this lab</a:t>
+              <a:t>Map each to a CWE + severity</a:t>
             </a:r>
             <a:endParaRPr lang="en-US" sz="1400" dirty="0"/>
           </a:p>
@@ -2997,7 +3096,28 @@
                 <a:ea typeface="Calibri" pitchFamily="34" charset="-122"/>
                 <a:cs typeface="Calibri" pitchFamily="34" charset="-120"/>
               </a:rPr>
-              <a:t>Address technical debt early — cheaper than re-work later</a:t>
+              <a:t>Prioritize by exploitability × impact</a:t>
+            </a:r>
+            <a:endParaRPr lang="en-US" sz="1400" dirty="0"/>
+          </a:p>
+          <a:p>
+            <a:pPr marL="342900" indent="-342900">
+              <a:spcAft>
+                <a:spcPts val="600"/>
+              </a:spcAft>
+              <a:buSzPct val="100000"/>
+              <a:buChar char="•"/>
+            </a:pPr>
+            <a:r>
+              <a:rPr lang="en-US" sz="1400" dirty="0">
+                <a:solidFill>
+                  <a:srgbClr val="1F2937"/>
+                </a:solidFill>
+                <a:latin typeface="Calibri" pitchFamily="34" charset="0"/>
+                <a:ea typeface="Calibri" pitchFamily="34" charset="-122"/>
+                <a:cs typeface="Calibri" pitchFamily="34" charset="-120"/>
+              </a:rPr>
+              <a:t>Noise kills trust in tools — triage well</a:t>
             </a:r>
             <a:endParaRPr lang="en-US" sz="1400" dirty="0"/>
           </a:p>
@@ -3182,7 +3302,7 @@
                 <a:ea typeface="Arial" pitchFamily="34" charset="-122"/>
                 <a:cs typeface="Arial" pitchFamily="34" charset="-120"/>
               </a:rPr>
-              <a:t>🏁 Game — Bug Triage Race</a:t>
+              <a:t>Try it — which bug is this, really?</a:t>
             </a:r>
             <a:endParaRPr lang="en-US" sz="2600" dirty="0"/>
           </a:p>
@@ -3190,43 +3310,14 @@
       </p:sp>
       <p:sp>
         <p:nvSpPr>
-          <p:cNvPr id="5" name="Shape 2"/>
-          <p:cNvSpPr/>
-          <p:nvPr/>
-        </p:nvSpPr>
-        <p:spPr>
-          <a:xfrm>
-            <a:off x="457200" y="1325880"/>
-            <a:ext cx="8229600" cy="896112"/>
-          </a:xfrm>
-          <a:prstGeom prst="roundRect">
-            <a:avLst>
-              <a:gd name="adj" fmla="val 8163"/>
-            </a:avLst>
-          </a:prstGeom>
-          <a:solidFill>
-            <a:srgbClr val="F1F5F9"/>
-          </a:solidFill>
-          <a:ln/>
-          <a:effectLst>
-            <a:outerShdw sx="100000" sy="100000" kx="0" ky="0" algn="bl" rotWithShape="0" blurRad="76200" dist="25400" dir="5400000">
-              <a:srgbClr val="000000">
-                <a:alpha val="12000"/>
-              </a:srgbClr>
-            </a:outerShdw>
-          </a:effectLst>
-        </p:spPr>
-      </p:sp>
-      <p:sp>
-        <p:nvSpPr>
-          <p:cNvPr id="6" name="Text 3"/>
-          <p:cNvSpPr/>
-          <p:nvPr/>
-        </p:nvSpPr>
-        <p:spPr>
-          <a:xfrm>
-            <a:off x="731520" y="1435608"/>
-            <a:ext cx="7680960" cy="676656"/>
+          <p:cNvPr id="5" name="Text 2"/>
+          <p:cNvSpPr/>
+          <p:nvPr/>
+        </p:nvSpPr>
+        <p:spPr>
+          <a:xfrm>
+            <a:off x="548640" y="1325880"/>
+            <a:ext cx="8046720" cy="822960"/>
           </a:xfrm>
           <a:prstGeom prst="rect">
             <a:avLst/>
@@ -3240,12 +3331,8 @@
           </a:bodyPr>
           <a:lstStyle/>
           <a:p>
-            <a:pPr marL="342900" indent="-342900">
-              <a:spcAft>
-                <a:spcPts val="600"/>
-              </a:spcAft>
-              <a:buSzPct val="100000"/>
-              <a:buChar char="•"/>
+            <a:pPr indent="0" marL="0">
+              <a:buNone/>
             </a:pPr>
             <a:r>
               <a:rPr lang="en-US" sz="1400" dirty="0">
@@ -3256,17 +3343,13 @@
                 <a:ea typeface="Calibri" pitchFamily="34" charset="-122"/>
                 <a:cs typeface="Calibri" pitchFamily="34" charset="-120"/>
               </a:rPr>
-              <a:t>Run Semgrep + Gitleaks on the flawed repo</a:t>
+              <a:t>Seven raw findings from a real scan. Map each back to the one bug underneath.</a:t>
             </a:r>
             <a:endParaRPr lang="en-US" sz="1400" dirty="0"/>
           </a:p>
           <a:p>
-            <a:pPr marL="342900" indent="-342900">
-              <a:spcAft>
-                <a:spcPts val="600"/>
-              </a:spcAft>
-              <a:buSzPct val="100000"/>
-              <a:buChar char="•"/>
+            <a:pPr indent="0" marL="0">
+              <a:buNone/>
             </a:pPr>
             <a:r>
               <a:rPr lang="en-US" sz="1400" dirty="0">
@@ -3277,7 +3360,7 @@
                 <a:ea typeface="Calibri" pitchFamily="34" charset="-122"/>
                 <a:cs typeface="Calibri" pitchFamily="34" charset="-120"/>
               </a:rPr>
-              <a:t>Score = true positives − misclassified · live scoreboard</a:t>
+              <a:t>Try it live: /sim/triage-drill (interactive simulation, web only)</a:t>
             </a:r>
             <a:endParaRPr lang="en-US" sz="1400" dirty="0"/>
           </a:p>
@@ -3285,126 +3368,7 @@
       </p:sp>
       <p:sp>
         <p:nvSpPr>
-          <p:cNvPr id="7" name="Shape 4"/>
-          <p:cNvSpPr/>
-          <p:nvPr/>
-        </p:nvSpPr>
-        <p:spPr>
-          <a:xfrm>
-            <a:off x="457200" y="2386584"/>
-            <a:ext cx="8229600" cy="1152144"/>
-          </a:xfrm>
-          <a:prstGeom prst="roundRect">
-            <a:avLst>
-              <a:gd name="adj" fmla="val 4762"/>
-            </a:avLst>
-          </a:prstGeom>
-          <a:solidFill>
-            <a:srgbClr val="0A1020"/>
-          </a:solidFill>
-          <a:ln w="12700">
-            <a:solidFill>
-              <a:srgbClr val="E8EDF3"/>
-            </a:solidFill>
-            <a:prstDash val="solid"/>
-          </a:ln>
-        </p:spPr>
-      </p:sp>
-      <p:sp>
-        <p:nvSpPr>
-          <p:cNvPr id="8" name="Text 5"/>
-          <p:cNvSpPr/>
-          <p:nvPr/>
-        </p:nvSpPr>
-        <p:spPr>
-          <a:xfrm>
-            <a:off x="640080" y="2459736"/>
-            <a:ext cx="7863840" cy="1005840"/>
-          </a:xfrm>
-          <a:prstGeom prst="rect">
-            <a:avLst/>
-          </a:prstGeom>
-          <a:noFill/>
-          <a:ln/>
-        </p:spPr>
-        <p:txBody>
-          <a:bodyPr wrap="square" lIns="0" tIns="0" rIns="0" bIns="0" rtlCol="0" anchor="t">
-            <a:normAutofit/>
-          </a:bodyPr>
-          <a:lstStyle/>
-          <a:p>
-            <a:pPr indent="0" marL="0">
-              <a:buNone/>
-            </a:pPr>
-            <a:r>
-              <a:rPr lang="en-US" sz="1150" dirty="0">
-                <a:solidFill>
-                  <a:srgbClr val="9FE7D6"/>
-                </a:solidFill>
-                <a:latin typeface="Courier New" pitchFamily="34" charset="0"/>
-                <a:ea typeface="Courier New" pitchFamily="34" charset="-122"/>
-                <a:cs typeface="Courier New" pitchFamily="34" charset="-120"/>
-              </a:rPr>
-              <a:t>docker run --rm -v "$PWD/vulnerable-repo:/src" semgrep/semgrep \</a:t>
-            </a:r>
-            <a:endParaRPr lang="en-US" sz="1150" dirty="0"/>
-          </a:p>
-          <a:p>
-            <a:pPr indent="0" marL="0">
-              <a:buNone/>
-            </a:pPr>
-            <a:r>
-              <a:rPr lang="en-US" sz="1150" dirty="0">
-                <a:solidFill>
-                  <a:srgbClr val="9FE7D6"/>
-                </a:solidFill>
-                <a:latin typeface="Courier New" pitchFamily="34" charset="0"/>
-                <a:ea typeface="Courier New" pitchFamily="34" charset="-122"/>
-                <a:cs typeface="Courier New" pitchFamily="34" charset="-120"/>
-              </a:rPr>
-              <a:t>  semgrep --config p/default --config p/owasp-top-ten /src</a:t>
-            </a:r>
-            <a:endParaRPr lang="en-US" sz="1150" dirty="0"/>
-          </a:p>
-          <a:p>
-            <a:pPr indent="0" marL="0">
-              <a:buNone/>
-            </a:pPr>
-            <a:r>
-              <a:rPr lang="en-US" sz="1150" dirty="0">
-                <a:solidFill>
-                  <a:srgbClr val="9FE7D6"/>
-                </a:solidFill>
-                <a:latin typeface="Courier New" pitchFamily="34" charset="0"/>
-                <a:ea typeface="Courier New" pitchFamily="34" charset="-122"/>
-                <a:cs typeface="Courier New" pitchFamily="34" charset="-120"/>
-              </a:rPr>
-              <a:t>docker run --rm -v "$PWD/vulnerable-repo:/repo" zricethezav/gitleaks:latest \</a:t>
-            </a:r>
-            <a:endParaRPr lang="en-US" sz="1150" dirty="0"/>
-          </a:p>
-          <a:p>
-            <a:pPr indent="0" marL="0">
-              <a:buNone/>
-            </a:pPr>
-            <a:r>
-              <a:rPr lang="en-US" sz="1150" dirty="0">
-                <a:solidFill>
-                  <a:srgbClr val="9FE7D6"/>
-                </a:solidFill>
-                <a:latin typeface="Courier New" pitchFamily="34" charset="0"/>
-                <a:ea typeface="Courier New" pitchFamily="34" charset="-122"/>
-                <a:cs typeface="Courier New" pitchFamily="34" charset="-120"/>
-              </a:rPr>
-              <a:t>  detect -s /repo -v --no-git</a:t>
-            </a:r>
-            <a:endParaRPr lang="en-US" sz="1150" dirty="0"/>
-          </a:p>
-        </p:txBody>
-      </p:sp>
-      <p:sp>
-        <p:nvSpPr>
-          <p:cNvPr id="9" name="Text 6"/>
+          <p:cNvPr id="6" name="Text 3"/>
           <p:cNvSpPr/>
           <p:nvPr/>
         </p:nvSpPr>
@@ -3443,7 +3407,7 @@
       </p:sp>
       <p:pic>
         <p:nvPicPr>
-          <p:cNvPr id="10" name="Image 1" descr="/Users/pop7/Library/CloudStorage/OneDrive-MonsterConnectCo.,Ltd/Lecture/KOSEN69 - software-security/slides/pptx/assets/logo-small.png">    </p:cNvPr>
+          <p:cNvPr id="7" name="Image 1" descr="/Users/pop7/Library/CloudStorage/OneDrive-MonsterConnectCo.,Ltd/Lecture/KOSEN69 - software-security/slides/pptx/assets/logo-small.png">    </p:cNvPr>
           <p:cNvPicPr>
             <a:picLocks noChangeAspect="1"/>
           </p:cNvPicPr>
@@ -3581,7 +3545,7 @@
                 <a:ea typeface="Arial" pitchFamily="34" charset="-122"/>
                 <a:cs typeface="Arial" pitchFamily="34" charset="-120"/>
               </a:rPr>
-              <a:t>🐝 Mini-game — Fuzzing Race</a:t>
+              <a:t>Tools you'll meet</a:t>
             </a:r>
             <a:endParaRPr lang="en-US" sz="2600" dirty="0"/>
           </a:p>
@@ -3596,11 +3560,11 @@
         <p:spPr>
           <a:xfrm>
             <a:off x="457200" y="1325880"/>
-            <a:ext cx="8229600" cy="1207008"/>
+            <a:ext cx="8229600" cy="1609344"/>
           </a:xfrm>
           <a:prstGeom prst="roundRect">
             <a:avLst>
-              <a:gd name="adj" fmla="val 6061"/>
+              <a:gd name="adj" fmla="val 4545"/>
             </a:avLst>
           </a:prstGeom>
           <a:solidFill>
@@ -3625,7 +3589,7 @@
         <p:spPr>
           <a:xfrm>
             <a:off x="731520" y="1435608"/>
-            <a:ext cx="7680960" cy="987552"/>
+            <a:ext cx="7680960" cy="1389888"/>
           </a:xfrm>
           <a:prstGeom prst="rect">
             <a:avLst/>
@@ -3655,7 +3619,7 @@
                 <a:ea typeface="Calibri" pitchFamily="34" charset="-122"/>
                 <a:cs typeface="Calibri" pitchFamily="34" charset="-120"/>
               </a:rPr>
-              <a:t>First team to make the provided target crash wins</a:t>
+              <a:t>Trivy — the SCA scanner you'll actually run this lab (dependency scan today; image + IaC scanning return in W12/13)</a:t>
             </a:r>
             <a:endParaRPr lang="en-US" sz="1400" dirty="0"/>
           </a:p>
@@ -3676,7 +3640,7 @@
                 <a:ea typeface="Calibri" pitchFamily="34" charset="-122"/>
                 <a:cs typeface="Calibri" pitchFamily="34" charset="-120"/>
               </a:rPr>
-              <a:t>One crash → one root-cause note</a:t>
+              <a:t>SonarQube, GitHub Advanced Security (GHAS) — quality-gate/SAST-in-the-repo tools you'll see in industry/internships, not used in this lab</a:t>
             </a:r>
             <a:endParaRPr lang="en-US" sz="1400" dirty="0"/>
           </a:p>
@@ -3697,7 +3661,7 @@
                 <a:ea typeface="Calibri" pitchFamily="34" charset="-122"/>
                 <a:cs typeface="Calibri" pitchFamily="34" charset="-120"/>
               </a:rPr>
-              <a:t>Full fuzz→exploit lab returns in Week 11</a:t>
+              <a:t>Address technical debt early — cheaper than re-work later</a:t>
             </a:r>
             <a:endParaRPr lang="en-US" sz="1400" dirty="0"/>
           </a:p>
@@ -3882,7 +3846,7 @@
                 <a:ea typeface="Arial" pitchFamily="34" charset="-122"/>
                 <a:cs typeface="Arial" pitchFamily="34" charset="-120"/>
               </a:rPr>
-              <a:t>Lab 2 — deliverable</a:t>
+              <a:t>🏁 Game — Bug Triage Race</a:t>
             </a:r>
             <a:endParaRPr lang="en-US" sz="2600" dirty="0"/>
           </a:p>
@@ -3897,74 +3861,11 @@
         <p:spPr>
           <a:xfrm>
             <a:off x="457200" y="1325880"/>
-            <a:ext cx="8229600" cy="822960"/>
+            <a:ext cx="8229600" cy="896112"/>
           </a:xfrm>
           <a:prstGeom prst="roundRect">
             <a:avLst>
-              <a:gd name="adj" fmla="val 8889"/>
-            </a:avLst>
-          </a:prstGeom>
-          <a:solidFill>
-            <a:srgbClr val="E8EDF3"/>
-          </a:solidFill>
-          <a:ln/>
-        </p:spPr>
-      </p:sp>
-      <p:sp>
-        <p:nvSpPr>
-          <p:cNvPr id="6" name="Text 3"/>
-          <p:cNvSpPr/>
-          <p:nvPr/>
-        </p:nvSpPr>
-        <p:spPr>
-          <a:xfrm>
-            <a:off x="731520" y="1325880"/>
-            <a:ext cx="7680960" cy="822960"/>
-          </a:xfrm>
-          <a:prstGeom prst="rect">
-            <a:avLst/>
-          </a:prstGeom>
-          <a:noFill/>
-          <a:ln/>
-        </p:spPr>
-        <p:txBody>
-          <a:bodyPr wrap="square" lIns="0" tIns="0" rIns="0" bIns="0" rtlCol="0" anchor="ctr">
-            <a:normAutofit/>
-          </a:bodyPr>
-          <a:lstStyle/>
-          <a:p>
-            <a:pPr indent="0" marL="0">
-              <a:buNone/>
-            </a:pPr>
-            <a:r>
-              <a:rPr lang="en-US" sz="1400" i="1" dirty="0">
-                <a:solidFill>
-                  <a:srgbClr val="E35205"/>
-                </a:solidFill>
-                <a:latin typeface="Calibri" pitchFamily="34" charset="0"/>
-                <a:ea typeface="Calibri" pitchFamily="34" charset="-122"/>
-                <a:cs typeface="Calibri" pitchFamily="34" charset="-120"/>
-              </a:rPr>
-              <a:t>📋 Worksheet 2 — labs/week02-sdlc-tooling/worksheet.md (Part 3) · kickoff: bash scan.sh (Semgrep ×2 rulesets + Gitleaks --no-git on ./vulnerable-repo)</a:t>
-            </a:r>
-            <a:endParaRPr lang="en-US" sz="1400" dirty="0"/>
-          </a:p>
-        </p:txBody>
-      </p:sp>
-      <p:sp>
-        <p:nvSpPr>
-          <p:cNvPr id="7" name="Shape 4"/>
-          <p:cNvSpPr/>
-          <p:nvPr/>
-        </p:nvSpPr>
-        <p:spPr>
-          <a:xfrm>
-            <a:off x="457200" y="2313432"/>
-            <a:ext cx="8229600" cy="2029968"/>
-          </a:xfrm>
-          <a:prstGeom prst="roundRect">
-            <a:avLst>
-              <a:gd name="adj" fmla="val 3604"/>
+              <a:gd name="adj" fmla="val 8163"/>
             </a:avLst>
           </a:prstGeom>
           <a:solidFill>
@@ -3982,14 +3883,14 @@
       </p:sp>
       <p:sp>
         <p:nvSpPr>
-          <p:cNvPr id="8" name="Text 5"/>
-          <p:cNvSpPr/>
-          <p:nvPr/>
-        </p:nvSpPr>
-        <p:spPr>
-          <a:xfrm>
-            <a:off x="731520" y="2423160"/>
-            <a:ext cx="7680960" cy="1810512"/>
+          <p:cNvPr id="6" name="Text 3"/>
+          <p:cNvSpPr/>
+          <p:nvPr/>
+        </p:nvSpPr>
+        <p:spPr>
+          <a:xfrm>
+            <a:off x="731520" y="1435608"/>
+            <a:ext cx="7680960" cy="676656"/>
           </a:xfrm>
           <a:prstGeom prst="rect">
             <a:avLst/>
@@ -4019,7 +3920,7 @@
                 <a:ea typeface="Calibri" pitchFamily="34" charset="-122"/>
                 <a:cs typeface="Calibri" pitchFamily="34" charset="-120"/>
               </a:rPr>
-              <a:t>A findings triage table: tool, CWE, severity, TP/FP, fix idea (3 TP + 1 FP, justified)</a:t>
+              <a:t>Run Semgrep + Gitleaks on the flawed repo</a:t>
             </a:r>
             <a:endParaRPr lang="en-US" sz="1400" dirty="0"/>
           </a:p>
@@ -4040,72 +3941,128 @@
                 <a:ea typeface="Calibri" pitchFamily="34" charset="-122"/>
                 <a:cs typeface="Calibri" pitchFamily="34" charset="-120"/>
               </a:rPr>
-              <a:t>1 fuzzing crash with a one-line root cause</a:t>
+              <a:t>Score = true positives − misclassified · live scoreboard</a:t>
             </a:r>
             <a:endParaRPr lang="en-US" sz="1400" dirty="0"/>
           </a:p>
-          <a:p>
-            <a:pPr marL="342900" indent="-342900">
-              <a:spcAft>
-                <a:spcPts val="600"/>
-              </a:spcAft>
-              <a:buSzPct val="100000"/>
-              <a:buChar char="•"/>
-            </a:pPr>
-            <a:r>
-              <a:rPr lang="en-US" sz="1400" dirty="0">
-                <a:solidFill>
-                  <a:srgbClr val="1F2937"/>
-                </a:solidFill>
-                <a:latin typeface="Calibri" pitchFamily="34" charset="0"/>
-                <a:ea typeface="Calibri" pitchFamily="34" charset="-122"/>
-                <a:cs typeface="Calibri" pitchFamily="34" charset="-120"/>
-              </a:rPr>
-              <a:t>Trivy SCA scan of the NoteVault project target</a:t>
-            </a:r>
-            <a:endParaRPr lang="en-US" sz="1400" dirty="0"/>
-          </a:p>
-          <a:p>
-            <a:pPr marL="342900" indent="-342900">
-              <a:spcAft>
-                <a:spcPts val="600"/>
-              </a:spcAft>
-              <a:buSzPct val="100000"/>
-              <a:buChar char="•"/>
-            </a:pPr>
-            <a:r>
-              <a:rPr lang="en-US" sz="1400" dirty="0">
-                <a:solidFill>
-                  <a:srgbClr val="1F2937"/>
-                </a:solidFill>
-                <a:latin typeface="Calibri" pitchFamily="34" charset="0"/>
-                <a:ea typeface="Calibri" pitchFamily="34" charset="-122"/>
-                <a:cs typeface="Calibri" pitchFamily="34" charset="-120"/>
-              </a:rPr>
-              <a:t>A security CI gate built from Week 15's security-ci.yml</a:t>
-            </a:r>
-            <a:endParaRPr lang="en-US" sz="1400" dirty="0"/>
-          </a:p>
-          <a:p>
-            <a:pPr marL="342900" indent="-342900">
-              <a:spcAft>
-                <a:spcPts val="600"/>
-              </a:spcAft>
-              <a:buSzPct val="100000"/>
-              <a:buChar char="•"/>
-            </a:pPr>
-            <a:r>
-              <a:rPr lang="en-US" sz="1400" dirty="0">
-                <a:solidFill>
-                  <a:srgbClr val="1F2937"/>
-                </a:solidFill>
-                <a:latin typeface="Calibri" pitchFamily="34" charset="0"/>
-                <a:ea typeface="Calibri" pitchFamily="34" charset="-122"/>
-                <a:cs typeface="Calibri" pitchFamily="34" charset="-120"/>
-              </a:rPr>
-              <a:t>One SAST blind spot you found by hand</a:t>
-            </a:r>
-            <a:endParaRPr lang="en-US" sz="1400" dirty="0"/>
+        </p:txBody>
+      </p:sp>
+      <p:sp>
+        <p:nvSpPr>
+          <p:cNvPr id="7" name="Shape 4"/>
+          <p:cNvSpPr/>
+          <p:nvPr/>
+        </p:nvSpPr>
+        <p:spPr>
+          <a:xfrm>
+            <a:off x="457200" y="2386584"/>
+            <a:ext cx="8229600" cy="1152144"/>
+          </a:xfrm>
+          <a:prstGeom prst="roundRect">
+            <a:avLst>
+              <a:gd name="adj" fmla="val 4762"/>
+            </a:avLst>
+          </a:prstGeom>
+          <a:solidFill>
+            <a:srgbClr val="0A1020"/>
+          </a:solidFill>
+          <a:ln w="12700">
+            <a:solidFill>
+              <a:srgbClr val="E8EDF3"/>
+            </a:solidFill>
+            <a:prstDash val="solid"/>
+          </a:ln>
+        </p:spPr>
+      </p:sp>
+      <p:sp>
+        <p:nvSpPr>
+          <p:cNvPr id="8" name="Text 5"/>
+          <p:cNvSpPr/>
+          <p:nvPr/>
+        </p:nvSpPr>
+        <p:spPr>
+          <a:xfrm>
+            <a:off x="640080" y="2459736"/>
+            <a:ext cx="7863840" cy="1005840"/>
+          </a:xfrm>
+          <a:prstGeom prst="rect">
+            <a:avLst/>
+          </a:prstGeom>
+          <a:noFill/>
+          <a:ln/>
+        </p:spPr>
+        <p:txBody>
+          <a:bodyPr wrap="square" lIns="0" tIns="0" rIns="0" bIns="0" rtlCol="0" anchor="t">
+            <a:normAutofit/>
+          </a:bodyPr>
+          <a:lstStyle/>
+          <a:p>
+            <a:pPr indent="0" marL="0">
+              <a:buNone/>
+            </a:pPr>
+            <a:r>
+              <a:rPr lang="en-US" sz="1150" dirty="0">
+                <a:solidFill>
+                  <a:srgbClr val="9FE7D6"/>
+                </a:solidFill>
+                <a:latin typeface="Courier New" pitchFamily="34" charset="0"/>
+                <a:ea typeface="Courier New" pitchFamily="34" charset="-122"/>
+                <a:cs typeface="Courier New" pitchFamily="34" charset="-120"/>
+              </a:rPr>
+              <a:t>docker run --rm -v "$PWD/vulnerable-repo:/src" semgrep/semgrep \</a:t>
+            </a:r>
+            <a:endParaRPr lang="en-US" sz="1150" dirty="0"/>
+          </a:p>
+          <a:p>
+            <a:pPr indent="0" marL="0">
+              <a:buNone/>
+            </a:pPr>
+            <a:r>
+              <a:rPr lang="en-US" sz="1150" dirty="0">
+                <a:solidFill>
+                  <a:srgbClr val="9FE7D6"/>
+                </a:solidFill>
+                <a:latin typeface="Courier New" pitchFamily="34" charset="0"/>
+                <a:ea typeface="Courier New" pitchFamily="34" charset="-122"/>
+                <a:cs typeface="Courier New" pitchFamily="34" charset="-120"/>
+              </a:rPr>
+              <a:t>  semgrep --config p/default --config p/owasp-top-ten /src</a:t>
+            </a:r>
+            <a:endParaRPr lang="en-US" sz="1150" dirty="0"/>
+          </a:p>
+          <a:p>
+            <a:pPr indent="0" marL="0">
+              <a:buNone/>
+            </a:pPr>
+            <a:r>
+              <a:rPr lang="en-US" sz="1150" dirty="0">
+                <a:solidFill>
+                  <a:srgbClr val="9FE7D6"/>
+                </a:solidFill>
+                <a:latin typeface="Courier New" pitchFamily="34" charset="0"/>
+                <a:ea typeface="Courier New" pitchFamily="34" charset="-122"/>
+                <a:cs typeface="Courier New" pitchFamily="34" charset="-120"/>
+              </a:rPr>
+              <a:t>docker run --rm -v "$PWD/vulnerable-repo:/repo" zricethezav/gitleaks:latest \</a:t>
+            </a:r>
+            <a:endParaRPr lang="en-US" sz="1150" dirty="0"/>
+          </a:p>
+          <a:p>
+            <a:pPr indent="0" marL="0">
+              <a:buNone/>
+            </a:pPr>
+            <a:r>
+              <a:rPr lang="en-US" sz="1150" dirty="0">
+                <a:solidFill>
+                  <a:srgbClr val="9FE7D6"/>
+                </a:solidFill>
+                <a:latin typeface="Courier New" pitchFamily="34" charset="0"/>
+                <a:ea typeface="Courier New" pitchFamily="34" charset="-122"/>
+                <a:cs typeface="Courier New" pitchFamily="34" charset="-120"/>
+              </a:rPr>
+              <a:t>  detect -s /repo -v --no-git</a:t>
+            </a:r>
+            <a:endParaRPr lang="en-US" sz="1150" dirty="0"/>
           </a:p>
         </p:txBody>
       </p:sp>
@@ -4288,7 +4245,7 @@
                 <a:ea typeface="Arial" pitchFamily="34" charset="-122"/>
                 <a:cs typeface="Arial" pitchFamily="34" charset="-120"/>
               </a:rPr>
-              <a:t>Lab 2 — deliverable (cont.)</a:t>
+              <a:t>🐝 Mini-game — Fuzzing Race</a:t>
             </a:r>
             <a:endParaRPr lang="en-US" sz="2600" dirty="0"/>
           </a:p>
@@ -4303,11 +4260,11 @@
         <p:spPr>
           <a:xfrm>
             <a:off x="457200" y="1325880"/>
-            <a:ext cx="8229600" cy="1097280"/>
+            <a:ext cx="8229600" cy="1207008"/>
           </a:xfrm>
           <a:prstGeom prst="roundRect">
             <a:avLst>
-              <a:gd name="adj" fmla="val 6667"/>
+              <a:gd name="adj" fmla="val 6061"/>
             </a:avLst>
           </a:prstGeom>
           <a:solidFill>
@@ -4332,7 +4289,7 @@
         <p:spPr>
           <a:xfrm>
             <a:off x="731520" y="1435608"/>
-            <a:ext cx="7680960" cy="877824"/>
+            <a:ext cx="7680960" cy="987552"/>
           </a:xfrm>
           <a:prstGeom prst="rect">
             <a:avLst/>
@@ -4362,7 +4319,7 @@
                 <a:ea typeface="Calibri" pitchFamily="34" charset="-122"/>
                 <a:cs typeface="Calibri" pitchFamily="34" charset="-120"/>
               </a:rPr>
-              <a:t>Defend/fix: remediate all 5 planted flaws, before/after diff — this alone is 25 of 100 rubric points</a:t>
+              <a:t>First team to make the provided target crash wins</a:t>
             </a:r>
             <a:endParaRPr lang="en-US" sz="1400" dirty="0"/>
           </a:p>
@@ -4383,7 +4340,28 @@
                 <a:ea typeface="Calibri" pitchFamily="34" charset="-122"/>
                 <a:cs typeface="Calibri" pitchFamily="34" charset="-120"/>
               </a:rPr>
-              <a:t>+ Audit the AI and EiPE / Prompt Problem (see worksheet)</a:t>
+              <a:t>One crash → one root-cause note</a:t>
+            </a:r>
+            <a:endParaRPr lang="en-US" sz="1400" dirty="0"/>
+          </a:p>
+          <a:p>
+            <a:pPr marL="342900" indent="-342900">
+              <a:spcAft>
+                <a:spcPts val="600"/>
+              </a:spcAft>
+              <a:buSzPct val="100000"/>
+              <a:buChar char="•"/>
+            </a:pPr>
+            <a:r>
+              <a:rPr lang="en-US" sz="1400" dirty="0">
+                <a:solidFill>
+                  <a:srgbClr val="1F2937"/>
+                </a:solidFill>
+                <a:latin typeface="Calibri" pitchFamily="34" charset="0"/>
+                <a:ea typeface="Calibri" pitchFamily="34" charset="-122"/>
+                <a:cs typeface="Calibri" pitchFamily="34" charset="-120"/>
+              </a:rPr>
+              <a:t>Full fuzz→exploit lab returns in Week 11</a:t>
             </a:r>
             <a:endParaRPr lang="en-US" sz="1400" dirty="0"/>
           </a:p>
@@ -4568,7 +4546,7 @@
                 <a:ea typeface="Arial" pitchFamily="34" charset="-122"/>
                 <a:cs typeface="Arial" pitchFamily="34" charset="-120"/>
               </a:rPr>
-              <a:t>Key takeaways</a:t>
+              <a:t>Lab 2 — deliverable</a:t>
             </a:r>
             <a:endParaRPr lang="en-US" sz="2600" dirty="0"/>
           </a:p>
@@ -4583,11 +4561,74 @@
         <p:spPr>
           <a:xfrm>
             <a:off x="457200" y="1325880"/>
-            <a:ext cx="8229600" cy="1207008"/>
+            <a:ext cx="8229600" cy="822960"/>
           </a:xfrm>
           <a:prstGeom prst="roundRect">
             <a:avLst>
-              <a:gd name="adj" fmla="val 6061"/>
+              <a:gd name="adj" fmla="val 8889"/>
+            </a:avLst>
+          </a:prstGeom>
+          <a:solidFill>
+            <a:srgbClr val="E8EDF3"/>
+          </a:solidFill>
+          <a:ln/>
+        </p:spPr>
+      </p:sp>
+      <p:sp>
+        <p:nvSpPr>
+          <p:cNvPr id="6" name="Text 3"/>
+          <p:cNvSpPr/>
+          <p:nvPr/>
+        </p:nvSpPr>
+        <p:spPr>
+          <a:xfrm>
+            <a:off x="731520" y="1325880"/>
+            <a:ext cx="7680960" cy="822960"/>
+          </a:xfrm>
+          <a:prstGeom prst="rect">
+            <a:avLst/>
+          </a:prstGeom>
+          <a:noFill/>
+          <a:ln/>
+        </p:spPr>
+        <p:txBody>
+          <a:bodyPr wrap="square" lIns="0" tIns="0" rIns="0" bIns="0" rtlCol="0" anchor="ctr">
+            <a:normAutofit/>
+          </a:bodyPr>
+          <a:lstStyle/>
+          <a:p>
+            <a:pPr indent="0" marL="0">
+              <a:buNone/>
+            </a:pPr>
+            <a:r>
+              <a:rPr lang="en-US" sz="1400" i="1" dirty="0">
+                <a:solidFill>
+                  <a:srgbClr val="E35205"/>
+                </a:solidFill>
+                <a:latin typeface="Calibri" pitchFamily="34" charset="0"/>
+                <a:ea typeface="Calibri" pitchFamily="34" charset="-122"/>
+                <a:cs typeface="Calibri" pitchFamily="34" charset="-120"/>
+              </a:rPr>
+              <a:t>📋 Worksheet 2 — labs/week02-sdlc-tooling/worksheet.md (Part 3) · kickoff: bash scan.sh (Semgrep ×2 rulesets + Gitleaks --no-git on ./vulnerable-repo)</a:t>
+            </a:r>
+            <a:endParaRPr lang="en-US" sz="1400" dirty="0"/>
+          </a:p>
+        </p:txBody>
+      </p:sp>
+      <p:sp>
+        <p:nvSpPr>
+          <p:cNvPr id="7" name="Shape 4"/>
+          <p:cNvSpPr/>
+          <p:nvPr/>
+        </p:nvSpPr>
+        <p:spPr>
+          <a:xfrm>
+            <a:off x="457200" y="2313432"/>
+            <a:ext cx="8229600" cy="2029968"/>
+          </a:xfrm>
+          <a:prstGeom prst="roundRect">
+            <a:avLst>
+              <a:gd name="adj" fmla="val 3604"/>
             </a:avLst>
           </a:prstGeom>
           <a:solidFill>
@@ -4605,14 +4646,14 @@
       </p:sp>
       <p:sp>
         <p:nvSpPr>
-          <p:cNvPr id="6" name="Text 3"/>
-          <p:cNvSpPr/>
-          <p:nvPr/>
-        </p:nvSpPr>
-        <p:spPr>
-          <a:xfrm>
-            <a:off x="731520" y="1435608"/>
-            <a:ext cx="7680960" cy="987552"/>
+          <p:cNvPr id="8" name="Text 5"/>
+          <p:cNvSpPr/>
+          <p:nvPr/>
+        </p:nvSpPr>
+        <p:spPr>
+          <a:xfrm>
+            <a:off x="731520" y="2423160"/>
+            <a:ext cx="7680960" cy="1810512"/>
           </a:xfrm>
           <a:prstGeom prst="rect">
             <a:avLst/>
@@ -4642,7 +4683,7 @@
                 <a:ea typeface="Calibri" pitchFamily="34" charset="-122"/>
                 <a:cs typeface="Calibri" pitchFamily="34" charset="-120"/>
               </a:rPr>
-              <a:t>No single tool finds everything — layer SAST/DAST/SCA/fuzzing</a:t>
+              <a:t>A findings triage table: tool, CWE, severity, TP/FP, fix idea (3 TP + 1 FP, justified)</a:t>
             </a:r>
             <a:endParaRPr lang="en-US" sz="1400" dirty="0"/>
           </a:p>
@@ -4663,7 +4704,7 @@
                 <a:ea typeface="Calibri" pitchFamily="34" charset="-122"/>
                 <a:cs typeface="Calibri" pitchFamily="34" charset="-120"/>
               </a:rPr>
-              <a:t>Triage by CWE + severity; kill the noise</a:t>
+              <a:t>1 fuzzing crash with a one-line root cause</a:t>
             </a:r>
             <a:endParaRPr lang="en-US" sz="1400" dirty="0"/>
           </a:p>
@@ -4684,45 +4725,87 @@
                 <a:ea typeface="Calibri" pitchFamily="34" charset="-122"/>
                 <a:cs typeface="Calibri" pitchFamily="34" charset="-120"/>
               </a:rPr>
-              <a:t>Fuzzing is the highest-yield bug finder — automate it</a:t>
+              <a:t>Trivy SCA scan of the NoteVault project target</a:t>
             </a:r>
             <a:endParaRPr lang="en-US" sz="1400" dirty="0"/>
           </a:p>
-        </p:txBody>
-      </p:sp>
-      <p:sp>
-        <p:nvSpPr>
-          <p:cNvPr id="7" name="Text 4"/>
-          <p:cNvSpPr/>
-          <p:nvPr/>
-        </p:nvSpPr>
-        <p:spPr>
-          <a:xfrm>
-            <a:off x="457200" y="4800600"/>
-            <a:ext cx="6949440" cy="274320"/>
-          </a:xfrm>
-          <a:prstGeom prst="rect">
-            <a:avLst/>
-          </a:prstGeom>
-          <a:noFill/>
-          <a:ln/>
-        </p:spPr>
-        <p:txBody>
-          <a:bodyPr wrap="square" lIns="0" tIns="0" rIns="0" bIns="0" rtlCol="0" anchor="ctr"/>
-          <a:lstStyle/>
-          <a:p>
-            <a:pPr indent="0" marL="0">
-              <a:buNone/>
-            </a:pPr>
-            <a:r>
-              <a:rPr lang="en-US" sz="900" dirty="0">
-                <a:solidFill>
-                  <a:srgbClr val="64748B"/>
+          <a:p>
+            <a:pPr marL="342900" indent="-342900">
+              <a:spcAft>
+                <a:spcPts val="600"/>
+              </a:spcAft>
+              <a:buSzPct val="100000"/>
+              <a:buChar char="•"/>
+            </a:pPr>
+            <a:r>
+              <a:rPr lang="en-US" sz="1400" dirty="0">
+                <a:solidFill>
+                  <a:srgbClr val="1F2937"/>
                 </a:solidFill>
                 <a:latin typeface="Calibri" pitchFamily="34" charset="0"/>
                 <a:ea typeface="Calibri" pitchFamily="34" charset="-122"/>
                 <a:cs typeface="Calibri" pitchFamily="34" charset="-120"/>
               </a:rPr>
+              <a:t>A security CI gate built from Week 15's security-ci.yml</a:t>
+            </a:r>
+            <a:endParaRPr lang="en-US" sz="1400" dirty="0"/>
+          </a:p>
+          <a:p>
+            <a:pPr marL="342900" indent="-342900">
+              <a:spcAft>
+                <a:spcPts val="600"/>
+              </a:spcAft>
+              <a:buSzPct val="100000"/>
+              <a:buChar char="•"/>
+            </a:pPr>
+            <a:r>
+              <a:rPr lang="en-US" sz="1400" dirty="0">
+                <a:solidFill>
+                  <a:srgbClr val="1F2937"/>
+                </a:solidFill>
+                <a:latin typeface="Calibri" pitchFamily="34" charset="0"/>
+                <a:ea typeface="Calibri" pitchFamily="34" charset="-122"/>
+                <a:cs typeface="Calibri" pitchFamily="34" charset="-120"/>
+              </a:rPr>
+              <a:t>One SAST blind spot you found by hand</a:t>
+            </a:r>
+            <a:endParaRPr lang="en-US" sz="1400" dirty="0"/>
+          </a:p>
+        </p:txBody>
+      </p:sp>
+      <p:sp>
+        <p:nvSpPr>
+          <p:cNvPr id="9" name="Text 6"/>
+          <p:cNvSpPr/>
+          <p:nvPr/>
+        </p:nvSpPr>
+        <p:spPr>
+          <a:xfrm>
+            <a:off x="457200" y="4800600"/>
+            <a:ext cx="6949440" cy="274320"/>
+          </a:xfrm>
+          <a:prstGeom prst="rect">
+            <a:avLst/>
+          </a:prstGeom>
+          <a:noFill/>
+          <a:ln/>
+        </p:spPr>
+        <p:txBody>
+          <a:bodyPr wrap="square" lIns="0" tIns="0" rIns="0" bIns="0" rtlCol="0" anchor="ctr"/>
+          <a:lstStyle/>
+          <a:p>
+            <a:pPr indent="0" marL="0">
+              <a:buNone/>
+            </a:pPr>
+            <a:r>
+              <a:rPr lang="en-US" sz="900" dirty="0">
+                <a:solidFill>
+                  <a:srgbClr val="64748B"/>
+                </a:solidFill>
+                <a:latin typeface="Calibri" pitchFamily="34" charset="0"/>
+                <a:ea typeface="Calibri" pitchFamily="34" charset="-122"/>
+                <a:cs typeface="Calibri" pitchFamily="34" charset="-120"/>
+              </a:rPr>
               <a:t>Software Security · Week 2</a:t>
             </a:r>
             <a:endParaRPr lang="en-US" sz="900" dirty="0"/>
@@ -4731,7 +4814,7 @@
       </p:sp>
       <p:pic>
         <p:nvPicPr>
-          <p:cNvPr id="8" name="Image 1" descr="/Users/pop7/Library/CloudStorage/OneDrive-MonsterConnectCo.,Ltd/Lecture/KOSEN69 - software-security/slides/pptx/assets/logo-small.png">    </p:cNvPr>
+          <p:cNvPr id="10" name="Image 1" descr="/Users/pop7/Library/CloudStorage/OneDrive-MonsterConnectCo.,Ltd/Lecture/KOSEN69 - software-security/slides/pptx/assets/logo-small.png">    </p:cNvPr>
           <p:cNvPicPr>
             <a:picLocks noChangeAspect="1"/>
           </p:cNvPicPr>
@@ -4787,6 +4870,587 @@
       </p:grpSpPr>
       <p:sp>
         <p:nvSpPr>
+          <p:cNvPr id="2" name="Shape 0"/>
+          <p:cNvSpPr/>
+          <p:nvPr/>
+        </p:nvSpPr>
+        <p:spPr>
+          <a:xfrm>
+            <a:off x="457200" y="384048"/>
+            <a:ext cx="530352" cy="530352"/>
+          </a:xfrm>
+          <a:prstGeom prst="ellipse">
+            <a:avLst/>
+          </a:prstGeom>
+          <a:solidFill>
+            <a:srgbClr val="E35205"/>
+          </a:solidFill>
+          <a:ln/>
+          <a:effectLst>
+            <a:outerShdw sx="100000" sy="100000" kx="0" ky="0" algn="bl" rotWithShape="0" blurRad="76200" dist="25400" dir="5400000">
+              <a:srgbClr val="000000">
+                <a:alpha val="12000"/>
+              </a:srgbClr>
+            </a:outerShdw>
+          </a:effectLst>
+        </p:spPr>
+      </p:sp>
+      <p:pic>
+        <p:nvPicPr>
+          <p:cNvPr id="3" name="Image 0" descr="preencoded.png">    </p:cNvPr>
+          <p:cNvPicPr>
+            <a:picLocks noChangeAspect="1"/>
+          </p:cNvPicPr>
+          <p:nvPr/>
+        </p:nvPicPr>
+        <p:blipFill>
+          <a:blip r:embed="rId1"/>
+          <a:stretch>
+            <a:fillRect/>
+          </a:stretch>
+        </p:blipFill>
+        <p:spPr>
+          <a:xfrm>
+            <a:off x="594360" y="521208"/>
+            <a:ext cx="256032" cy="256032"/>
+          </a:xfrm>
+          <a:prstGeom prst="rect">
+            <a:avLst/>
+          </a:prstGeom>
+        </p:spPr>
+      </p:pic>
+      <p:sp>
+        <p:nvSpPr>
+          <p:cNvPr id="4" name="Text 1"/>
+          <p:cNvSpPr/>
+          <p:nvPr/>
+        </p:nvSpPr>
+        <p:spPr>
+          <a:xfrm>
+            <a:off x="1143000" y="329184"/>
+            <a:ext cx="7498080" cy="603504"/>
+          </a:xfrm>
+          <a:prstGeom prst="rect">
+            <a:avLst/>
+          </a:prstGeom>
+          <a:noFill/>
+          <a:ln/>
+        </p:spPr>
+        <p:txBody>
+          <a:bodyPr wrap="square" lIns="0" tIns="0" rIns="0" bIns="0" rtlCol="0" anchor="ctr"/>
+          <a:lstStyle/>
+          <a:p>
+            <a:pPr indent="0" marL="0">
+              <a:buNone/>
+            </a:pPr>
+            <a:r>
+              <a:rPr lang="en-US" sz="2600" b="1" dirty="0">
+                <a:solidFill>
+                  <a:srgbClr val="1F2937"/>
+                </a:solidFill>
+                <a:latin typeface="Arial" pitchFamily="34" charset="0"/>
+                <a:ea typeface="Arial" pitchFamily="34" charset="-122"/>
+                <a:cs typeface="Arial" pitchFamily="34" charset="-120"/>
+              </a:rPr>
+              <a:t>Lab 2 — deliverable (cont.)</a:t>
+            </a:r>
+            <a:endParaRPr lang="en-US" sz="2600" dirty="0"/>
+          </a:p>
+        </p:txBody>
+      </p:sp>
+      <p:sp>
+        <p:nvSpPr>
+          <p:cNvPr id="5" name="Shape 2"/>
+          <p:cNvSpPr/>
+          <p:nvPr/>
+        </p:nvSpPr>
+        <p:spPr>
+          <a:xfrm>
+            <a:off x="457200" y="1325880"/>
+            <a:ext cx="8229600" cy="1097280"/>
+          </a:xfrm>
+          <a:prstGeom prst="roundRect">
+            <a:avLst>
+              <a:gd name="adj" fmla="val 6667"/>
+            </a:avLst>
+          </a:prstGeom>
+          <a:solidFill>
+            <a:srgbClr val="F1F5F9"/>
+          </a:solidFill>
+          <a:ln/>
+          <a:effectLst>
+            <a:outerShdw sx="100000" sy="100000" kx="0" ky="0" algn="bl" rotWithShape="0" blurRad="76200" dist="25400" dir="5400000">
+              <a:srgbClr val="000000">
+                <a:alpha val="12000"/>
+              </a:srgbClr>
+            </a:outerShdw>
+          </a:effectLst>
+        </p:spPr>
+      </p:sp>
+      <p:sp>
+        <p:nvSpPr>
+          <p:cNvPr id="6" name="Text 3"/>
+          <p:cNvSpPr/>
+          <p:nvPr/>
+        </p:nvSpPr>
+        <p:spPr>
+          <a:xfrm>
+            <a:off x="731520" y="1435608"/>
+            <a:ext cx="7680960" cy="877824"/>
+          </a:xfrm>
+          <a:prstGeom prst="rect">
+            <a:avLst/>
+          </a:prstGeom>
+          <a:noFill/>
+          <a:ln/>
+        </p:spPr>
+        <p:txBody>
+          <a:bodyPr wrap="square" lIns="0" tIns="0" rIns="0" bIns="0" rtlCol="0" anchor="t">
+            <a:normAutofit/>
+          </a:bodyPr>
+          <a:lstStyle/>
+          <a:p>
+            <a:pPr marL="342900" indent="-342900">
+              <a:spcAft>
+                <a:spcPts val="600"/>
+              </a:spcAft>
+              <a:buSzPct val="100000"/>
+              <a:buChar char="•"/>
+            </a:pPr>
+            <a:r>
+              <a:rPr lang="en-US" sz="1400" dirty="0">
+                <a:solidFill>
+                  <a:srgbClr val="1F2937"/>
+                </a:solidFill>
+                <a:latin typeface="Calibri" pitchFamily="34" charset="0"/>
+                <a:ea typeface="Calibri" pitchFamily="34" charset="-122"/>
+                <a:cs typeface="Calibri" pitchFamily="34" charset="-120"/>
+              </a:rPr>
+              <a:t>Defend/fix: remediate all 5 planted flaws, before/after diff — this alone is 25 of 100 rubric points</a:t>
+            </a:r>
+            <a:endParaRPr lang="en-US" sz="1400" dirty="0"/>
+          </a:p>
+          <a:p>
+            <a:pPr marL="342900" indent="-342900">
+              <a:spcAft>
+                <a:spcPts val="600"/>
+              </a:spcAft>
+              <a:buSzPct val="100000"/>
+              <a:buChar char="•"/>
+            </a:pPr>
+            <a:r>
+              <a:rPr lang="en-US" sz="1400" dirty="0">
+                <a:solidFill>
+                  <a:srgbClr val="1F2937"/>
+                </a:solidFill>
+                <a:latin typeface="Calibri" pitchFamily="34" charset="0"/>
+                <a:ea typeface="Calibri" pitchFamily="34" charset="-122"/>
+                <a:cs typeface="Calibri" pitchFamily="34" charset="-120"/>
+              </a:rPr>
+              <a:t>+ Audit the AI and EiPE / Prompt Problem (see worksheet)</a:t>
+            </a:r>
+            <a:endParaRPr lang="en-US" sz="1400" dirty="0"/>
+          </a:p>
+        </p:txBody>
+      </p:sp>
+      <p:sp>
+        <p:nvSpPr>
+          <p:cNvPr id="7" name="Text 4"/>
+          <p:cNvSpPr/>
+          <p:nvPr/>
+        </p:nvSpPr>
+        <p:spPr>
+          <a:xfrm>
+            <a:off x="457200" y="4800600"/>
+            <a:ext cx="6949440" cy="274320"/>
+          </a:xfrm>
+          <a:prstGeom prst="rect">
+            <a:avLst/>
+          </a:prstGeom>
+          <a:noFill/>
+          <a:ln/>
+        </p:spPr>
+        <p:txBody>
+          <a:bodyPr wrap="square" lIns="0" tIns="0" rIns="0" bIns="0" rtlCol="0" anchor="ctr"/>
+          <a:lstStyle/>
+          <a:p>
+            <a:pPr indent="0" marL="0">
+              <a:buNone/>
+            </a:pPr>
+            <a:r>
+              <a:rPr lang="en-US" sz="900" dirty="0">
+                <a:solidFill>
+                  <a:srgbClr val="64748B"/>
+                </a:solidFill>
+                <a:latin typeface="Calibri" pitchFamily="34" charset="0"/>
+                <a:ea typeface="Calibri" pitchFamily="34" charset="-122"/>
+                <a:cs typeface="Calibri" pitchFamily="34" charset="-120"/>
+              </a:rPr>
+              <a:t>Software Security · Week 2</a:t>
+            </a:r>
+            <a:endParaRPr lang="en-US" sz="900" dirty="0"/>
+          </a:p>
+        </p:txBody>
+      </p:sp>
+      <p:pic>
+        <p:nvPicPr>
+          <p:cNvPr id="8" name="Image 1" descr="/Users/pop7/Library/CloudStorage/OneDrive-MonsterConnectCo.,Ltd/Lecture/KOSEN69 - software-security/slides/pptx/assets/logo-small.png">    </p:cNvPr>
+          <p:cNvPicPr>
+            <a:picLocks noChangeAspect="1"/>
+          </p:cNvPicPr>
+          <p:nvPr/>
+        </p:nvPicPr>
+        <p:blipFill>
+          <a:blip r:embed="rId2"/>
+          <a:stretch>
+            <a:fillRect/>
+          </a:stretch>
+        </p:blipFill>
+        <p:spPr>
+          <a:xfrm>
+            <a:off x="7882128" y="4700016"/>
+            <a:ext cx="768096" cy="356616"/>
+          </a:xfrm>
+          <a:prstGeom prst="rect">
+            <a:avLst/>
+          </a:prstGeom>
+        </p:spPr>
+      </p:pic>
+    </p:spTree>
+  </p:cSld>
+  <p:clrMapOvr>
+    <a:masterClrMapping/>
+  </p:clrMapOvr>
+</p:sld>
+</file>
+
+<file path=ppt/slides/slide18.xml><?xml version="1.0" encoding="utf-8"?>
+<p:sld xmlns:a="http://schemas.openxmlformats.org/drawingml/2006/main" xmlns:r="http://schemas.openxmlformats.org/officeDocument/2006/relationships" xmlns:p="http://schemas.openxmlformats.org/presentationml/2006/main">
+  <p:cSld name="Slide 18">
+    <p:bg>
+      <p:bgPr>
+        <a:solidFill>
+          <a:srgbClr val="FFFFFF"/>
+        </a:solidFill>
+      </p:bgPr>
+    </p:bg>
+    <p:spTree>
+      <p:nvGrpSpPr>
+        <p:cNvPr id="1" name=""/>
+        <p:cNvGrpSpPr/>
+        <p:nvPr/>
+      </p:nvGrpSpPr>
+      <p:grpSpPr>
+        <a:xfrm>
+          <a:off x="0" y="0"/>
+          <a:ext cx="0" cy="0"/>
+          <a:chOff x="0" y="0"/>
+          <a:chExt cx="0" cy="0"/>
+        </a:xfrm>
+      </p:grpSpPr>
+      <p:sp>
+        <p:nvSpPr>
+          <p:cNvPr id="2" name="Shape 0"/>
+          <p:cNvSpPr/>
+          <p:nvPr/>
+        </p:nvSpPr>
+        <p:spPr>
+          <a:xfrm>
+            <a:off x="457200" y="384048"/>
+            <a:ext cx="530352" cy="530352"/>
+          </a:xfrm>
+          <a:prstGeom prst="ellipse">
+            <a:avLst/>
+          </a:prstGeom>
+          <a:solidFill>
+            <a:srgbClr val="E35205"/>
+          </a:solidFill>
+          <a:ln/>
+          <a:effectLst>
+            <a:outerShdw sx="100000" sy="100000" kx="0" ky="0" algn="bl" rotWithShape="0" blurRad="76200" dist="25400" dir="5400000">
+              <a:srgbClr val="000000">
+                <a:alpha val="12000"/>
+              </a:srgbClr>
+            </a:outerShdw>
+          </a:effectLst>
+        </p:spPr>
+      </p:sp>
+      <p:pic>
+        <p:nvPicPr>
+          <p:cNvPr id="3" name="Image 0" descr="preencoded.png">    </p:cNvPr>
+          <p:cNvPicPr>
+            <a:picLocks noChangeAspect="1"/>
+          </p:cNvPicPr>
+          <p:nvPr/>
+        </p:nvPicPr>
+        <p:blipFill>
+          <a:blip r:embed="rId1"/>
+          <a:stretch>
+            <a:fillRect/>
+          </a:stretch>
+        </p:blipFill>
+        <p:spPr>
+          <a:xfrm>
+            <a:off x="594360" y="521208"/>
+            <a:ext cx="256032" cy="256032"/>
+          </a:xfrm>
+          <a:prstGeom prst="rect">
+            <a:avLst/>
+          </a:prstGeom>
+        </p:spPr>
+      </p:pic>
+      <p:sp>
+        <p:nvSpPr>
+          <p:cNvPr id="4" name="Text 1"/>
+          <p:cNvSpPr/>
+          <p:nvPr/>
+        </p:nvSpPr>
+        <p:spPr>
+          <a:xfrm>
+            <a:off x="1143000" y="329184"/>
+            <a:ext cx="7498080" cy="603504"/>
+          </a:xfrm>
+          <a:prstGeom prst="rect">
+            <a:avLst/>
+          </a:prstGeom>
+          <a:noFill/>
+          <a:ln/>
+        </p:spPr>
+        <p:txBody>
+          <a:bodyPr wrap="square" lIns="0" tIns="0" rIns="0" bIns="0" rtlCol="0" anchor="ctr"/>
+          <a:lstStyle/>
+          <a:p>
+            <a:pPr indent="0" marL="0">
+              <a:buNone/>
+            </a:pPr>
+            <a:r>
+              <a:rPr lang="en-US" sz="2600" b="1" dirty="0">
+                <a:solidFill>
+                  <a:srgbClr val="1F2937"/>
+                </a:solidFill>
+                <a:latin typeface="Arial" pitchFamily="34" charset="0"/>
+                <a:ea typeface="Arial" pitchFamily="34" charset="-122"/>
+                <a:cs typeface="Arial" pitchFamily="34" charset="-120"/>
+              </a:rPr>
+              <a:t>Key takeaways</a:t>
+            </a:r>
+            <a:endParaRPr lang="en-US" sz="2600" dirty="0"/>
+          </a:p>
+        </p:txBody>
+      </p:sp>
+      <p:sp>
+        <p:nvSpPr>
+          <p:cNvPr id="5" name="Shape 2"/>
+          <p:cNvSpPr/>
+          <p:nvPr/>
+        </p:nvSpPr>
+        <p:spPr>
+          <a:xfrm>
+            <a:off x="457200" y="1325880"/>
+            <a:ext cx="8229600" cy="1207008"/>
+          </a:xfrm>
+          <a:prstGeom prst="roundRect">
+            <a:avLst>
+              <a:gd name="adj" fmla="val 6061"/>
+            </a:avLst>
+          </a:prstGeom>
+          <a:solidFill>
+            <a:srgbClr val="F1F5F9"/>
+          </a:solidFill>
+          <a:ln/>
+          <a:effectLst>
+            <a:outerShdw sx="100000" sy="100000" kx="0" ky="0" algn="bl" rotWithShape="0" blurRad="76200" dist="25400" dir="5400000">
+              <a:srgbClr val="000000">
+                <a:alpha val="12000"/>
+              </a:srgbClr>
+            </a:outerShdw>
+          </a:effectLst>
+        </p:spPr>
+      </p:sp>
+      <p:sp>
+        <p:nvSpPr>
+          <p:cNvPr id="6" name="Text 3"/>
+          <p:cNvSpPr/>
+          <p:nvPr/>
+        </p:nvSpPr>
+        <p:spPr>
+          <a:xfrm>
+            <a:off x="731520" y="1435608"/>
+            <a:ext cx="7680960" cy="987552"/>
+          </a:xfrm>
+          <a:prstGeom prst="rect">
+            <a:avLst/>
+          </a:prstGeom>
+          <a:noFill/>
+          <a:ln/>
+        </p:spPr>
+        <p:txBody>
+          <a:bodyPr wrap="square" lIns="0" tIns="0" rIns="0" bIns="0" rtlCol="0" anchor="t">
+            <a:normAutofit/>
+          </a:bodyPr>
+          <a:lstStyle/>
+          <a:p>
+            <a:pPr marL="342900" indent="-342900">
+              <a:spcAft>
+                <a:spcPts val="600"/>
+              </a:spcAft>
+              <a:buSzPct val="100000"/>
+              <a:buChar char="•"/>
+            </a:pPr>
+            <a:r>
+              <a:rPr lang="en-US" sz="1400" dirty="0">
+                <a:solidFill>
+                  <a:srgbClr val="1F2937"/>
+                </a:solidFill>
+                <a:latin typeface="Calibri" pitchFamily="34" charset="0"/>
+                <a:ea typeface="Calibri" pitchFamily="34" charset="-122"/>
+                <a:cs typeface="Calibri" pitchFamily="34" charset="-120"/>
+              </a:rPr>
+              <a:t>No single tool finds everything — layer SAST/DAST/SCA/fuzzing</a:t>
+            </a:r>
+            <a:endParaRPr lang="en-US" sz="1400" dirty="0"/>
+          </a:p>
+          <a:p>
+            <a:pPr marL="342900" indent="-342900">
+              <a:spcAft>
+                <a:spcPts val="600"/>
+              </a:spcAft>
+              <a:buSzPct val="100000"/>
+              <a:buChar char="•"/>
+            </a:pPr>
+            <a:r>
+              <a:rPr lang="en-US" sz="1400" dirty="0">
+                <a:solidFill>
+                  <a:srgbClr val="1F2937"/>
+                </a:solidFill>
+                <a:latin typeface="Calibri" pitchFamily="34" charset="0"/>
+                <a:ea typeface="Calibri" pitchFamily="34" charset="-122"/>
+                <a:cs typeface="Calibri" pitchFamily="34" charset="-120"/>
+              </a:rPr>
+              <a:t>Triage by CWE + severity; kill the noise</a:t>
+            </a:r>
+            <a:endParaRPr lang="en-US" sz="1400" dirty="0"/>
+          </a:p>
+          <a:p>
+            <a:pPr marL="342900" indent="-342900">
+              <a:spcAft>
+                <a:spcPts val="600"/>
+              </a:spcAft>
+              <a:buSzPct val="100000"/>
+              <a:buChar char="•"/>
+            </a:pPr>
+            <a:r>
+              <a:rPr lang="en-US" sz="1400" dirty="0">
+                <a:solidFill>
+                  <a:srgbClr val="1F2937"/>
+                </a:solidFill>
+                <a:latin typeface="Calibri" pitchFamily="34" charset="0"/>
+                <a:ea typeface="Calibri" pitchFamily="34" charset="-122"/>
+                <a:cs typeface="Calibri" pitchFamily="34" charset="-120"/>
+              </a:rPr>
+              <a:t>Fuzzing is the highest-yield bug finder — automate it</a:t>
+            </a:r>
+            <a:endParaRPr lang="en-US" sz="1400" dirty="0"/>
+          </a:p>
+        </p:txBody>
+      </p:sp>
+      <p:sp>
+        <p:nvSpPr>
+          <p:cNvPr id="7" name="Text 4"/>
+          <p:cNvSpPr/>
+          <p:nvPr/>
+        </p:nvSpPr>
+        <p:spPr>
+          <a:xfrm>
+            <a:off x="457200" y="4800600"/>
+            <a:ext cx="6949440" cy="274320"/>
+          </a:xfrm>
+          <a:prstGeom prst="rect">
+            <a:avLst/>
+          </a:prstGeom>
+          <a:noFill/>
+          <a:ln/>
+        </p:spPr>
+        <p:txBody>
+          <a:bodyPr wrap="square" lIns="0" tIns="0" rIns="0" bIns="0" rtlCol="0" anchor="ctr"/>
+          <a:lstStyle/>
+          <a:p>
+            <a:pPr indent="0" marL="0">
+              <a:buNone/>
+            </a:pPr>
+            <a:r>
+              <a:rPr lang="en-US" sz="900" dirty="0">
+                <a:solidFill>
+                  <a:srgbClr val="64748B"/>
+                </a:solidFill>
+                <a:latin typeface="Calibri" pitchFamily="34" charset="0"/>
+                <a:ea typeface="Calibri" pitchFamily="34" charset="-122"/>
+                <a:cs typeface="Calibri" pitchFamily="34" charset="-120"/>
+              </a:rPr>
+              <a:t>Software Security · Week 2</a:t>
+            </a:r>
+            <a:endParaRPr lang="en-US" sz="900" dirty="0"/>
+          </a:p>
+        </p:txBody>
+      </p:sp>
+      <p:pic>
+        <p:nvPicPr>
+          <p:cNvPr id="8" name="Image 1" descr="/Users/pop7/Library/CloudStorage/OneDrive-MonsterConnectCo.,Ltd/Lecture/KOSEN69 - software-security/slides/pptx/assets/logo-small.png">    </p:cNvPr>
+          <p:cNvPicPr>
+            <a:picLocks noChangeAspect="1"/>
+          </p:cNvPicPr>
+          <p:nvPr/>
+        </p:nvPicPr>
+        <p:blipFill>
+          <a:blip r:embed="rId2"/>
+          <a:stretch>
+            <a:fillRect/>
+          </a:stretch>
+        </p:blipFill>
+        <p:spPr>
+          <a:xfrm>
+            <a:off x="7882128" y="4700016"/>
+            <a:ext cx="768096" cy="356616"/>
+          </a:xfrm>
+          <a:prstGeom prst="rect">
+            <a:avLst/>
+          </a:prstGeom>
+        </p:spPr>
+      </p:pic>
+    </p:spTree>
+  </p:cSld>
+  <p:clrMapOvr>
+    <a:masterClrMapping/>
+  </p:clrMapOvr>
+</p:sld>
+</file>
+
+<file path=ppt/slides/slide19.xml><?xml version="1.0" encoding="utf-8"?>
+<p:sld xmlns:a="http://schemas.openxmlformats.org/drawingml/2006/main" xmlns:r="http://schemas.openxmlformats.org/officeDocument/2006/relationships" xmlns:p="http://schemas.openxmlformats.org/presentationml/2006/main">
+  <p:cSld name="Slide 19">
+    <p:bg>
+      <p:bgPr>
+        <a:solidFill>
+          <a:srgbClr val="FFFFFF"/>
+        </a:solidFill>
+      </p:bgPr>
+    </p:bg>
+    <p:spTree>
+      <p:nvGrpSpPr>
+        <p:cNvPr id="1" name=""/>
+        <p:cNvGrpSpPr/>
+        <p:nvPr/>
+      </p:nvGrpSpPr>
+      <p:grpSpPr>
+        <a:xfrm>
+          <a:off x="0" y="0"/>
+          <a:ext cx="0" cy="0"/>
+          <a:chOff x="0" y="0"/>
+          <a:chExt cx="0" cy="0"/>
+        </a:xfrm>
+      </p:grpSpPr>
+      <p:sp>
+        <p:nvSpPr>
           <p:cNvPr id="2" name="Text 0"/>
           <p:cNvSpPr/>
           <p:nvPr/>
@@ -5974,1150 +6638,50 @@
           </a:p>
         </p:txBody>
       </p:sp>
-      <p:graphicFrame>
-        <p:nvGraphicFramePr>
-          <p:cNvPr id="6" name="Table 0"/>
-          <p:cNvGraphicFramePr>
-            <a:graphicFrameLocks noGrp="1"/>
-          </p:cNvGraphicFramePr>
-          <p:nvPr>
-            <p:extLst>
-              <p:ext uri="{D42A27DB-BD31-4B8C-83A1-F6EECF244321}">
-                <p14:modId xmlns:p14="http://schemas.microsoft.com/office/powerpoint/2010/main" val="1579011935"/>
-              </p:ext>
-            </p:extLst>
-          </p:nvPr>
-        </p:nvGraphicFramePr>
-        <p:xfrm>
-          <a:off x="457200" y="1325880"/>
-          <a:ext cx="8229600" cy="914400"/>
-        </p:xfrm>
-        <a:graphic>
-          <a:graphicData uri="http://schemas.openxmlformats.org/drawingml/2006/table">
-            <a:tbl>
-              <a:tblPr/>
-              <a:tblGrid>
-                <a:gridCol w="2743200"/>
-                <a:gridCol w="2743200"/>
-                <a:gridCol w="2743200"/>
-              </a:tblGrid>
-              <a:tr h="420624">
-                <a:tc>
-                  <a:txBody>
-                    <a:bodyPr/>
-                    <a:lstStyle/>
-                    <a:p>
-                      <a:pPr algn="l" indent="0" marL="0">
-                        <a:buNone/>
-                      </a:pPr>
-                      <a:r>
-                        <a:rPr lang="en-US" sz="1250" b="1" dirty="0">
-                          <a:solidFill>
-                            <a:srgbClr val="0E1726"/>
-                          </a:solidFill>
-                        </a:rPr>
-                        <a:t>Tool</a:t>
-                      </a:r>
-                      <a:endParaRPr lang="en-US" sz="1250" dirty="0"/>
-                    </a:p>
-                  </a:txBody>
-                  <a:tcPr marL="76200" marR="76200" marT="38100" marB="38100" anchor="ctr">
-                    <a:lnL w="12700" cap="flat" cmpd="sng" algn="ctr">
-                      <a:solidFill>
-                        <a:srgbClr val="FFFFFF"/>
-                      </a:solidFill>
-                      <a:prstDash val="solid"/>
-                      <a:round/>
-                      <a:headEnd type="none" w="med" len="med"/>
-                      <a:tailEnd type="none" w="med" len="med"/>
-                    </a:lnL>
-                    <a:lnR w="12700" cap="flat" cmpd="sng" algn="ctr">
-                      <a:solidFill>
-                        <a:srgbClr val="FFFFFF"/>
-                      </a:solidFill>
-                      <a:prstDash val="solid"/>
-                      <a:round/>
-                      <a:headEnd type="none" w="med" len="med"/>
-                      <a:tailEnd type="none" w="med" len="med"/>
-                    </a:lnR>
-                    <a:lnT w="12700" cap="flat" cmpd="sng" algn="ctr">
-                      <a:solidFill>
-                        <a:srgbClr val="FFFFFF"/>
-                      </a:solidFill>
-                      <a:prstDash val="solid"/>
-                      <a:round/>
-                      <a:headEnd type="none" w="med" len="med"/>
-                      <a:tailEnd type="none" w="med" len="med"/>
-                    </a:lnT>
-                    <a:lnB w="12700" cap="flat" cmpd="sng" algn="ctr">
-                      <a:solidFill>
-                        <a:srgbClr val="FFFFFF"/>
-                      </a:solidFill>
-                      <a:prstDash val="solid"/>
-                      <a:round/>
-                      <a:headEnd type="none" w="med" len="med"/>
-                      <a:tailEnd type="none" w="med" len="med"/>
-                    </a:lnB>
-                    <a:solidFill>
-                      <a:srgbClr val="E35205"/>
-                    </a:solidFill>
-                  </a:tcPr>
-                </a:tc>
-                <a:tc>
-                  <a:txBody>
-                    <a:bodyPr/>
-                    <a:lstStyle/>
-                    <a:p>
-                      <a:pPr algn="l" indent="0" marL="0">
-                        <a:buNone/>
-                      </a:pPr>
-                      <a:r>
-                        <a:rPr lang="en-US" sz="1250" b="1" dirty="0">
-                          <a:solidFill>
-                            <a:srgbClr val="0E1726"/>
-                          </a:solidFill>
-                        </a:rPr>
-                        <a:t>What it sees</a:t>
-                      </a:r>
-                      <a:endParaRPr lang="en-US" sz="1250" dirty="0"/>
-                    </a:p>
-                  </a:txBody>
-                  <a:tcPr marL="76200" marR="76200" marT="38100" marB="38100" anchor="ctr">
-                    <a:lnL w="12700" cap="flat" cmpd="sng" algn="ctr">
-                      <a:solidFill>
-                        <a:srgbClr val="FFFFFF"/>
-                      </a:solidFill>
-                      <a:prstDash val="solid"/>
-                      <a:round/>
-                      <a:headEnd type="none" w="med" len="med"/>
-                      <a:tailEnd type="none" w="med" len="med"/>
-                    </a:lnL>
-                    <a:lnR w="12700" cap="flat" cmpd="sng" algn="ctr">
-                      <a:solidFill>
-                        <a:srgbClr val="FFFFFF"/>
-                      </a:solidFill>
-                      <a:prstDash val="solid"/>
-                      <a:round/>
-                      <a:headEnd type="none" w="med" len="med"/>
-                      <a:tailEnd type="none" w="med" len="med"/>
-                    </a:lnR>
-                    <a:lnT w="12700" cap="flat" cmpd="sng" algn="ctr">
-                      <a:solidFill>
-                        <a:srgbClr val="FFFFFF"/>
-                      </a:solidFill>
-                      <a:prstDash val="solid"/>
-                      <a:round/>
-                      <a:headEnd type="none" w="med" len="med"/>
-                      <a:tailEnd type="none" w="med" len="med"/>
-                    </a:lnT>
-                    <a:lnB w="12700" cap="flat" cmpd="sng" algn="ctr">
-                      <a:solidFill>
-                        <a:srgbClr val="FFFFFF"/>
-                      </a:solidFill>
-                      <a:prstDash val="solid"/>
-                      <a:round/>
-                      <a:headEnd type="none" w="med" len="med"/>
-                      <a:tailEnd type="none" w="med" len="med"/>
-                    </a:lnB>
-                    <a:solidFill>
-                      <a:srgbClr val="E35205"/>
-                    </a:solidFill>
-                  </a:tcPr>
-                </a:tc>
-                <a:tc>
-                  <a:txBody>
-                    <a:bodyPr/>
-                    <a:lstStyle/>
-                    <a:p>
-                      <a:pPr algn="l" indent="0" marL="0">
-                        <a:buNone/>
-                      </a:pPr>
-                      <a:r>
-                        <a:rPr lang="en-US" sz="1250" b="1" dirty="0">
-                          <a:solidFill>
-                            <a:srgbClr val="0E1726"/>
-                          </a:solidFill>
-                        </a:rPr>
-                        <a:t>When</a:t>
-                      </a:r>
-                      <a:endParaRPr lang="en-US" sz="1250" dirty="0"/>
-                    </a:p>
-                  </a:txBody>
-                  <a:tcPr marL="76200" marR="76200" marT="38100" marB="38100" anchor="ctr">
-                    <a:lnL w="12700" cap="flat" cmpd="sng" algn="ctr">
-                      <a:solidFill>
-                        <a:srgbClr val="FFFFFF"/>
-                      </a:solidFill>
-                      <a:prstDash val="solid"/>
-                      <a:round/>
-                      <a:headEnd type="none" w="med" len="med"/>
-                      <a:tailEnd type="none" w="med" len="med"/>
-                    </a:lnL>
-                    <a:lnR w="12700" cap="flat" cmpd="sng" algn="ctr">
-                      <a:solidFill>
-                        <a:srgbClr val="FFFFFF"/>
-                      </a:solidFill>
-                      <a:prstDash val="solid"/>
-                      <a:round/>
-                      <a:headEnd type="none" w="med" len="med"/>
-                      <a:tailEnd type="none" w="med" len="med"/>
-                    </a:lnR>
-                    <a:lnT w="12700" cap="flat" cmpd="sng" algn="ctr">
-                      <a:solidFill>
-                        <a:srgbClr val="FFFFFF"/>
-                      </a:solidFill>
-                      <a:prstDash val="solid"/>
-                      <a:round/>
-                      <a:headEnd type="none" w="med" len="med"/>
-                      <a:tailEnd type="none" w="med" len="med"/>
-                    </a:lnT>
-                    <a:lnB w="12700" cap="flat" cmpd="sng" algn="ctr">
-                      <a:solidFill>
-                        <a:srgbClr val="FFFFFF"/>
-                      </a:solidFill>
-                      <a:prstDash val="solid"/>
-                      <a:round/>
-                      <a:headEnd type="none" w="med" len="med"/>
-                      <a:tailEnd type="none" w="med" len="med"/>
-                    </a:lnB>
-                    <a:solidFill>
-                      <a:srgbClr val="E35205"/>
-                    </a:solidFill>
-                  </a:tcPr>
-                </a:tc>
-              </a:tr>
-              <a:tr h="420624">
-                <a:tc>
-                  <a:txBody>
-                    <a:bodyPr/>
-                    <a:lstStyle/>
-                    <a:p>
-                      <a:pPr algn="l" indent="0" marL="0">
-                        <a:buNone/>
-                      </a:pPr>
-                      <a:r>
-                        <a:rPr lang="en-US" sz="1200" dirty="0">
-                          <a:solidFill>
-                            <a:srgbClr val="1F2937"/>
-                          </a:solidFill>
-                        </a:rPr>
-                        <a:t>SAST</a:t>
-                      </a:r>
-                      <a:endParaRPr lang="en-US" sz="1200" dirty="0"/>
-                    </a:p>
-                  </a:txBody>
-                  <a:tcPr marL="76200" marR="76200" marT="38100" marB="38100" anchor="ctr">
-                    <a:lnL w="12700" cap="flat" cmpd="sng" algn="ctr">
-                      <a:solidFill>
-                        <a:srgbClr val="FFFFFF"/>
-                      </a:solidFill>
-                      <a:prstDash val="solid"/>
-                      <a:round/>
-                      <a:headEnd type="none" w="med" len="med"/>
-                      <a:tailEnd type="none" w="med" len="med"/>
-                    </a:lnL>
-                    <a:lnR w="12700" cap="flat" cmpd="sng" algn="ctr">
-                      <a:solidFill>
-                        <a:srgbClr val="FFFFFF"/>
-                      </a:solidFill>
-                      <a:prstDash val="solid"/>
-                      <a:round/>
-                      <a:headEnd type="none" w="med" len="med"/>
-                      <a:tailEnd type="none" w="med" len="med"/>
-                    </a:lnR>
-                    <a:lnT w="12700" cap="flat" cmpd="sng" algn="ctr">
-                      <a:solidFill>
-                        <a:srgbClr val="FFFFFF"/>
-                      </a:solidFill>
-                      <a:prstDash val="solid"/>
-                      <a:round/>
-                      <a:headEnd type="none" w="med" len="med"/>
-                      <a:tailEnd type="none" w="med" len="med"/>
-                    </a:lnT>
-                    <a:lnB w="12700" cap="flat" cmpd="sng" algn="ctr">
-                      <a:solidFill>
-                        <a:srgbClr val="FFFFFF"/>
-                      </a:solidFill>
-                      <a:prstDash val="solid"/>
-                      <a:round/>
-                      <a:headEnd type="none" w="med" len="med"/>
-                      <a:tailEnd type="none" w="med" len="med"/>
-                    </a:lnB>
-                    <a:solidFill>
-                      <a:srgbClr val="F1F5F9"/>
-                    </a:solidFill>
-                  </a:tcPr>
-                </a:tc>
-                <a:tc>
-                  <a:txBody>
-                    <a:bodyPr/>
-                    <a:lstStyle/>
-                    <a:p>
-                      <a:pPr algn="l" indent="0" marL="0">
-                        <a:buNone/>
-                      </a:pPr>
-                      <a:r>
-                        <a:rPr lang="en-US" sz="1200" dirty="0">
-                          <a:solidFill>
-                            <a:srgbClr val="1F2937"/>
-                          </a:solidFill>
-                        </a:rPr>
-                        <a:t>source code</a:t>
-                      </a:r>
-                      <a:endParaRPr lang="en-US" sz="1200" dirty="0"/>
-                    </a:p>
-                  </a:txBody>
-                  <a:tcPr marL="76200" marR="76200" marT="38100" marB="38100" anchor="ctr">
-                    <a:lnL w="12700" cap="flat" cmpd="sng" algn="ctr">
-                      <a:solidFill>
-                        <a:srgbClr val="FFFFFF"/>
-                      </a:solidFill>
-                      <a:prstDash val="solid"/>
-                      <a:round/>
-                      <a:headEnd type="none" w="med" len="med"/>
-                      <a:tailEnd type="none" w="med" len="med"/>
-                    </a:lnL>
-                    <a:lnR w="12700" cap="flat" cmpd="sng" algn="ctr">
-                      <a:solidFill>
-                        <a:srgbClr val="FFFFFF"/>
-                      </a:solidFill>
-                      <a:prstDash val="solid"/>
-                      <a:round/>
-                      <a:headEnd type="none" w="med" len="med"/>
-                      <a:tailEnd type="none" w="med" len="med"/>
-                    </a:lnR>
-                    <a:lnT w="12700" cap="flat" cmpd="sng" algn="ctr">
-                      <a:solidFill>
-                        <a:srgbClr val="FFFFFF"/>
-                      </a:solidFill>
-                      <a:prstDash val="solid"/>
-                      <a:round/>
-                      <a:headEnd type="none" w="med" len="med"/>
-                      <a:tailEnd type="none" w="med" len="med"/>
-                    </a:lnT>
-                    <a:lnB w="12700" cap="flat" cmpd="sng" algn="ctr">
-                      <a:solidFill>
-                        <a:srgbClr val="FFFFFF"/>
-                      </a:solidFill>
-                      <a:prstDash val="solid"/>
-                      <a:round/>
-                      <a:headEnd type="none" w="med" len="med"/>
-                      <a:tailEnd type="none" w="med" len="med"/>
-                    </a:lnB>
-                    <a:solidFill>
-                      <a:srgbClr val="F1F5F9"/>
-                    </a:solidFill>
-                  </a:tcPr>
-                </a:tc>
-                <a:tc>
-                  <a:txBody>
-                    <a:bodyPr/>
-                    <a:lstStyle/>
-                    <a:p>
-                      <a:pPr algn="l" indent="0" marL="0">
-                        <a:buNone/>
-                      </a:pPr>
-                      <a:r>
-                        <a:rPr lang="en-US" sz="1200" dirty="0">
-                          <a:solidFill>
-                            <a:srgbClr val="1F2937"/>
-                          </a:solidFill>
-                        </a:rPr>
-                        <a:t>code/commit</a:t>
-                      </a:r>
-                      <a:endParaRPr lang="en-US" sz="1200" dirty="0"/>
-                    </a:p>
-                  </a:txBody>
-                  <a:tcPr marL="76200" marR="76200" marT="38100" marB="38100" anchor="ctr">
-                    <a:lnL w="12700" cap="flat" cmpd="sng" algn="ctr">
-                      <a:solidFill>
-                        <a:srgbClr val="FFFFFF"/>
-                      </a:solidFill>
-                      <a:prstDash val="solid"/>
-                      <a:round/>
-                      <a:headEnd type="none" w="med" len="med"/>
-                      <a:tailEnd type="none" w="med" len="med"/>
-                    </a:lnL>
-                    <a:lnR w="12700" cap="flat" cmpd="sng" algn="ctr">
-                      <a:solidFill>
-                        <a:srgbClr val="FFFFFF"/>
-                      </a:solidFill>
-                      <a:prstDash val="solid"/>
-                      <a:round/>
-                      <a:headEnd type="none" w="med" len="med"/>
-                      <a:tailEnd type="none" w="med" len="med"/>
-                    </a:lnR>
-                    <a:lnT w="12700" cap="flat" cmpd="sng" algn="ctr">
-                      <a:solidFill>
-                        <a:srgbClr val="FFFFFF"/>
-                      </a:solidFill>
-                      <a:prstDash val="solid"/>
-                      <a:round/>
-                      <a:headEnd type="none" w="med" len="med"/>
-                      <a:tailEnd type="none" w="med" len="med"/>
-                    </a:lnT>
-                    <a:lnB w="12700" cap="flat" cmpd="sng" algn="ctr">
-                      <a:solidFill>
-                        <a:srgbClr val="FFFFFF"/>
-                      </a:solidFill>
-                      <a:prstDash val="solid"/>
-                      <a:round/>
-                      <a:headEnd type="none" w="med" len="med"/>
-                      <a:tailEnd type="none" w="med" len="med"/>
-                    </a:lnB>
-                    <a:solidFill>
-                      <a:srgbClr val="F1F5F9"/>
-                    </a:solidFill>
-                  </a:tcPr>
-                </a:tc>
-              </a:tr>
-              <a:tr h="420624">
-                <a:tc>
-                  <a:txBody>
-                    <a:bodyPr/>
-                    <a:lstStyle/>
-                    <a:p>
-                      <a:pPr algn="l" indent="0" marL="0">
-                        <a:buNone/>
-                      </a:pPr>
-                      <a:r>
-                        <a:rPr lang="en-US" sz="1200" dirty="0">
-                          <a:solidFill>
-                            <a:srgbClr val="1F2937"/>
-                          </a:solidFill>
-                        </a:rPr>
-                        <a:t>DAST</a:t>
-                      </a:r>
-                      <a:endParaRPr lang="en-US" sz="1200" dirty="0"/>
-                    </a:p>
-                  </a:txBody>
-                  <a:tcPr marL="76200" marR="76200" marT="38100" marB="38100" anchor="ctr">
-                    <a:lnL w="12700" cap="flat" cmpd="sng" algn="ctr">
-                      <a:solidFill>
-                        <a:srgbClr val="FFFFFF"/>
-                      </a:solidFill>
-                      <a:prstDash val="solid"/>
-                      <a:round/>
-                      <a:headEnd type="none" w="med" len="med"/>
-                      <a:tailEnd type="none" w="med" len="med"/>
-                    </a:lnL>
-                    <a:lnR w="12700" cap="flat" cmpd="sng" algn="ctr">
-                      <a:solidFill>
-                        <a:srgbClr val="FFFFFF"/>
-                      </a:solidFill>
-                      <a:prstDash val="solid"/>
-                      <a:round/>
-                      <a:headEnd type="none" w="med" len="med"/>
-                      <a:tailEnd type="none" w="med" len="med"/>
-                    </a:lnR>
-                    <a:lnT w="12700" cap="flat" cmpd="sng" algn="ctr">
-                      <a:solidFill>
-                        <a:srgbClr val="FFFFFF"/>
-                      </a:solidFill>
-                      <a:prstDash val="solid"/>
-                      <a:round/>
-                      <a:headEnd type="none" w="med" len="med"/>
-                      <a:tailEnd type="none" w="med" len="med"/>
-                    </a:lnT>
-                    <a:lnB w="12700" cap="flat" cmpd="sng" algn="ctr">
-                      <a:solidFill>
-                        <a:srgbClr val="FFFFFF"/>
-                      </a:solidFill>
-                      <a:prstDash val="solid"/>
-                      <a:round/>
-                      <a:headEnd type="none" w="med" len="med"/>
-                      <a:tailEnd type="none" w="med" len="med"/>
-                    </a:lnB>
-                    <a:solidFill>
-                      <a:srgbClr val="E8EDF3"/>
-                    </a:solidFill>
-                  </a:tcPr>
-                </a:tc>
-                <a:tc>
-                  <a:txBody>
-                    <a:bodyPr/>
-                    <a:lstStyle/>
-                    <a:p>
-                      <a:pPr algn="l" indent="0" marL="0">
-                        <a:buNone/>
-                      </a:pPr>
-                      <a:r>
-                        <a:rPr lang="en-US" sz="1200" dirty="0">
-                          <a:solidFill>
-                            <a:srgbClr val="1F2937"/>
-                          </a:solidFill>
-                        </a:rPr>
-                        <a:t>running app</a:t>
-                      </a:r>
-                      <a:endParaRPr lang="en-US" sz="1200" dirty="0"/>
-                    </a:p>
-                  </a:txBody>
-                  <a:tcPr marL="76200" marR="76200" marT="38100" marB="38100" anchor="ctr">
-                    <a:lnL w="12700" cap="flat" cmpd="sng" algn="ctr">
-                      <a:solidFill>
-                        <a:srgbClr val="FFFFFF"/>
-                      </a:solidFill>
-                      <a:prstDash val="solid"/>
-                      <a:round/>
-                      <a:headEnd type="none" w="med" len="med"/>
-                      <a:tailEnd type="none" w="med" len="med"/>
-                    </a:lnL>
-                    <a:lnR w="12700" cap="flat" cmpd="sng" algn="ctr">
-                      <a:solidFill>
-                        <a:srgbClr val="FFFFFF"/>
-                      </a:solidFill>
-                      <a:prstDash val="solid"/>
-                      <a:round/>
-                      <a:headEnd type="none" w="med" len="med"/>
-                      <a:tailEnd type="none" w="med" len="med"/>
-                    </a:lnR>
-                    <a:lnT w="12700" cap="flat" cmpd="sng" algn="ctr">
-                      <a:solidFill>
-                        <a:srgbClr val="FFFFFF"/>
-                      </a:solidFill>
-                      <a:prstDash val="solid"/>
-                      <a:round/>
-                      <a:headEnd type="none" w="med" len="med"/>
-                      <a:tailEnd type="none" w="med" len="med"/>
-                    </a:lnT>
-                    <a:lnB w="12700" cap="flat" cmpd="sng" algn="ctr">
-                      <a:solidFill>
-                        <a:srgbClr val="FFFFFF"/>
-                      </a:solidFill>
-                      <a:prstDash val="solid"/>
-                      <a:round/>
-                      <a:headEnd type="none" w="med" len="med"/>
-                      <a:tailEnd type="none" w="med" len="med"/>
-                    </a:lnB>
-                    <a:solidFill>
-                      <a:srgbClr val="E8EDF3"/>
-                    </a:solidFill>
-                  </a:tcPr>
-                </a:tc>
-                <a:tc>
-                  <a:txBody>
-                    <a:bodyPr/>
-                    <a:lstStyle/>
-                    <a:p>
-                      <a:pPr algn="l" indent="0" marL="0">
-                        <a:buNone/>
-                      </a:pPr>
-                      <a:r>
-                        <a:rPr lang="en-US" sz="1200" dirty="0">
-                          <a:solidFill>
-                            <a:srgbClr val="1F2937"/>
-                          </a:solidFill>
-                        </a:rPr>
-                        <a:t>test/staging</a:t>
-                      </a:r>
-                      <a:endParaRPr lang="en-US" sz="1200" dirty="0"/>
-                    </a:p>
-                  </a:txBody>
-                  <a:tcPr marL="76200" marR="76200" marT="38100" marB="38100" anchor="ctr">
-                    <a:lnL w="12700" cap="flat" cmpd="sng" algn="ctr">
-                      <a:solidFill>
-                        <a:srgbClr val="FFFFFF"/>
-                      </a:solidFill>
-                      <a:prstDash val="solid"/>
-                      <a:round/>
-                      <a:headEnd type="none" w="med" len="med"/>
-                      <a:tailEnd type="none" w="med" len="med"/>
-                    </a:lnL>
-                    <a:lnR w="12700" cap="flat" cmpd="sng" algn="ctr">
-                      <a:solidFill>
-                        <a:srgbClr val="FFFFFF"/>
-                      </a:solidFill>
-                      <a:prstDash val="solid"/>
-                      <a:round/>
-                      <a:headEnd type="none" w="med" len="med"/>
-                      <a:tailEnd type="none" w="med" len="med"/>
-                    </a:lnR>
-                    <a:lnT w="12700" cap="flat" cmpd="sng" algn="ctr">
-                      <a:solidFill>
-                        <a:srgbClr val="FFFFFF"/>
-                      </a:solidFill>
-                      <a:prstDash val="solid"/>
-                      <a:round/>
-                      <a:headEnd type="none" w="med" len="med"/>
-                      <a:tailEnd type="none" w="med" len="med"/>
-                    </a:lnT>
-                    <a:lnB w="12700" cap="flat" cmpd="sng" algn="ctr">
-                      <a:solidFill>
-                        <a:srgbClr val="FFFFFF"/>
-                      </a:solidFill>
-                      <a:prstDash val="solid"/>
-                      <a:round/>
-                      <a:headEnd type="none" w="med" len="med"/>
-                      <a:tailEnd type="none" w="med" len="med"/>
-                    </a:lnB>
-                    <a:solidFill>
-                      <a:srgbClr val="E8EDF3"/>
-                    </a:solidFill>
-                  </a:tcPr>
-                </a:tc>
-              </a:tr>
-              <a:tr h="420624">
-                <a:tc>
-                  <a:txBody>
-                    <a:bodyPr/>
-                    <a:lstStyle/>
-                    <a:p>
-                      <a:pPr algn="l" indent="0" marL="0">
-                        <a:buNone/>
-                      </a:pPr>
-                      <a:r>
-                        <a:rPr lang="en-US" sz="1200" dirty="0">
-                          <a:solidFill>
-                            <a:srgbClr val="1F2937"/>
-                          </a:solidFill>
-                        </a:rPr>
-                        <a:t>SCA</a:t>
-                      </a:r>
-                      <a:endParaRPr lang="en-US" sz="1200" dirty="0"/>
-                    </a:p>
-                  </a:txBody>
-                  <a:tcPr marL="76200" marR="76200" marT="38100" marB="38100" anchor="ctr">
-                    <a:lnL w="12700" cap="flat" cmpd="sng" algn="ctr">
-                      <a:solidFill>
-                        <a:srgbClr val="FFFFFF"/>
-                      </a:solidFill>
-                      <a:prstDash val="solid"/>
-                      <a:round/>
-                      <a:headEnd type="none" w="med" len="med"/>
-                      <a:tailEnd type="none" w="med" len="med"/>
-                    </a:lnL>
-                    <a:lnR w="12700" cap="flat" cmpd="sng" algn="ctr">
-                      <a:solidFill>
-                        <a:srgbClr val="FFFFFF"/>
-                      </a:solidFill>
-                      <a:prstDash val="solid"/>
-                      <a:round/>
-                      <a:headEnd type="none" w="med" len="med"/>
-                      <a:tailEnd type="none" w="med" len="med"/>
-                    </a:lnR>
-                    <a:lnT w="12700" cap="flat" cmpd="sng" algn="ctr">
-                      <a:solidFill>
-                        <a:srgbClr val="FFFFFF"/>
-                      </a:solidFill>
-                      <a:prstDash val="solid"/>
-                      <a:round/>
-                      <a:headEnd type="none" w="med" len="med"/>
-                      <a:tailEnd type="none" w="med" len="med"/>
-                    </a:lnT>
-                    <a:lnB w="12700" cap="flat" cmpd="sng" algn="ctr">
-                      <a:solidFill>
-                        <a:srgbClr val="FFFFFF"/>
-                      </a:solidFill>
-                      <a:prstDash val="solid"/>
-                      <a:round/>
-                      <a:headEnd type="none" w="med" len="med"/>
-                      <a:tailEnd type="none" w="med" len="med"/>
-                    </a:lnB>
-                    <a:solidFill>
-                      <a:srgbClr val="F1F5F9"/>
-                    </a:solidFill>
-                  </a:tcPr>
-                </a:tc>
-                <a:tc>
-                  <a:txBody>
-                    <a:bodyPr/>
-                    <a:lstStyle/>
-                    <a:p>
-                      <a:pPr algn="l" indent="0" marL="0">
-                        <a:buNone/>
-                      </a:pPr>
-                      <a:r>
-                        <a:rPr lang="en-US" sz="1200" dirty="0">
-                          <a:solidFill>
-                            <a:srgbClr val="1F2937"/>
-                          </a:solidFill>
-                        </a:rPr>
-                        <a:t>dependencies</a:t>
-                      </a:r>
-                      <a:endParaRPr lang="en-US" sz="1200" dirty="0"/>
-                    </a:p>
-                  </a:txBody>
-                  <a:tcPr marL="76200" marR="76200" marT="38100" marB="38100" anchor="ctr">
-                    <a:lnL w="12700" cap="flat" cmpd="sng" algn="ctr">
-                      <a:solidFill>
-                        <a:srgbClr val="FFFFFF"/>
-                      </a:solidFill>
-                      <a:prstDash val="solid"/>
-                      <a:round/>
-                      <a:headEnd type="none" w="med" len="med"/>
-                      <a:tailEnd type="none" w="med" len="med"/>
-                    </a:lnL>
-                    <a:lnR w="12700" cap="flat" cmpd="sng" algn="ctr">
-                      <a:solidFill>
-                        <a:srgbClr val="FFFFFF"/>
-                      </a:solidFill>
-                      <a:prstDash val="solid"/>
-                      <a:round/>
-                      <a:headEnd type="none" w="med" len="med"/>
-                      <a:tailEnd type="none" w="med" len="med"/>
-                    </a:lnR>
-                    <a:lnT w="12700" cap="flat" cmpd="sng" algn="ctr">
-                      <a:solidFill>
-                        <a:srgbClr val="FFFFFF"/>
-                      </a:solidFill>
-                      <a:prstDash val="solid"/>
-                      <a:round/>
-                      <a:headEnd type="none" w="med" len="med"/>
-                      <a:tailEnd type="none" w="med" len="med"/>
-                    </a:lnT>
-                    <a:lnB w="12700" cap="flat" cmpd="sng" algn="ctr">
-                      <a:solidFill>
-                        <a:srgbClr val="FFFFFF"/>
-                      </a:solidFill>
-                      <a:prstDash val="solid"/>
-                      <a:round/>
-                      <a:headEnd type="none" w="med" len="med"/>
-                      <a:tailEnd type="none" w="med" len="med"/>
-                    </a:lnB>
-                    <a:solidFill>
-                      <a:srgbClr val="F1F5F9"/>
-                    </a:solidFill>
-                  </a:tcPr>
-                </a:tc>
-                <a:tc>
-                  <a:txBody>
-                    <a:bodyPr/>
-                    <a:lstStyle/>
-                    <a:p>
-                      <a:pPr algn="l" indent="0" marL="0">
-                        <a:buNone/>
-                      </a:pPr>
-                      <a:r>
-                        <a:rPr lang="en-US" sz="1200" dirty="0">
-                          <a:solidFill>
-                            <a:srgbClr val="1F2937"/>
-                          </a:solidFill>
-                        </a:rPr>
-                        <a:t>build</a:t>
-                      </a:r>
-                      <a:endParaRPr lang="en-US" sz="1200" dirty="0"/>
-                    </a:p>
-                  </a:txBody>
-                  <a:tcPr marL="76200" marR="76200" marT="38100" marB="38100" anchor="ctr">
-                    <a:lnL w="12700" cap="flat" cmpd="sng" algn="ctr">
-                      <a:solidFill>
-                        <a:srgbClr val="FFFFFF"/>
-                      </a:solidFill>
-                      <a:prstDash val="solid"/>
-                      <a:round/>
-                      <a:headEnd type="none" w="med" len="med"/>
-                      <a:tailEnd type="none" w="med" len="med"/>
-                    </a:lnL>
-                    <a:lnR w="12700" cap="flat" cmpd="sng" algn="ctr">
-                      <a:solidFill>
-                        <a:srgbClr val="FFFFFF"/>
-                      </a:solidFill>
-                      <a:prstDash val="solid"/>
-                      <a:round/>
-                      <a:headEnd type="none" w="med" len="med"/>
-                      <a:tailEnd type="none" w="med" len="med"/>
-                    </a:lnR>
-                    <a:lnT w="12700" cap="flat" cmpd="sng" algn="ctr">
-                      <a:solidFill>
-                        <a:srgbClr val="FFFFFF"/>
-                      </a:solidFill>
-                      <a:prstDash val="solid"/>
-                      <a:round/>
-                      <a:headEnd type="none" w="med" len="med"/>
-                      <a:tailEnd type="none" w="med" len="med"/>
-                    </a:lnT>
-                    <a:lnB w="12700" cap="flat" cmpd="sng" algn="ctr">
-                      <a:solidFill>
-                        <a:srgbClr val="FFFFFF"/>
-                      </a:solidFill>
-                      <a:prstDash val="solid"/>
-                      <a:round/>
-                      <a:headEnd type="none" w="med" len="med"/>
-                      <a:tailEnd type="none" w="med" len="med"/>
-                    </a:lnB>
-                    <a:solidFill>
-                      <a:srgbClr val="F1F5F9"/>
-                    </a:solidFill>
-                  </a:tcPr>
-                </a:tc>
-              </a:tr>
-              <a:tr h="420624">
-                <a:tc>
-                  <a:txBody>
-                    <a:bodyPr/>
-                    <a:lstStyle/>
-                    <a:p>
-                      <a:pPr algn="l" indent="0" marL="0">
-                        <a:buNone/>
-                      </a:pPr>
-                      <a:r>
-                        <a:rPr lang="en-US" sz="1200" dirty="0">
-                          <a:solidFill>
-                            <a:srgbClr val="1F2937"/>
-                          </a:solidFill>
-                        </a:rPr>
-                        <a:t>Secret scanning</a:t>
-                      </a:r>
-                      <a:endParaRPr lang="en-US" sz="1200" dirty="0"/>
-                    </a:p>
-                  </a:txBody>
-                  <a:tcPr marL="76200" marR="76200" marT="38100" marB="38100" anchor="ctr">
-                    <a:lnL w="12700" cap="flat" cmpd="sng" algn="ctr">
-                      <a:solidFill>
-                        <a:srgbClr val="FFFFFF"/>
-                      </a:solidFill>
-                      <a:prstDash val="solid"/>
-                      <a:round/>
-                      <a:headEnd type="none" w="med" len="med"/>
-                      <a:tailEnd type="none" w="med" len="med"/>
-                    </a:lnL>
-                    <a:lnR w="12700" cap="flat" cmpd="sng" algn="ctr">
-                      <a:solidFill>
-                        <a:srgbClr val="FFFFFF"/>
-                      </a:solidFill>
-                      <a:prstDash val="solid"/>
-                      <a:round/>
-                      <a:headEnd type="none" w="med" len="med"/>
-                      <a:tailEnd type="none" w="med" len="med"/>
-                    </a:lnR>
-                    <a:lnT w="12700" cap="flat" cmpd="sng" algn="ctr">
-                      <a:solidFill>
-                        <a:srgbClr val="FFFFFF"/>
-                      </a:solidFill>
-                      <a:prstDash val="solid"/>
-                      <a:round/>
-                      <a:headEnd type="none" w="med" len="med"/>
-                      <a:tailEnd type="none" w="med" len="med"/>
-                    </a:lnT>
-                    <a:lnB w="12700" cap="flat" cmpd="sng" algn="ctr">
-                      <a:solidFill>
-                        <a:srgbClr val="FFFFFF"/>
-                      </a:solidFill>
-                      <a:prstDash val="solid"/>
-                      <a:round/>
-                      <a:headEnd type="none" w="med" len="med"/>
-                      <a:tailEnd type="none" w="med" len="med"/>
-                    </a:lnB>
-                    <a:solidFill>
-                      <a:srgbClr val="E8EDF3"/>
-                    </a:solidFill>
-                  </a:tcPr>
-                </a:tc>
-                <a:tc>
-                  <a:txBody>
-                    <a:bodyPr/>
-                    <a:lstStyle/>
-                    <a:p>
-                      <a:pPr algn="l" indent="0" marL="0">
-                        <a:buNone/>
-                      </a:pPr>
-                      <a:r>
-                        <a:rPr lang="en-US" sz="1200" dirty="0">
-                          <a:solidFill>
-                            <a:srgbClr val="1F2937"/>
-                          </a:solidFill>
-                        </a:rPr>
-                        <a:t>secrets in code/history</a:t>
-                      </a:r>
-                      <a:endParaRPr lang="en-US" sz="1200" dirty="0"/>
-                    </a:p>
-                  </a:txBody>
-                  <a:tcPr marL="76200" marR="76200" marT="38100" marB="38100" anchor="ctr">
-                    <a:lnL w="12700" cap="flat" cmpd="sng" algn="ctr">
-                      <a:solidFill>
-                        <a:srgbClr val="FFFFFF"/>
-                      </a:solidFill>
-                      <a:prstDash val="solid"/>
-                      <a:round/>
-                      <a:headEnd type="none" w="med" len="med"/>
-                      <a:tailEnd type="none" w="med" len="med"/>
-                    </a:lnL>
-                    <a:lnR w="12700" cap="flat" cmpd="sng" algn="ctr">
-                      <a:solidFill>
-                        <a:srgbClr val="FFFFFF"/>
-                      </a:solidFill>
-                      <a:prstDash val="solid"/>
-                      <a:round/>
-                      <a:headEnd type="none" w="med" len="med"/>
-                      <a:tailEnd type="none" w="med" len="med"/>
-                    </a:lnR>
-                    <a:lnT w="12700" cap="flat" cmpd="sng" algn="ctr">
-                      <a:solidFill>
-                        <a:srgbClr val="FFFFFF"/>
-                      </a:solidFill>
-                      <a:prstDash val="solid"/>
-                      <a:round/>
-                      <a:headEnd type="none" w="med" len="med"/>
-                      <a:tailEnd type="none" w="med" len="med"/>
-                    </a:lnT>
-                    <a:lnB w="12700" cap="flat" cmpd="sng" algn="ctr">
-                      <a:solidFill>
-                        <a:srgbClr val="FFFFFF"/>
-                      </a:solidFill>
-                      <a:prstDash val="solid"/>
-                      <a:round/>
-                      <a:headEnd type="none" w="med" len="med"/>
-                      <a:tailEnd type="none" w="med" len="med"/>
-                    </a:lnB>
-                    <a:solidFill>
-                      <a:srgbClr val="E8EDF3"/>
-                    </a:solidFill>
-                  </a:tcPr>
-                </a:tc>
-                <a:tc>
-                  <a:txBody>
-                    <a:bodyPr/>
-                    <a:lstStyle/>
-                    <a:p>
-                      <a:pPr algn="l" indent="0" marL="0">
-                        <a:buNone/>
-                      </a:pPr>
-                      <a:r>
-                        <a:rPr lang="en-US" sz="1200" dirty="0">
-                          <a:solidFill>
-                            <a:srgbClr val="1F2937"/>
-                          </a:solidFill>
-                        </a:rPr>
-                        <a:t>commit/CI</a:t>
-                      </a:r>
-                      <a:endParaRPr lang="en-US" sz="1200" dirty="0"/>
-                    </a:p>
-                  </a:txBody>
-                  <a:tcPr marL="76200" marR="76200" marT="38100" marB="38100" anchor="ctr">
-                    <a:lnL w="12700" cap="flat" cmpd="sng" algn="ctr">
-                      <a:solidFill>
-                        <a:srgbClr val="FFFFFF"/>
-                      </a:solidFill>
-                      <a:prstDash val="solid"/>
-                      <a:round/>
-                      <a:headEnd type="none" w="med" len="med"/>
-                      <a:tailEnd type="none" w="med" len="med"/>
-                    </a:lnL>
-                    <a:lnR w="12700" cap="flat" cmpd="sng" algn="ctr">
-                      <a:solidFill>
-                        <a:srgbClr val="FFFFFF"/>
-                      </a:solidFill>
-                      <a:prstDash val="solid"/>
-                      <a:round/>
-                      <a:headEnd type="none" w="med" len="med"/>
-                      <a:tailEnd type="none" w="med" len="med"/>
-                    </a:lnR>
-                    <a:lnT w="12700" cap="flat" cmpd="sng" algn="ctr">
-                      <a:solidFill>
-                        <a:srgbClr val="FFFFFF"/>
-                      </a:solidFill>
-                      <a:prstDash val="solid"/>
-                      <a:round/>
-                      <a:headEnd type="none" w="med" len="med"/>
-                      <a:tailEnd type="none" w="med" len="med"/>
-                    </a:lnT>
-                    <a:lnB w="12700" cap="flat" cmpd="sng" algn="ctr">
-                      <a:solidFill>
-                        <a:srgbClr val="FFFFFF"/>
-                      </a:solidFill>
-                      <a:prstDash val="solid"/>
-                      <a:round/>
-                      <a:headEnd type="none" w="med" len="med"/>
-                      <a:tailEnd type="none" w="med" len="med"/>
-                    </a:lnB>
-                    <a:solidFill>
-                      <a:srgbClr val="E8EDF3"/>
-                    </a:solidFill>
-                  </a:tcPr>
-                </a:tc>
-              </a:tr>
-              <a:tr h="420624">
-                <a:tc>
-                  <a:txBody>
-                    <a:bodyPr/>
-                    <a:lstStyle/>
-                    <a:p>
-                      <a:pPr algn="l" indent="0" marL="0">
-                        <a:buNone/>
-                      </a:pPr>
-                      <a:r>
-                        <a:rPr lang="en-US" sz="1200" dirty="0">
-                          <a:solidFill>
-                            <a:srgbClr val="1F2937"/>
-                          </a:solidFill>
-                        </a:rPr>
-                        <a:t>Fuzzing</a:t>
-                      </a:r>
-                      <a:endParaRPr lang="en-US" sz="1200" dirty="0"/>
-                    </a:p>
-                  </a:txBody>
-                  <a:tcPr marL="76200" marR="76200" marT="38100" marB="38100" anchor="ctr">
-                    <a:lnL w="12700" cap="flat" cmpd="sng" algn="ctr">
-                      <a:solidFill>
-                        <a:srgbClr val="FFFFFF"/>
-                      </a:solidFill>
-                      <a:prstDash val="solid"/>
-                      <a:round/>
-                      <a:headEnd type="none" w="med" len="med"/>
-                      <a:tailEnd type="none" w="med" len="med"/>
-                    </a:lnL>
-                    <a:lnR w="12700" cap="flat" cmpd="sng" algn="ctr">
-                      <a:solidFill>
-                        <a:srgbClr val="FFFFFF"/>
-                      </a:solidFill>
-                      <a:prstDash val="solid"/>
-                      <a:round/>
-                      <a:headEnd type="none" w="med" len="med"/>
-                      <a:tailEnd type="none" w="med" len="med"/>
-                    </a:lnR>
-                    <a:lnT w="12700" cap="flat" cmpd="sng" algn="ctr">
-                      <a:solidFill>
-                        <a:srgbClr val="FFFFFF"/>
-                      </a:solidFill>
-                      <a:prstDash val="solid"/>
-                      <a:round/>
-                      <a:headEnd type="none" w="med" len="med"/>
-                      <a:tailEnd type="none" w="med" len="med"/>
-                    </a:lnT>
-                    <a:lnB w="12700" cap="flat" cmpd="sng" algn="ctr">
-                      <a:solidFill>
-                        <a:srgbClr val="FFFFFF"/>
-                      </a:solidFill>
-                      <a:prstDash val="solid"/>
-                      <a:round/>
-                      <a:headEnd type="none" w="med" len="med"/>
-                      <a:tailEnd type="none" w="med" len="med"/>
-                    </a:lnB>
-                    <a:solidFill>
-                      <a:srgbClr val="F1F5F9"/>
-                    </a:solidFill>
-                  </a:tcPr>
-                </a:tc>
-                <a:tc>
-                  <a:txBody>
-                    <a:bodyPr/>
-                    <a:lstStyle/>
-                    <a:p>
-                      <a:pPr algn="l" indent="0" marL="0">
-                        <a:buNone/>
-                      </a:pPr>
-                      <a:r>
-                        <a:rPr lang="en-US" sz="1200" dirty="0">
-                          <a:solidFill>
-                            <a:srgbClr val="1F2937"/>
-                          </a:solidFill>
-                        </a:rPr>
-                        <a:t>runtime + random inputs</a:t>
-                      </a:r>
-                      <a:endParaRPr lang="en-US" sz="1200" dirty="0"/>
-                    </a:p>
-                  </a:txBody>
-                  <a:tcPr marL="76200" marR="76200" marT="38100" marB="38100" anchor="ctr">
-                    <a:lnL w="12700" cap="flat" cmpd="sng" algn="ctr">
-                      <a:solidFill>
-                        <a:srgbClr val="FFFFFF"/>
-                      </a:solidFill>
-                      <a:prstDash val="solid"/>
-                      <a:round/>
-                      <a:headEnd type="none" w="med" len="med"/>
-                      <a:tailEnd type="none" w="med" len="med"/>
-                    </a:lnL>
-                    <a:lnR w="12700" cap="flat" cmpd="sng" algn="ctr">
-                      <a:solidFill>
-                        <a:srgbClr val="FFFFFF"/>
-                      </a:solidFill>
-                      <a:prstDash val="solid"/>
-                      <a:round/>
-                      <a:headEnd type="none" w="med" len="med"/>
-                      <a:tailEnd type="none" w="med" len="med"/>
-                    </a:lnR>
-                    <a:lnT w="12700" cap="flat" cmpd="sng" algn="ctr">
-                      <a:solidFill>
-                        <a:srgbClr val="FFFFFF"/>
-                      </a:solidFill>
-                      <a:prstDash val="solid"/>
-                      <a:round/>
-                      <a:headEnd type="none" w="med" len="med"/>
-                      <a:tailEnd type="none" w="med" len="med"/>
-                    </a:lnT>
-                    <a:lnB w="12700" cap="flat" cmpd="sng" algn="ctr">
-                      <a:solidFill>
-                        <a:srgbClr val="FFFFFF"/>
-                      </a:solidFill>
-                      <a:prstDash val="solid"/>
-                      <a:round/>
-                      <a:headEnd type="none" w="med" len="med"/>
-                      <a:tailEnd type="none" w="med" len="med"/>
-                    </a:lnB>
-                    <a:solidFill>
-                      <a:srgbClr val="F1F5F9"/>
-                    </a:solidFill>
-                  </a:tcPr>
-                </a:tc>
-                <a:tc>
-                  <a:txBody>
-                    <a:bodyPr/>
-                    <a:lstStyle/>
-                    <a:p>
-                      <a:pPr algn="l" indent="0" marL="0">
-                        <a:buNone/>
-                      </a:pPr>
-                      <a:r>
-                        <a:rPr lang="en-US" sz="1200" dirty="0">
-                          <a:solidFill>
-                            <a:srgbClr val="1F2937"/>
-                          </a:solidFill>
-                        </a:rPr>
-                        <a:t>build (compiled harness, not the text)</a:t>
-                      </a:r>
-                      <a:endParaRPr lang="en-US" sz="1200" dirty="0"/>
-                    </a:p>
-                  </a:txBody>
-                  <a:tcPr marL="76200" marR="76200" marT="38100" marB="38100" anchor="ctr">
-                    <a:lnL w="12700" cap="flat" cmpd="sng" algn="ctr">
-                      <a:solidFill>
-                        <a:srgbClr val="FFFFFF"/>
-                      </a:solidFill>
-                      <a:prstDash val="solid"/>
-                      <a:round/>
-                      <a:headEnd type="none" w="med" len="med"/>
-                      <a:tailEnd type="none" w="med" len="med"/>
-                    </a:lnL>
-                    <a:lnR w="12700" cap="flat" cmpd="sng" algn="ctr">
-                      <a:solidFill>
-                        <a:srgbClr val="FFFFFF"/>
-                      </a:solidFill>
-                      <a:prstDash val="solid"/>
-                      <a:round/>
-                      <a:headEnd type="none" w="med" len="med"/>
-                      <a:tailEnd type="none" w="med" len="med"/>
-                    </a:lnR>
-                    <a:lnT w="12700" cap="flat" cmpd="sng" algn="ctr">
-                      <a:solidFill>
-                        <a:srgbClr val="FFFFFF"/>
-                      </a:solidFill>
-                      <a:prstDash val="solid"/>
-                      <a:round/>
-                      <a:headEnd type="none" w="med" len="med"/>
-                      <a:tailEnd type="none" w="med" len="med"/>
-                    </a:lnT>
-                    <a:lnB w="12700" cap="flat" cmpd="sng" algn="ctr">
-                      <a:solidFill>
-                        <a:srgbClr val="FFFFFF"/>
-                      </a:solidFill>
-                      <a:prstDash val="solid"/>
-                      <a:round/>
-                      <a:headEnd type="none" w="med" len="med"/>
-                      <a:tailEnd type="none" w="med" len="med"/>
-                    </a:lnB>
-                    <a:solidFill>
-                      <a:srgbClr val="F1F5F9"/>
-                    </a:solidFill>
-                  </a:tcPr>
-                </a:tc>
-              </a:tr>
-            </a:tbl>
-          </a:graphicData>
-        </a:graphic>
-      </p:graphicFrame>
-      <p:sp>
-        <p:nvSpPr>
-          <p:cNvPr id="6" name="Text 2"/>
+      <p:sp>
+        <p:nvSpPr>
+          <p:cNvPr id="5" name="Text 2"/>
+          <p:cNvSpPr/>
+          <p:nvPr/>
+        </p:nvSpPr>
+        <p:spPr>
+          <a:xfrm>
+            <a:off x="548640" y="1325880"/>
+            <a:ext cx="8046720" cy="1371600"/>
+          </a:xfrm>
+          <a:prstGeom prst="rect">
+            <a:avLst/>
+          </a:prstGeom>
+          <a:noFill/>
+          <a:ln/>
+        </p:spPr>
+        <p:txBody>
+          <a:bodyPr wrap="square" lIns="0" tIns="0" rIns="0" bIns="0" rtlCol="0" anchor="t">
+            <a:normAutofit/>
+          </a:bodyPr>
+          <a:lstStyle/>
+          <a:p>
+            <a:pPr indent="0" marL="0">
+              <a:buNone/>
+            </a:pPr>
+            <a:r>
+              <a:rPr lang="en-US" sz="1400" dirty="0">
+                <a:solidFill>
+                  <a:srgbClr val="1F2937"/>
+                </a:solidFill>
+                <a:latin typeface="Calibri" pitchFamily="34" charset="0"/>
+                <a:ea typeface="Calibri" pitchFamily="34" charset="-122"/>
+                <a:cs typeface="Calibri" pitchFamily="34" charset="-120"/>
+              </a:rPr>
+              <a:t>See diagram: A left-to-right software development pipeline with five stages: write code, commit, build, deploy, run. Four scanners are placed at the stage each one actually operates on, and under each is written what it cannot see, grounded in the actual CWEs found in this week's vulnerable-repo/app.py and harness.c. (web only)</a:t>
+            </a:r>
+            <a:endParaRPr lang="en-US" sz="1400" dirty="0"/>
+          </a:p>
+        </p:txBody>
+      </p:sp>
+      <p:sp>
+        <p:nvSpPr>
+          <p:cNvPr id="6" name="Text 3"/>
           <p:cNvSpPr/>
           <p:nvPr/>
         </p:nvSpPr>
